--- a/作図.pptx
+++ b/作図.pptx
@@ -3876,8 +3876,8 @@
         </p:nvSpPr>
         <p:spPr>
           <a:xfrm>
-            <a:off x="1377222" y="2413245"/>
-            <a:ext cx="2772268" cy="3071465"/>
+            <a:off x="1199863" y="2413245"/>
+            <a:ext cx="2949627" cy="3071465"/>
           </a:xfrm>
           <a:prstGeom prst="rect">
             <a:avLst/>
@@ -3980,7 +3980,7 @@
         </p:nvSpPr>
         <p:spPr>
           <a:xfrm>
-            <a:off x="3212042" y="4529179"/>
+            <a:off x="3212042" y="4664352"/>
             <a:ext cx="215153" cy="217074"/>
           </a:xfrm>
           <a:prstGeom prst="ellipse">
@@ -4032,7 +4032,7 @@
         </p:nvSpPr>
         <p:spPr>
           <a:xfrm>
-            <a:off x="3212041" y="3061419"/>
+            <a:off x="3204357" y="3196592"/>
             <a:ext cx="215153" cy="217074"/>
           </a:xfrm>
           <a:prstGeom prst="ellipse">
@@ -4084,7 +4084,7 @@
         </p:nvSpPr>
         <p:spPr>
           <a:xfrm>
-            <a:off x="3111868" y="4746252"/>
+            <a:off x="3111868" y="4881425"/>
             <a:ext cx="415498" cy="230832"/>
           </a:xfrm>
           <a:prstGeom prst="rect">
@@ -4119,7 +4119,7 @@
         </p:nvSpPr>
         <p:spPr>
           <a:xfrm>
-            <a:off x="3050396" y="3296738"/>
+            <a:off x="3050396" y="3431911"/>
             <a:ext cx="530915" cy="230832"/>
           </a:xfrm>
           <a:prstGeom prst="rect">
@@ -4246,7 +4246,7 @@
         </p:nvSpPr>
         <p:spPr>
           <a:xfrm>
-            <a:off x="1687393" y="3476656"/>
+            <a:off x="1686882" y="2888261"/>
             <a:ext cx="215153" cy="217074"/>
           </a:xfrm>
           <a:prstGeom prst="ellipse">
@@ -4298,8 +4298,8 @@
         </p:nvSpPr>
         <p:spPr>
           <a:xfrm>
-            <a:off x="1590983" y="3754948"/>
-            <a:ext cx="415498" cy="230832"/>
+            <a:off x="1352444" y="3890121"/>
+            <a:ext cx="877163" cy="230832"/>
           </a:xfrm>
           <a:prstGeom prst="rect">
             <a:avLst/>
@@ -4313,9 +4313,10 @@
           <a:lstStyle/>
           <a:p>
             <a:r>
-              <a:rPr kumimoji="1" lang="ja-JP" altLang="en-US" sz="900" b="1"/>
-              <a:t>作者</a:t>
-            </a:r>
+              <a:rPr lang="ja-JP" altLang="en-US" sz="900" b="1"/>
+              <a:t>ファシリティ</a:t>
+            </a:r>
+            <a:endParaRPr kumimoji="1" lang="ja-JP" altLang="en-US" sz="900" b="1"/>
           </a:p>
         </p:txBody>
       </p:sp>
@@ -4333,7 +4334,7 @@
         </p:nvSpPr>
         <p:spPr>
           <a:xfrm>
-            <a:off x="1692338" y="4237562"/>
+            <a:off x="1692338" y="4372735"/>
             <a:ext cx="215153" cy="217074"/>
           </a:xfrm>
           <a:prstGeom prst="ellipse">
@@ -4385,7 +4386,7 @@
         </p:nvSpPr>
         <p:spPr>
           <a:xfrm>
-            <a:off x="1590983" y="4484306"/>
+            <a:off x="1590983" y="4595626"/>
             <a:ext cx="415498" cy="230832"/>
           </a:xfrm>
           <a:prstGeom prst="rect">
@@ -4420,7 +4421,7 @@
         </p:nvSpPr>
         <p:spPr>
           <a:xfrm>
-            <a:off x="3196673" y="3768706"/>
+            <a:off x="3196673" y="3930472"/>
             <a:ext cx="215153" cy="217074"/>
           </a:xfrm>
           <a:prstGeom prst="ellipse">
@@ -4472,7 +4473,7 @@
         </p:nvSpPr>
         <p:spPr>
           <a:xfrm>
-            <a:off x="3050396" y="4011826"/>
+            <a:off x="3050396" y="4146999"/>
             <a:ext cx="530915" cy="230832"/>
           </a:xfrm>
           <a:prstGeom prst="rect">
@@ -4605,8 +4606,8 @@
         </p:nvCxnSpPr>
         <p:spPr>
           <a:xfrm flipH="1" flipV="1">
-            <a:off x="1902546" y="3585193"/>
-            <a:ext cx="1294127" cy="292050"/>
+            <a:off x="1902035" y="2996798"/>
+            <a:ext cx="1294638" cy="1042211"/>
           </a:xfrm>
           <a:prstGeom prst="straightConnector1">
             <a:avLst/>
@@ -4651,8 +4652,8 @@
         </p:nvCxnSpPr>
         <p:spPr>
           <a:xfrm flipH="1" flipV="1">
-            <a:off x="1902546" y="3585193"/>
-            <a:ext cx="1309496" cy="1052523"/>
+            <a:off x="1902035" y="2996798"/>
+            <a:ext cx="1310007" cy="1776091"/>
           </a:xfrm>
           <a:prstGeom prst="straightConnector1">
             <a:avLst/>
@@ -4696,9 +4697,9 @@
           <p:nvPr/>
         </p:nvCxnSpPr>
         <p:spPr>
-          <a:xfrm flipH="1">
-            <a:off x="1902546" y="3169956"/>
-            <a:ext cx="1309495" cy="415237"/>
+          <a:xfrm flipH="1" flipV="1">
+            <a:off x="1902035" y="2996798"/>
+            <a:ext cx="1302322" cy="308331"/>
           </a:xfrm>
           <a:prstGeom prst="straightConnector1">
             <a:avLst/>
@@ -4743,7 +4744,7 @@
         </p:nvCxnSpPr>
         <p:spPr>
           <a:xfrm flipH="1" flipV="1">
-            <a:off x="1907491" y="4346099"/>
+            <a:off x="1907491" y="4481272"/>
             <a:ext cx="1304551" cy="291617"/>
           </a:xfrm>
           <a:prstGeom prst="straightConnector1">
@@ -4788,8 +4789,8 @@
         </p:nvCxnSpPr>
         <p:spPr>
           <a:xfrm flipH="1" flipV="1">
-            <a:off x="3411826" y="3877243"/>
-            <a:ext cx="15369" cy="760473"/>
+            <a:off x="3411826" y="4039009"/>
+            <a:ext cx="15369" cy="733880"/>
           </a:xfrm>
           <a:prstGeom prst="curvedConnector3">
             <a:avLst>
@@ -4836,12 +4837,12 @@
         </p:nvCxnSpPr>
         <p:spPr>
           <a:xfrm flipH="1" flipV="1">
-            <a:off x="3427194" y="3169956"/>
-            <a:ext cx="1" cy="1467760"/>
+            <a:off x="3419510" y="3305129"/>
+            <a:ext cx="7685" cy="1467760"/>
           </a:xfrm>
           <a:prstGeom prst="curvedConnector3">
             <a:avLst>
-              <a:gd name="adj1" fmla="val -22860000000"/>
+              <a:gd name="adj1" fmla="val -2974626"/>
             </a:avLst>
           </a:prstGeom>
           <a:ln>
@@ -5398,8 +5399,8 @@
         </p:nvCxnSpPr>
         <p:spPr>
           <a:xfrm>
-            <a:off x="3395687" y="4714463"/>
-            <a:ext cx="2338587" cy="678729"/>
+            <a:off x="3395687" y="4849636"/>
+            <a:ext cx="2338587" cy="543556"/>
           </a:xfrm>
           <a:prstGeom prst="straightConnector1">
             <a:avLst/>
@@ -5853,7 +5854,7 @@
         <p:spPr>
           <a:xfrm flipV="1">
             <a:off x="1875983" y="3828900"/>
-            <a:ext cx="2656809" cy="593946"/>
+            <a:ext cx="2656809" cy="729119"/>
           </a:xfrm>
           <a:prstGeom prst="straightConnector1">
             <a:avLst/>
@@ -5896,7 +5897,7 @@
         <p:spPr>
           <a:xfrm flipV="1">
             <a:off x="3395687" y="3828900"/>
-            <a:ext cx="1137105" cy="885563"/>
+            <a:ext cx="1137105" cy="1020736"/>
           </a:xfrm>
           <a:prstGeom prst="straightConnector1">
             <a:avLst/>
@@ -5938,8 +5939,8 @@
         </p:nvCxnSpPr>
         <p:spPr>
           <a:xfrm>
-            <a:off x="1871038" y="3661940"/>
-            <a:ext cx="2661754" cy="166960"/>
+            <a:off x="1870527" y="3073545"/>
+            <a:ext cx="2662265" cy="755355"/>
           </a:xfrm>
           <a:prstGeom prst="straightConnector1">
             <a:avLst/>
@@ -5982,7 +5983,7 @@
         <p:spPr>
           <a:xfrm flipV="1">
             <a:off x="3380318" y="3828900"/>
-            <a:ext cx="1152474" cy="125090"/>
+            <a:ext cx="1152474" cy="286856"/>
           </a:xfrm>
           <a:prstGeom prst="straightConnector1">
             <a:avLst/>
@@ -6024,8 +6025,8 @@
         </p:nvCxnSpPr>
         <p:spPr>
           <a:xfrm>
-            <a:off x="3395686" y="3246703"/>
-            <a:ext cx="1137106" cy="582197"/>
+            <a:off x="3388002" y="3381876"/>
+            <a:ext cx="1144790" cy="447024"/>
           </a:xfrm>
           <a:prstGeom prst="straightConnector1">
             <a:avLst/>
@@ -6308,8 +6309,8 @@
         </p:nvCxnSpPr>
         <p:spPr>
           <a:xfrm>
-            <a:off x="3380318" y="3953990"/>
-            <a:ext cx="2353956" cy="1439202"/>
+            <a:off x="3380318" y="4115756"/>
+            <a:ext cx="2353956" cy="1277436"/>
           </a:xfrm>
           <a:prstGeom prst="straightConnector1">
             <a:avLst/>
@@ -6356,8 +6357,8 @@
         </p:nvCxnSpPr>
         <p:spPr>
           <a:xfrm>
-            <a:off x="3395686" y="3246703"/>
-            <a:ext cx="2338588" cy="2146489"/>
+            <a:off x="3388002" y="3381876"/>
+            <a:ext cx="2346272" cy="2011316"/>
           </a:xfrm>
           <a:prstGeom prst="straightConnector1">
             <a:avLst/>
@@ -6404,56 +6405,8 @@
         </p:nvCxnSpPr>
         <p:spPr>
           <a:xfrm>
-            <a:off x="1875983" y="4422846"/>
-            <a:ext cx="3858291" cy="970346"/>
-          </a:xfrm>
-          <a:prstGeom prst="straightConnector1">
-            <a:avLst/>
-          </a:prstGeom>
-          <a:ln>
-            <a:solidFill>
-              <a:schemeClr val="accent1"/>
-            </a:solidFill>
-            <a:prstDash val="dash"/>
-            <a:headEnd type="triangle"/>
-            <a:tailEnd type="none"/>
-          </a:ln>
-        </p:spPr>
-        <p:style>
-          <a:lnRef idx="2">
-            <a:schemeClr val="accent1"/>
-          </a:lnRef>
-          <a:fillRef idx="0">
-            <a:schemeClr val="accent1"/>
-          </a:fillRef>
-          <a:effectRef idx="1">
-            <a:schemeClr val="accent1"/>
-          </a:effectRef>
-          <a:fontRef idx="minor">
-            <a:schemeClr val="tx1"/>
-          </a:fontRef>
-        </p:style>
-      </p:cxnSp>
-      <p:cxnSp>
-        <p:nvCxnSpPr>
-          <p:cNvPr id="39" name="直線矢印コネクタ 38">
-            <a:extLst>
-              <a:ext uri="{FF2B5EF4-FFF2-40B4-BE49-F238E27FC236}">
-                <a16:creationId xmlns:a16="http://schemas.microsoft.com/office/drawing/2014/main" id="{D88DB10F-8AF1-610D-94A4-17B46889A200}"/>
-              </a:ext>
-            </a:extLst>
-          </p:cNvPr>
-          <p:cNvCxnSpPr>
-            <a:cxnSpLocks/>
-            <a:stCxn id="12" idx="5"/>
-            <a:endCxn id="33" idx="1"/>
-          </p:cNvCxnSpPr>
-          <p:nvPr/>
-        </p:nvCxnSpPr>
-        <p:spPr>
-          <a:xfrm>
-            <a:off x="1871038" y="3661940"/>
-            <a:ext cx="3863236" cy="1731252"/>
+            <a:off x="1875983" y="4558019"/>
+            <a:ext cx="3858291" cy="835173"/>
           </a:xfrm>
           <a:prstGeom prst="straightConnector1">
             <a:avLst/>
@@ -6551,6 +6504,228 @@
             <a:avLst>
               <a:gd name="adj1" fmla="val 18393"/>
             </a:avLst>
+          </a:prstGeom>
+          <a:ln>
+            <a:solidFill>
+              <a:schemeClr val="accent2"/>
+            </a:solidFill>
+            <a:tailEnd type="triangle"/>
+          </a:ln>
+        </p:spPr>
+        <p:style>
+          <a:lnRef idx="2">
+            <a:schemeClr val="accent1"/>
+          </a:lnRef>
+          <a:fillRef idx="0">
+            <a:schemeClr val="accent1"/>
+          </a:fillRef>
+          <a:effectRef idx="1">
+            <a:schemeClr val="accent1"/>
+          </a:effectRef>
+          <a:fontRef idx="minor">
+            <a:schemeClr val="tx1"/>
+          </a:fontRef>
+        </p:style>
+      </p:cxnSp>
+      <p:sp>
+        <p:nvSpPr>
+          <p:cNvPr id="16" name="円/楕円 15">
+            <a:extLst>
+              <a:ext uri="{FF2B5EF4-FFF2-40B4-BE49-F238E27FC236}">
+                <a16:creationId xmlns:a16="http://schemas.microsoft.com/office/drawing/2014/main" id="{DD80A651-8745-6F6B-991A-E4B20BD60B9C}"/>
+              </a:ext>
+            </a:extLst>
+          </p:cNvPr>
+          <p:cNvSpPr/>
+          <p:nvPr/>
+        </p:nvSpPr>
+        <p:spPr>
+          <a:xfrm>
+            <a:off x="1681426" y="3630498"/>
+            <a:ext cx="215153" cy="217074"/>
+          </a:xfrm>
+          <a:prstGeom prst="ellipse">
+            <a:avLst/>
+          </a:prstGeom>
+          <a:solidFill>
+            <a:schemeClr val="accent1"/>
+          </a:solidFill>
+          <a:ln>
+            <a:noFill/>
+          </a:ln>
+        </p:spPr>
+        <p:style>
+          <a:lnRef idx="2">
+            <a:schemeClr val="accent1">
+              <a:shade val="15000"/>
+            </a:schemeClr>
+          </a:lnRef>
+          <a:fillRef idx="1">
+            <a:schemeClr val="accent1"/>
+          </a:fillRef>
+          <a:effectRef idx="0">
+            <a:schemeClr val="accent1"/>
+          </a:effectRef>
+          <a:fontRef idx="minor">
+            <a:schemeClr val="lt1"/>
+          </a:fontRef>
+        </p:style>
+        <p:txBody>
+          <a:bodyPr rtlCol="0" anchor="ctr"/>
+          <a:lstStyle/>
+          <a:p>
+            <a:pPr algn="ctr"/>
+            <a:endParaRPr kumimoji="1" lang="ja-JP" altLang="en-US"/>
+          </a:p>
+        </p:txBody>
+      </p:sp>
+      <p:sp>
+        <p:nvSpPr>
+          <p:cNvPr id="41" name="テキスト ボックス 40">
+            <a:extLst>
+              <a:ext uri="{FF2B5EF4-FFF2-40B4-BE49-F238E27FC236}">
+                <a16:creationId xmlns:a16="http://schemas.microsoft.com/office/drawing/2014/main" id="{4B2C1AF6-26E7-72E8-4FE8-DA49BFAF74ED}"/>
+              </a:ext>
+            </a:extLst>
+          </p:cNvPr>
+          <p:cNvSpPr txBox="1"/>
+          <p:nvPr/>
+        </p:nvSpPr>
+        <p:spPr>
+          <a:xfrm>
+            <a:off x="1587221" y="3118496"/>
+            <a:ext cx="415498" cy="230832"/>
+          </a:xfrm>
+          <a:prstGeom prst="rect">
+            <a:avLst/>
+          </a:prstGeom>
+          <a:noFill/>
+        </p:spPr>
+        <p:txBody>
+          <a:bodyPr wrap="none" rtlCol="0">
+            <a:spAutoFit/>
+          </a:bodyPr>
+          <a:lstStyle/>
+          <a:p>
+            <a:r>
+              <a:rPr kumimoji="1" lang="ja-JP" altLang="en-US" sz="900" b="1"/>
+              <a:t>作者</a:t>
+            </a:r>
+          </a:p>
+        </p:txBody>
+      </p:sp>
+      <p:cxnSp>
+        <p:nvCxnSpPr>
+          <p:cNvPr id="49" name="直線矢印コネクタ 48">
+            <a:extLst>
+              <a:ext uri="{FF2B5EF4-FFF2-40B4-BE49-F238E27FC236}">
+                <a16:creationId xmlns:a16="http://schemas.microsoft.com/office/drawing/2014/main" id="{BE4C6D30-E24E-F09E-F34E-DAD4B7092D5F}"/>
+              </a:ext>
+            </a:extLst>
+          </p:cNvPr>
+          <p:cNvCxnSpPr>
+            <a:cxnSpLocks/>
+            <a:stCxn id="6" idx="2"/>
+            <a:endCxn id="16" idx="6"/>
+          </p:cNvCxnSpPr>
+          <p:nvPr/>
+        </p:nvCxnSpPr>
+        <p:spPr>
+          <a:xfrm flipH="1" flipV="1">
+            <a:off x="1896579" y="3739035"/>
+            <a:ext cx="1315463" cy="1033854"/>
+          </a:xfrm>
+          <a:prstGeom prst="straightConnector1">
+            <a:avLst/>
+          </a:prstGeom>
+          <a:ln>
+            <a:solidFill>
+              <a:schemeClr val="accent2"/>
+            </a:solidFill>
+            <a:tailEnd type="triangle"/>
+          </a:ln>
+        </p:spPr>
+        <p:style>
+          <a:lnRef idx="2">
+            <a:schemeClr val="accent1"/>
+          </a:lnRef>
+          <a:fillRef idx="0">
+            <a:schemeClr val="accent1"/>
+          </a:fillRef>
+          <a:effectRef idx="1">
+            <a:schemeClr val="accent1"/>
+          </a:effectRef>
+          <a:fontRef idx="minor">
+            <a:schemeClr val="tx1"/>
+          </a:fontRef>
+        </p:style>
+      </p:cxnSp>
+      <p:cxnSp>
+        <p:nvCxnSpPr>
+          <p:cNvPr id="58" name="直線矢印コネクタ 57">
+            <a:extLst>
+              <a:ext uri="{FF2B5EF4-FFF2-40B4-BE49-F238E27FC236}">
+                <a16:creationId xmlns:a16="http://schemas.microsoft.com/office/drawing/2014/main" id="{D0019034-84B4-C413-D999-C34999BE2CD7}"/>
+              </a:ext>
+            </a:extLst>
+          </p:cNvPr>
+          <p:cNvCxnSpPr>
+            <a:cxnSpLocks/>
+            <a:stCxn id="16" idx="5"/>
+            <a:endCxn id="64" idx="1"/>
+          </p:cNvCxnSpPr>
+          <p:nvPr/>
+        </p:nvCxnSpPr>
+        <p:spPr>
+          <a:xfrm>
+            <a:off x="1865071" y="3815782"/>
+            <a:ext cx="2667721" cy="13118"/>
+          </a:xfrm>
+          <a:prstGeom prst="straightConnector1">
+            <a:avLst/>
+          </a:prstGeom>
+          <a:ln w="12700">
+            <a:tailEnd type="triangle"/>
+          </a:ln>
+        </p:spPr>
+        <p:style>
+          <a:lnRef idx="2">
+            <a:schemeClr val="accent1"/>
+          </a:lnRef>
+          <a:fillRef idx="0">
+            <a:schemeClr val="accent1"/>
+          </a:fillRef>
+          <a:effectRef idx="1">
+            <a:schemeClr val="accent1"/>
+          </a:effectRef>
+          <a:fontRef idx="minor">
+            <a:schemeClr val="tx1"/>
+          </a:fontRef>
+        </p:style>
+      </p:cxnSp>
+      <p:cxnSp>
+        <p:nvCxnSpPr>
+          <p:cNvPr id="61" name="直線矢印コネクタ 60">
+            <a:extLst>
+              <a:ext uri="{FF2B5EF4-FFF2-40B4-BE49-F238E27FC236}">
+                <a16:creationId xmlns:a16="http://schemas.microsoft.com/office/drawing/2014/main" id="{F369DADD-849B-25F0-17DE-3E0C1348D0C7}"/>
+              </a:ext>
+            </a:extLst>
+          </p:cNvPr>
+          <p:cNvCxnSpPr>
+            <a:cxnSpLocks/>
+            <a:stCxn id="7" idx="2"/>
+            <a:endCxn id="16" idx="6"/>
+          </p:cNvCxnSpPr>
+          <p:nvPr/>
+        </p:nvCxnSpPr>
+        <p:spPr>
+          <a:xfrm flipH="1">
+            <a:off x="1896579" y="3305129"/>
+            <a:ext cx="1307778" cy="433906"/>
+          </a:xfrm>
+          <a:prstGeom prst="straightConnector1">
+            <a:avLst/>
           </a:prstGeom>
           <a:ln>
             <a:solidFill>

--- a/作図.pptx
+++ b/作図.pptx
@@ -6732,6 +6732,102 @@
               <a:schemeClr val="accent2"/>
             </a:solidFill>
             <a:tailEnd type="triangle"/>
+          </a:ln>
+        </p:spPr>
+        <p:style>
+          <a:lnRef idx="2">
+            <a:schemeClr val="accent1"/>
+          </a:lnRef>
+          <a:fillRef idx="0">
+            <a:schemeClr val="accent1"/>
+          </a:fillRef>
+          <a:effectRef idx="1">
+            <a:schemeClr val="accent1"/>
+          </a:effectRef>
+          <a:fontRef idx="minor">
+            <a:schemeClr val="tx1"/>
+          </a:fontRef>
+        </p:style>
+      </p:cxnSp>
+      <p:cxnSp>
+        <p:nvCxnSpPr>
+          <p:cNvPr id="39" name="直線矢印コネクタ 38">
+            <a:extLst>
+              <a:ext uri="{FF2B5EF4-FFF2-40B4-BE49-F238E27FC236}">
+                <a16:creationId xmlns:a16="http://schemas.microsoft.com/office/drawing/2014/main" id="{011DDF5D-128A-9AE7-F2C5-0154A4E16728}"/>
+              </a:ext>
+            </a:extLst>
+          </p:cNvPr>
+          <p:cNvCxnSpPr>
+            <a:cxnSpLocks/>
+            <a:stCxn id="12" idx="5"/>
+            <a:endCxn id="33" idx="1"/>
+          </p:cNvCxnSpPr>
+          <p:nvPr/>
+        </p:nvCxnSpPr>
+        <p:spPr>
+          <a:xfrm>
+            <a:off x="1870527" y="3073545"/>
+            <a:ext cx="3863747" cy="2319647"/>
+          </a:xfrm>
+          <a:prstGeom prst="straightConnector1">
+            <a:avLst/>
+          </a:prstGeom>
+          <a:ln>
+            <a:solidFill>
+              <a:schemeClr val="accent1"/>
+            </a:solidFill>
+            <a:prstDash val="dash"/>
+            <a:headEnd type="triangle"/>
+            <a:tailEnd type="none"/>
+          </a:ln>
+        </p:spPr>
+        <p:style>
+          <a:lnRef idx="2">
+            <a:schemeClr val="accent1"/>
+          </a:lnRef>
+          <a:fillRef idx="0">
+            <a:schemeClr val="accent1"/>
+          </a:fillRef>
+          <a:effectRef idx="1">
+            <a:schemeClr val="accent1"/>
+          </a:effectRef>
+          <a:fontRef idx="minor">
+            <a:schemeClr val="tx1"/>
+          </a:fontRef>
+        </p:style>
+      </p:cxnSp>
+      <p:cxnSp>
+        <p:nvCxnSpPr>
+          <p:cNvPr id="59" name="直線矢印コネクタ 58">
+            <a:extLst>
+              <a:ext uri="{FF2B5EF4-FFF2-40B4-BE49-F238E27FC236}">
+                <a16:creationId xmlns:a16="http://schemas.microsoft.com/office/drawing/2014/main" id="{6DF60F58-3CBB-D2FC-80EC-62211D925621}"/>
+              </a:ext>
+            </a:extLst>
+          </p:cNvPr>
+          <p:cNvCxnSpPr>
+            <a:cxnSpLocks/>
+            <a:stCxn id="16" idx="5"/>
+            <a:endCxn id="33" idx="1"/>
+          </p:cNvCxnSpPr>
+          <p:nvPr/>
+        </p:nvCxnSpPr>
+        <p:spPr>
+          <a:xfrm>
+            <a:off x="1865071" y="3815782"/>
+            <a:ext cx="3869203" cy="1577410"/>
+          </a:xfrm>
+          <a:prstGeom prst="straightConnector1">
+            <a:avLst/>
+          </a:prstGeom>
+          <a:ln>
+            <a:solidFill>
+              <a:schemeClr val="accent1"/>
+            </a:solidFill>
+            <a:prstDash val="dash"/>
+            <a:headEnd type="triangle"/>
+            <a:tailEnd type="none"/>
           </a:ln>
         </p:spPr>
         <p:style>

--- a/作図.pptx
+++ b/作図.pptx
@@ -260,7 +260,7 @@
           <a:p>
             <a:fld id="{716789AD-CAC3-AD41-B5C9-BF5C62A1889D}" type="datetimeFigureOut">
               <a:rPr kumimoji="1" lang="ja-JP" altLang="en-US" smtClean="0"/>
-              <a:t>2026/3/5</a:t>
+              <a:t>2026/3/11</a:t>
             </a:fld>
             <a:endParaRPr kumimoji="1" lang="ja-JP" altLang="en-US"/>
           </a:p>
@@ -490,7 +490,7 @@
           <a:p>
             <a:fld id="{716789AD-CAC3-AD41-B5C9-BF5C62A1889D}" type="datetimeFigureOut">
               <a:rPr kumimoji="1" lang="ja-JP" altLang="en-US" smtClean="0"/>
-              <a:t>2026/3/5</a:t>
+              <a:t>2026/3/11</a:t>
             </a:fld>
             <a:endParaRPr kumimoji="1" lang="ja-JP" altLang="en-US"/>
           </a:p>
@@ -730,7 +730,7 @@
           <a:p>
             <a:fld id="{716789AD-CAC3-AD41-B5C9-BF5C62A1889D}" type="datetimeFigureOut">
               <a:rPr kumimoji="1" lang="ja-JP" altLang="en-US" smtClean="0"/>
-              <a:t>2026/3/5</a:t>
+              <a:t>2026/3/11</a:t>
             </a:fld>
             <a:endParaRPr kumimoji="1" lang="ja-JP" altLang="en-US"/>
           </a:p>
@@ -960,7 +960,7 @@
           <a:p>
             <a:fld id="{716789AD-CAC3-AD41-B5C9-BF5C62A1889D}" type="datetimeFigureOut">
               <a:rPr kumimoji="1" lang="ja-JP" altLang="en-US" smtClean="0"/>
-              <a:t>2026/3/5</a:t>
+              <a:t>2026/3/11</a:t>
             </a:fld>
             <a:endParaRPr kumimoji="1" lang="ja-JP" altLang="en-US"/>
           </a:p>
@@ -1235,7 +1235,7 @@
           <a:p>
             <a:fld id="{716789AD-CAC3-AD41-B5C9-BF5C62A1889D}" type="datetimeFigureOut">
               <a:rPr kumimoji="1" lang="ja-JP" altLang="en-US" smtClean="0"/>
-              <a:t>2026/3/5</a:t>
+              <a:t>2026/3/11</a:t>
             </a:fld>
             <a:endParaRPr kumimoji="1" lang="ja-JP" altLang="en-US"/>
           </a:p>
@@ -1564,7 +1564,7 @@
           <a:p>
             <a:fld id="{716789AD-CAC3-AD41-B5C9-BF5C62A1889D}" type="datetimeFigureOut">
               <a:rPr kumimoji="1" lang="ja-JP" altLang="en-US" smtClean="0"/>
-              <a:t>2026/3/5</a:t>
+              <a:t>2026/3/11</a:t>
             </a:fld>
             <a:endParaRPr kumimoji="1" lang="ja-JP" altLang="en-US"/>
           </a:p>
@@ -2040,7 +2040,7 @@
           <a:p>
             <a:fld id="{716789AD-CAC3-AD41-B5C9-BF5C62A1889D}" type="datetimeFigureOut">
               <a:rPr kumimoji="1" lang="ja-JP" altLang="en-US" smtClean="0"/>
-              <a:t>2026/3/5</a:t>
+              <a:t>2026/3/11</a:t>
             </a:fld>
             <a:endParaRPr kumimoji="1" lang="ja-JP" altLang="en-US"/>
           </a:p>
@@ -2181,7 +2181,7 @@
           <a:p>
             <a:fld id="{716789AD-CAC3-AD41-B5C9-BF5C62A1889D}" type="datetimeFigureOut">
               <a:rPr kumimoji="1" lang="ja-JP" altLang="en-US" smtClean="0"/>
-              <a:t>2026/3/5</a:t>
+              <a:t>2026/3/11</a:t>
             </a:fld>
             <a:endParaRPr kumimoji="1" lang="ja-JP" altLang="en-US"/>
           </a:p>
@@ -2294,7 +2294,7 @@
           <a:p>
             <a:fld id="{716789AD-CAC3-AD41-B5C9-BF5C62A1889D}" type="datetimeFigureOut">
               <a:rPr kumimoji="1" lang="ja-JP" altLang="en-US" smtClean="0"/>
-              <a:t>2026/3/5</a:t>
+              <a:t>2026/3/11</a:t>
             </a:fld>
             <a:endParaRPr kumimoji="1" lang="ja-JP" altLang="en-US"/>
           </a:p>
@@ -2637,7 +2637,7 @@
           <a:p>
             <a:fld id="{716789AD-CAC3-AD41-B5C9-BF5C62A1889D}" type="datetimeFigureOut">
               <a:rPr kumimoji="1" lang="ja-JP" altLang="en-US" smtClean="0"/>
-              <a:t>2026/3/5</a:t>
+              <a:t>2026/3/11</a:t>
             </a:fld>
             <a:endParaRPr kumimoji="1" lang="ja-JP" altLang="en-US"/>
           </a:p>
@@ -2925,7 +2925,7 @@
           <a:p>
             <a:fld id="{716789AD-CAC3-AD41-B5C9-BF5C62A1889D}" type="datetimeFigureOut">
               <a:rPr kumimoji="1" lang="ja-JP" altLang="en-US" smtClean="0"/>
-              <a:t>2026/3/5</a:t>
+              <a:t>2026/3/11</a:t>
             </a:fld>
             <a:endParaRPr kumimoji="1" lang="ja-JP" altLang="en-US"/>
           </a:p>
@@ -3198,7 +3198,7 @@
           <a:p>
             <a:fld id="{716789AD-CAC3-AD41-B5C9-BF5C62A1889D}" type="datetimeFigureOut">
               <a:rPr kumimoji="1" lang="ja-JP" altLang="en-US" smtClean="0"/>
-              <a:t>2026/3/5</a:t>
+              <a:t>2026/3/11</a:t>
             </a:fld>
             <a:endParaRPr kumimoji="1" lang="ja-JP" altLang="en-US"/>
           </a:p>
@@ -3704,8 +3704,8 @@
         </p:nvSpPr>
         <p:spPr>
           <a:xfrm>
-            <a:off x="1109876" y="2260218"/>
-            <a:ext cx="6618168" cy="3632562"/>
+            <a:off x="1630144" y="2149863"/>
+            <a:ext cx="6618168" cy="3888335"/>
           </a:xfrm>
           <a:prstGeom prst="rect">
             <a:avLst/>
@@ -3803,7 +3803,7 @@
         <p:spPr>
           <a:xfrm>
             <a:off x="-1" y="577517"/>
-            <a:ext cx="12192000" cy="1200329"/>
+            <a:ext cx="12192000" cy="1477328"/>
           </a:xfrm>
           <a:prstGeom prst="rect">
             <a:avLst/>
@@ -3825,7 +3825,7 @@
           <a:p>
             <a:r>
               <a:rPr lang="ja-JP" altLang="en-US"/>
-              <a:t>有体物トラッキングシステム・地域検索システム・</a:t>
+              <a:t>有体物トラッキングシステム・地域課題検索システム・</a:t>
             </a:r>
             <a:r>
               <a:rPr lang="en-US" altLang="ja-JP" dirty="0"/>
@@ -3833,7 +3833,7 @@
             </a:r>
             <a:r>
               <a:rPr lang="ja-JP" altLang="en-US"/>
-              <a:t>キーワード検索システム等を統合する</a:t>
+              <a:t>論文検索システム等を統合する</a:t>
             </a:r>
             <a:r>
               <a:rPr lang="en-US" altLang="ja-JP" dirty="0"/>
@@ -3845,11 +3845,11 @@
             </a:r>
             <a:r>
               <a:rPr lang="en-US" altLang="ja-JP" dirty="0"/>
-              <a:t> -&gt; </a:t>
+              <a:t> </a:t>
             </a:r>
             <a:r>
               <a:rPr lang="ja-JP" altLang="en-US"/>
-              <a:t>階層的データ管理・データガバナンスを進めるための知識基盤</a:t>
+              <a:t>学内で階層的データ管理・データガバナンスを進めるための知識基盤でもある。</a:t>
             </a:r>
             <a:endParaRPr lang="en-US" altLang="ja-JP" dirty="0"/>
           </a:p>
@@ -3876,7 +3876,7 @@
         </p:nvSpPr>
         <p:spPr>
           <a:xfrm>
-            <a:off x="1199863" y="2413245"/>
+            <a:off x="1720131" y="2302891"/>
             <a:ext cx="2949627" cy="3071465"/>
           </a:xfrm>
           <a:prstGeom prst="rect">
@@ -3928,7 +3928,7 @@
         </p:nvSpPr>
         <p:spPr>
           <a:xfrm>
-            <a:off x="3294489" y="6014659"/>
+            <a:off x="3814757" y="6203851"/>
             <a:ext cx="3808818" cy="461665"/>
           </a:xfrm>
           <a:prstGeom prst="rect">
@@ -3980,7 +3980,7 @@
         </p:nvSpPr>
         <p:spPr>
           <a:xfrm>
-            <a:off x="3212042" y="4664352"/>
+            <a:off x="3732310" y="4553998"/>
             <a:ext cx="215153" cy="217074"/>
           </a:xfrm>
           <a:prstGeom prst="ellipse">
@@ -4032,7 +4032,7 @@
         </p:nvSpPr>
         <p:spPr>
           <a:xfrm>
-            <a:off x="3204357" y="3196592"/>
+            <a:off x="3724625" y="3086238"/>
             <a:ext cx="215153" cy="217074"/>
           </a:xfrm>
           <a:prstGeom prst="ellipse">
@@ -4084,7 +4084,7 @@
         </p:nvSpPr>
         <p:spPr>
           <a:xfrm>
-            <a:off x="3111868" y="4881425"/>
+            <a:off x="3632136" y="4771071"/>
             <a:ext cx="415498" cy="230832"/>
           </a:xfrm>
           <a:prstGeom prst="rect">
@@ -4119,7 +4119,7 @@
         </p:nvSpPr>
         <p:spPr>
           <a:xfrm>
-            <a:off x="3050396" y="3431911"/>
+            <a:off x="3570664" y="3321557"/>
             <a:ext cx="530915" cy="230832"/>
           </a:xfrm>
           <a:prstGeom prst="rect">
@@ -4155,7 +4155,7 @@
         </p:nvSpPr>
         <p:spPr>
           <a:xfrm>
-            <a:off x="1535462" y="5999291"/>
+            <a:off x="2055730" y="6188483"/>
             <a:ext cx="215153" cy="217074"/>
           </a:xfrm>
           <a:prstGeom prst="ellipse">
@@ -4207,7 +4207,7 @@
         </p:nvSpPr>
         <p:spPr>
           <a:xfrm>
-            <a:off x="1695431" y="5975395"/>
+            <a:off x="2215699" y="6164587"/>
             <a:ext cx="732893" cy="276999"/>
           </a:xfrm>
           <a:prstGeom prst="rect">
@@ -4246,7 +4246,7 @@
         </p:nvSpPr>
         <p:spPr>
           <a:xfrm>
-            <a:off x="1686882" y="2888261"/>
+            <a:off x="2207150" y="2777907"/>
             <a:ext cx="215153" cy="217074"/>
           </a:xfrm>
           <a:prstGeom prst="ellipse">
@@ -4298,7 +4298,7 @@
         </p:nvSpPr>
         <p:spPr>
           <a:xfrm>
-            <a:off x="1352444" y="3890121"/>
+            <a:off x="1872712" y="3779767"/>
             <a:ext cx="877163" cy="230832"/>
           </a:xfrm>
           <a:prstGeom prst="rect">
@@ -4334,7 +4334,7 @@
         </p:nvSpPr>
         <p:spPr>
           <a:xfrm>
-            <a:off x="1692338" y="4372735"/>
+            <a:off x="2212606" y="4262381"/>
             <a:ext cx="215153" cy="217074"/>
           </a:xfrm>
           <a:prstGeom prst="ellipse">
@@ -4386,7 +4386,7 @@
         </p:nvSpPr>
         <p:spPr>
           <a:xfrm>
-            <a:off x="1590983" y="4595626"/>
+            <a:off x="2111251" y="4485272"/>
             <a:ext cx="415498" cy="230832"/>
           </a:xfrm>
           <a:prstGeom prst="rect">
@@ -4421,7 +4421,7 @@
         </p:nvSpPr>
         <p:spPr>
           <a:xfrm>
-            <a:off x="3196673" y="3930472"/>
+            <a:off x="3716941" y="3820118"/>
             <a:ext cx="215153" cy="217074"/>
           </a:xfrm>
           <a:prstGeom prst="ellipse">
@@ -4473,7 +4473,7 @@
         </p:nvSpPr>
         <p:spPr>
           <a:xfrm>
-            <a:off x="3050396" y="4146999"/>
+            <a:off x="3570664" y="4036645"/>
             <a:ext cx="530915" cy="230832"/>
           </a:xfrm>
           <a:prstGeom prst="rect">
@@ -4509,7 +4509,7 @@
         </p:nvSpPr>
         <p:spPr>
           <a:xfrm>
-            <a:off x="1532247" y="6280342"/>
+            <a:off x="2052515" y="6469534"/>
             <a:ext cx="545566" cy="217074"/>
           </a:xfrm>
           <a:prstGeom prst="rect">
@@ -4558,7 +4558,7 @@
         </p:nvSpPr>
         <p:spPr>
           <a:xfrm>
-            <a:off x="2036639" y="6256445"/>
+            <a:off x="2556907" y="6445637"/>
             <a:ext cx="798617" cy="276999"/>
           </a:xfrm>
           <a:prstGeom prst="rect">
@@ -4606,7 +4606,7 @@
         </p:nvCxnSpPr>
         <p:spPr>
           <a:xfrm flipH="1" flipV="1">
-            <a:off x="1902035" y="2996798"/>
+            <a:off x="2422303" y="2886444"/>
             <a:ext cx="1294638" cy="1042211"/>
           </a:xfrm>
           <a:prstGeom prst="straightConnector1">
@@ -4652,7 +4652,7 @@
         </p:nvCxnSpPr>
         <p:spPr>
           <a:xfrm flipH="1" flipV="1">
-            <a:off x="1902035" y="2996798"/>
+            <a:off x="2422303" y="2886444"/>
             <a:ext cx="1310007" cy="1776091"/>
           </a:xfrm>
           <a:prstGeom prst="straightConnector1">
@@ -4698,7 +4698,7 @@
         </p:nvCxnSpPr>
         <p:spPr>
           <a:xfrm flipH="1" flipV="1">
-            <a:off x="1902035" y="2996798"/>
+            <a:off x="2422303" y="2886444"/>
             <a:ext cx="1302322" cy="308331"/>
           </a:xfrm>
           <a:prstGeom prst="straightConnector1">
@@ -4744,7 +4744,7 @@
         </p:nvCxnSpPr>
         <p:spPr>
           <a:xfrm flipH="1" flipV="1">
-            <a:off x="1907491" y="4481272"/>
+            <a:off x="2427759" y="4370918"/>
             <a:ext cx="1304551" cy="291617"/>
           </a:xfrm>
           <a:prstGeom prst="straightConnector1">
@@ -4789,7 +4789,7 @@
         </p:nvCxnSpPr>
         <p:spPr>
           <a:xfrm flipH="1" flipV="1">
-            <a:off x="3411826" y="4039009"/>
+            <a:off x="3932094" y="3928655"/>
             <a:ext cx="15369" cy="733880"/>
           </a:xfrm>
           <a:prstGeom prst="curvedConnector3">
@@ -4837,7 +4837,7 @@
         </p:nvCxnSpPr>
         <p:spPr>
           <a:xfrm flipH="1" flipV="1">
-            <a:off x="3419510" y="3305129"/>
+            <a:off x="3939778" y="3194775"/>
             <a:ext cx="7685" cy="1467760"/>
           </a:xfrm>
           <a:prstGeom prst="curvedConnector3">
@@ -4881,8 +4881,8 @@
         </p:nvSpPr>
         <p:spPr>
           <a:xfrm>
-            <a:off x="1933641" y="5488761"/>
-            <a:ext cx="1659429" cy="307777"/>
+            <a:off x="2453909" y="5378407"/>
+            <a:ext cx="1800493" cy="523220"/>
           </a:xfrm>
           <a:prstGeom prst="rect">
             <a:avLst/>
@@ -4899,6 +4899,12 @@
               <a:rPr kumimoji="1" lang="en-US" altLang="ja-JP" sz="1400" dirty="0"/>
               <a:t>Knowledge Graph</a:t>
             </a:r>
+          </a:p>
+          <a:p>
+            <a:r>
+              <a:rPr lang="ja-JP" altLang="en-US" sz="1400"/>
+              <a:t>（キュレーション）</a:t>
+            </a:r>
             <a:endParaRPr kumimoji="1" lang="ja-JP" altLang="en-US" sz="1400"/>
           </a:p>
         </p:txBody>
@@ -4917,7 +4923,7 @@
         </p:nvSpPr>
         <p:spPr>
           <a:xfrm>
-            <a:off x="5726590" y="3016948"/>
+            <a:off x="6246858" y="2906594"/>
             <a:ext cx="545566" cy="217074"/>
           </a:xfrm>
           <a:prstGeom prst="rect">
@@ -4966,7 +4972,7 @@
         </p:nvSpPr>
         <p:spPr>
           <a:xfrm>
-            <a:off x="5726590" y="3583875"/>
+            <a:off x="6246858" y="3473521"/>
             <a:ext cx="545566" cy="217074"/>
           </a:xfrm>
           <a:prstGeom prst="rect">
@@ -5015,7 +5021,7 @@
         </p:nvSpPr>
         <p:spPr>
           <a:xfrm>
-            <a:off x="5726590" y="4150802"/>
+            <a:off x="6246858" y="4040448"/>
             <a:ext cx="545566" cy="217074"/>
           </a:xfrm>
           <a:prstGeom prst="rect">
@@ -5064,7 +5070,7 @@
         </p:nvSpPr>
         <p:spPr>
           <a:xfrm>
-            <a:off x="5726590" y="4717729"/>
+            <a:off x="6246858" y="4607375"/>
             <a:ext cx="545566" cy="217074"/>
           </a:xfrm>
           <a:prstGeom prst="rect">
@@ -5117,7 +5123,7 @@
         </p:nvCxnSpPr>
         <p:spPr>
           <a:xfrm>
-            <a:off x="5078358" y="3828900"/>
+            <a:off x="5598626" y="3718546"/>
             <a:ext cx="648232" cy="997366"/>
           </a:xfrm>
           <a:prstGeom prst="straightConnector1">
@@ -5160,7 +5166,7 @@
         </p:nvSpPr>
         <p:spPr>
           <a:xfrm>
-            <a:off x="5688952" y="4909971"/>
+            <a:off x="6209220" y="4799617"/>
             <a:ext cx="606256" cy="230832"/>
           </a:xfrm>
           <a:prstGeom prst="rect">
@@ -5196,7 +5202,7 @@
         </p:nvSpPr>
         <p:spPr>
           <a:xfrm>
-            <a:off x="5643702" y="3213090"/>
+            <a:off x="6163970" y="3102736"/>
             <a:ext cx="761747" cy="230832"/>
           </a:xfrm>
           <a:prstGeom prst="rect">
@@ -5232,7 +5238,7 @@
         </p:nvSpPr>
         <p:spPr>
           <a:xfrm>
-            <a:off x="5453059" y="2648475"/>
+            <a:off x="5973327" y="2538121"/>
             <a:ext cx="1107996" cy="230832"/>
           </a:xfrm>
           <a:prstGeom prst="rect">
@@ -5268,7 +5274,7 @@
         </p:nvSpPr>
         <p:spPr>
           <a:xfrm>
-            <a:off x="5416790" y="3764455"/>
+            <a:off x="5937058" y="3654101"/>
             <a:ext cx="1339264" cy="369332"/>
           </a:xfrm>
           <a:prstGeom prst="rect">
@@ -5311,7 +5317,7 @@
         </p:nvSpPr>
         <p:spPr>
           <a:xfrm>
-            <a:off x="5734274" y="5284655"/>
+            <a:off x="6254542" y="5174301"/>
             <a:ext cx="545566" cy="217074"/>
           </a:xfrm>
           <a:prstGeom prst="rect">
@@ -5360,7 +5366,7 @@
         </p:nvSpPr>
         <p:spPr>
           <a:xfrm>
-            <a:off x="5635235" y="5487830"/>
+            <a:off x="6155503" y="5377476"/>
             <a:ext cx="761747" cy="230832"/>
           </a:xfrm>
           <a:prstGeom prst="rect">
@@ -5399,7 +5405,7 @@
         </p:nvCxnSpPr>
         <p:spPr>
           <a:xfrm>
-            <a:off x="3395687" y="4849636"/>
+            <a:off x="3915955" y="4739282"/>
             <a:ext cx="2338587" cy="543556"/>
           </a:xfrm>
           <a:prstGeom prst="straightConnector1">
@@ -5447,7 +5453,7 @@
         </p:nvCxnSpPr>
         <p:spPr>
           <a:xfrm>
-            <a:off x="5078358" y="3828900"/>
+            <a:off x="5598626" y="3718546"/>
             <a:ext cx="648232" cy="430439"/>
           </a:xfrm>
           <a:prstGeom prst="straightConnector1">
@@ -5494,7 +5500,7 @@
         </p:nvCxnSpPr>
         <p:spPr>
           <a:xfrm flipV="1">
-            <a:off x="5078358" y="3692412"/>
+            <a:off x="5598626" y="3582058"/>
             <a:ext cx="648232" cy="136488"/>
           </a:xfrm>
           <a:prstGeom prst="straightConnector1">
@@ -5541,7 +5547,7 @@
         </p:nvCxnSpPr>
         <p:spPr>
           <a:xfrm flipV="1">
-            <a:off x="5078358" y="3125485"/>
+            <a:off x="5598626" y="3015131"/>
             <a:ext cx="648232" cy="703415"/>
           </a:xfrm>
           <a:prstGeom prst="straightConnector1">
@@ -5584,7 +5590,7 @@
         </p:nvSpPr>
         <p:spPr>
           <a:xfrm>
-            <a:off x="5734274" y="2450021"/>
+            <a:off x="6254542" y="2339667"/>
             <a:ext cx="545566" cy="217074"/>
           </a:xfrm>
           <a:prstGeom prst="rect">
@@ -5633,7 +5639,7 @@
         </p:nvSpPr>
         <p:spPr>
           <a:xfrm>
-            <a:off x="5588294" y="4342473"/>
+            <a:off x="6108562" y="4232119"/>
             <a:ext cx="761747" cy="230832"/>
           </a:xfrm>
           <a:prstGeom prst="rect">
@@ -5672,7 +5678,7 @@
         </p:nvCxnSpPr>
         <p:spPr>
           <a:xfrm flipV="1">
-            <a:off x="5078358" y="2558558"/>
+            <a:off x="5598626" y="2448204"/>
             <a:ext cx="655916" cy="1270342"/>
           </a:xfrm>
           <a:prstGeom prst="straightConnector1">
@@ -5715,8 +5721,8 @@
         </p:nvSpPr>
         <p:spPr>
           <a:xfrm rot="16200000">
-            <a:off x="6776359" y="4579839"/>
-            <a:ext cx="2265793" cy="338554"/>
+            <a:off x="7201454" y="4640850"/>
+            <a:ext cx="2456139" cy="338554"/>
           </a:xfrm>
           <a:prstGeom prst="rect">
             <a:avLst/>
@@ -5760,7 +5766,7 @@
         </p:nvSpPr>
         <p:spPr>
           <a:xfrm>
-            <a:off x="4532792" y="3720363"/>
+            <a:off x="5053060" y="3610009"/>
             <a:ext cx="545566" cy="217074"/>
           </a:xfrm>
           <a:prstGeom prst="rect">
@@ -5809,7 +5815,7 @@
         </p:nvSpPr>
         <p:spPr>
           <a:xfrm>
-            <a:off x="4319898" y="3945805"/>
+            <a:off x="4840166" y="3835451"/>
             <a:ext cx="1003801" cy="230832"/>
           </a:xfrm>
           <a:prstGeom prst="rect">
@@ -5853,7 +5859,7 @@
         </p:nvCxnSpPr>
         <p:spPr>
           <a:xfrm flipV="1">
-            <a:off x="1875983" y="3828900"/>
+            <a:off x="2396251" y="3718546"/>
             <a:ext cx="2656809" cy="729119"/>
           </a:xfrm>
           <a:prstGeom prst="straightConnector1">
@@ -5896,7 +5902,7 @@
         </p:nvCxnSpPr>
         <p:spPr>
           <a:xfrm flipV="1">
-            <a:off x="3395687" y="3828900"/>
+            <a:off x="3915955" y="3718546"/>
             <a:ext cx="1137105" cy="1020736"/>
           </a:xfrm>
           <a:prstGeom prst="straightConnector1">
@@ -5939,7 +5945,7 @@
         </p:nvCxnSpPr>
         <p:spPr>
           <a:xfrm>
-            <a:off x="1870527" y="3073545"/>
+            <a:off x="2390795" y="2963191"/>
             <a:ext cx="2662265" cy="755355"/>
           </a:xfrm>
           <a:prstGeom prst="straightConnector1">
@@ -5982,7 +5988,7 @@
         </p:nvCxnSpPr>
         <p:spPr>
           <a:xfrm flipV="1">
-            <a:off x="3380318" y="3828900"/>
+            <a:off x="3900586" y="3718546"/>
             <a:ext cx="1152474" cy="286856"/>
           </a:xfrm>
           <a:prstGeom prst="straightConnector1">
@@ -6025,7 +6031,7 @@
         </p:nvCxnSpPr>
         <p:spPr>
           <a:xfrm>
-            <a:off x="3388002" y="3381876"/>
+            <a:off x="3908270" y="3271522"/>
             <a:ext cx="1144790" cy="447024"/>
           </a:xfrm>
           <a:prstGeom prst="straightConnector1">
@@ -6064,7 +6070,7 @@
         </p:nvSpPr>
         <p:spPr>
           <a:xfrm rot="16200000">
-            <a:off x="5976560" y="3710439"/>
+            <a:off x="6496828" y="3600085"/>
             <a:ext cx="2236510" cy="584775"/>
           </a:xfrm>
           <a:prstGeom prst="rect">
@@ -6109,7 +6115,7 @@
         </p:nvSpPr>
         <p:spPr>
           <a:xfrm>
-            <a:off x="8341337" y="5227229"/>
+            <a:off x="8861605" y="5116875"/>
             <a:ext cx="902811" cy="307777"/>
           </a:xfrm>
           <a:prstGeom prst="rect">
@@ -6147,7 +6153,7 @@
         </p:nvCxnSpPr>
         <p:spPr>
           <a:xfrm>
-            <a:off x="4156222" y="2540135"/>
+            <a:off x="4676490" y="2429781"/>
             <a:ext cx="4141757" cy="0"/>
           </a:xfrm>
           <a:prstGeom prst="straightConnector1">
@@ -6189,7 +6195,7 @@
         </p:nvSpPr>
         <p:spPr>
           <a:xfrm>
-            <a:off x="8297979" y="2361659"/>
+            <a:off x="8818247" y="2251305"/>
             <a:ext cx="2216619" cy="830997"/>
           </a:xfrm>
           <a:prstGeom prst="rect">
@@ -6264,8 +6270,8 @@
         </p:nvSpPr>
         <p:spPr>
           <a:xfrm rot="16200000">
-            <a:off x="7224823" y="2763557"/>
-            <a:ext cx="1366767" cy="338554"/>
+            <a:off x="7706995" y="2691299"/>
+            <a:ext cx="1442960" cy="338554"/>
           </a:xfrm>
           <a:prstGeom prst="rect">
             <a:avLst/>
@@ -6309,7 +6315,7 @@
         </p:nvCxnSpPr>
         <p:spPr>
           <a:xfrm>
-            <a:off x="3380318" y="4115756"/>
+            <a:off x="3900586" y="4005402"/>
             <a:ext cx="2353956" cy="1277436"/>
           </a:xfrm>
           <a:prstGeom prst="straightConnector1">
@@ -6357,7 +6363,7 @@
         </p:nvCxnSpPr>
         <p:spPr>
           <a:xfrm>
-            <a:off x="3388002" y="3381876"/>
+            <a:off x="3908270" y="3271522"/>
             <a:ext cx="2346272" cy="2011316"/>
           </a:xfrm>
           <a:prstGeom prst="straightConnector1">
@@ -6405,7 +6411,7 @@
         </p:nvCxnSpPr>
         <p:spPr>
           <a:xfrm>
-            <a:off x="1875983" y="4558019"/>
+            <a:off x="2396251" y="4447665"/>
             <a:ext cx="3858291" cy="835173"/>
           </a:xfrm>
           <a:prstGeom prst="straightConnector1">
@@ -6452,7 +6458,7 @@
         </p:nvCxnSpPr>
         <p:spPr>
           <a:xfrm>
-            <a:off x="4156222" y="5380443"/>
+            <a:off x="4676490" y="5270089"/>
             <a:ext cx="4185115" cy="675"/>
           </a:xfrm>
           <a:prstGeom prst="straightConnector1">
@@ -6497,7 +6503,7 @@
         </p:nvCxnSpPr>
         <p:spPr>
           <a:xfrm flipV="1">
-            <a:off x="7387203" y="2777158"/>
+            <a:off x="7907471" y="2666804"/>
             <a:ext cx="910776" cy="1225669"/>
           </a:xfrm>
           <a:prstGeom prst="bentConnector3">
@@ -6541,7 +6547,7 @@
         </p:nvSpPr>
         <p:spPr>
           <a:xfrm>
-            <a:off x="1681426" y="3630498"/>
+            <a:off x="2201694" y="3520144"/>
             <a:ext cx="215153" cy="217074"/>
           </a:xfrm>
           <a:prstGeom prst="ellipse">
@@ -6593,7 +6599,7 @@
         </p:nvSpPr>
         <p:spPr>
           <a:xfrm>
-            <a:off x="1587221" y="3118496"/>
+            <a:off x="2107489" y="3008142"/>
             <a:ext cx="415498" cy="230832"/>
           </a:xfrm>
           <a:prstGeom prst="rect">
@@ -6632,7 +6638,7 @@
         </p:nvCxnSpPr>
         <p:spPr>
           <a:xfrm flipH="1" flipV="1">
-            <a:off x="1896579" y="3739035"/>
+            <a:off x="2416847" y="3628681"/>
             <a:ext cx="1315463" cy="1033854"/>
           </a:xfrm>
           <a:prstGeom prst="straightConnector1">
@@ -6678,7 +6684,7 @@
         </p:nvCxnSpPr>
         <p:spPr>
           <a:xfrm>
-            <a:off x="1865071" y="3815782"/>
+            <a:off x="2385339" y="3705428"/>
             <a:ext cx="2667721" cy="13118"/>
           </a:xfrm>
           <a:prstGeom prst="straightConnector1">
@@ -6721,7 +6727,7 @@
         </p:nvCxnSpPr>
         <p:spPr>
           <a:xfrm flipH="1">
-            <a:off x="1896579" y="3305129"/>
+            <a:off x="2416847" y="3194775"/>
             <a:ext cx="1307778" cy="433906"/>
           </a:xfrm>
           <a:prstGeom prst="straightConnector1">
@@ -6767,7 +6773,7 @@
         </p:nvCxnSpPr>
         <p:spPr>
           <a:xfrm>
-            <a:off x="1870527" y="3073545"/>
+            <a:off x="2390795" y="2963191"/>
             <a:ext cx="3863747" cy="2319647"/>
           </a:xfrm>
           <a:prstGeom prst="straightConnector1">
@@ -6815,7 +6821,7 @@
         </p:nvCxnSpPr>
         <p:spPr>
           <a:xfrm>
-            <a:off x="1865071" y="3815782"/>
+            <a:off x="2385339" y="3705428"/>
             <a:ext cx="3869203" cy="1577410"/>
           </a:xfrm>
           <a:prstGeom prst="straightConnector1">
@@ -6828,6 +6834,231 @@
             <a:prstDash val="dash"/>
             <a:headEnd type="triangle"/>
             <a:tailEnd type="none"/>
+          </a:ln>
+        </p:spPr>
+        <p:style>
+          <a:lnRef idx="2">
+            <a:schemeClr val="accent1"/>
+          </a:lnRef>
+          <a:fillRef idx="0">
+            <a:schemeClr val="accent1"/>
+          </a:fillRef>
+          <a:effectRef idx="1">
+            <a:schemeClr val="accent1"/>
+          </a:effectRef>
+          <a:fontRef idx="minor">
+            <a:schemeClr val="tx1"/>
+          </a:fontRef>
+        </p:style>
+      </p:cxnSp>
+      <p:cxnSp>
+        <p:nvCxnSpPr>
+          <p:cNvPr id="53" name="曲線コネクタ 52">
+            <a:extLst>
+              <a:ext uri="{FF2B5EF4-FFF2-40B4-BE49-F238E27FC236}">
+                <a16:creationId xmlns:a16="http://schemas.microsoft.com/office/drawing/2014/main" id="{AACCFBE7-4B36-3BE7-5DAE-F4166815FB25}"/>
+              </a:ext>
+            </a:extLst>
+          </p:cNvPr>
+          <p:cNvCxnSpPr>
+            <a:cxnSpLocks/>
+            <a:stCxn id="55" idx="3"/>
+            <a:endCxn id="33" idx="3"/>
+          </p:cNvCxnSpPr>
+          <p:nvPr/>
+        </p:nvCxnSpPr>
+        <p:spPr>
+          <a:xfrm>
+            <a:off x="6800108" y="2448204"/>
+            <a:ext cx="12700" cy="2834634"/>
+          </a:xfrm>
+          <a:prstGeom prst="curvedConnector3">
+            <a:avLst>
+              <a:gd name="adj1" fmla="val 1800000"/>
+            </a:avLst>
+          </a:prstGeom>
+          <a:ln w="12700">
+            <a:tailEnd type="triangle"/>
+          </a:ln>
+        </p:spPr>
+        <p:style>
+          <a:lnRef idx="2">
+            <a:schemeClr val="accent1"/>
+          </a:lnRef>
+          <a:fillRef idx="0">
+            <a:schemeClr val="accent1"/>
+          </a:fillRef>
+          <a:effectRef idx="1">
+            <a:schemeClr val="accent1"/>
+          </a:effectRef>
+          <a:fontRef idx="minor">
+            <a:schemeClr val="tx1"/>
+          </a:fontRef>
+        </p:style>
+      </p:cxnSp>
+      <p:cxnSp>
+        <p:nvCxnSpPr>
+          <p:cNvPr id="62" name="曲線コネクタ 61">
+            <a:extLst>
+              <a:ext uri="{FF2B5EF4-FFF2-40B4-BE49-F238E27FC236}">
+                <a16:creationId xmlns:a16="http://schemas.microsoft.com/office/drawing/2014/main" id="{FA727F56-F785-A162-1B2E-03A8C4BF2C26}"/>
+              </a:ext>
+            </a:extLst>
+          </p:cNvPr>
+          <p:cNvCxnSpPr>
+            <a:cxnSpLocks/>
+            <a:stCxn id="43" idx="3"/>
+            <a:endCxn id="33" idx="3"/>
+          </p:cNvCxnSpPr>
+          <p:nvPr/>
+        </p:nvCxnSpPr>
+        <p:spPr>
+          <a:xfrm>
+            <a:off x="6792424" y="3015131"/>
+            <a:ext cx="7684" cy="2267707"/>
+          </a:xfrm>
+          <a:prstGeom prst="curvedConnector3">
+            <a:avLst>
+              <a:gd name="adj1" fmla="val 3075013"/>
+            </a:avLst>
+          </a:prstGeom>
+          <a:ln w="12700">
+            <a:tailEnd type="triangle"/>
+          </a:ln>
+        </p:spPr>
+        <p:style>
+          <a:lnRef idx="2">
+            <a:schemeClr val="accent1"/>
+          </a:lnRef>
+          <a:fillRef idx="0">
+            <a:schemeClr val="accent1"/>
+          </a:fillRef>
+          <a:effectRef idx="1">
+            <a:schemeClr val="accent1"/>
+          </a:effectRef>
+          <a:fontRef idx="minor">
+            <a:schemeClr val="tx1"/>
+          </a:fontRef>
+        </p:style>
+      </p:cxnSp>
+      <p:cxnSp>
+        <p:nvCxnSpPr>
+          <p:cNvPr id="70" name="曲線コネクタ 69">
+            <a:extLst>
+              <a:ext uri="{FF2B5EF4-FFF2-40B4-BE49-F238E27FC236}">
+                <a16:creationId xmlns:a16="http://schemas.microsoft.com/office/drawing/2014/main" id="{DDD56B24-3AAF-7FA8-0FDE-888276BA4D58}"/>
+              </a:ext>
+            </a:extLst>
+          </p:cNvPr>
+          <p:cNvCxnSpPr>
+            <a:cxnSpLocks/>
+            <a:stCxn id="44" idx="3"/>
+            <a:endCxn id="33" idx="3"/>
+          </p:cNvCxnSpPr>
+          <p:nvPr/>
+        </p:nvCxnSpPr>
+        <p:spPr>
+          <a:xfrm>
+            <a:off x="6792424" y="3582058"/>
+            <a:ext cx="7684" cy="1700780"/>
+          </a:xfrm>
+          <a:prstGeom prst="curvedConnector3">
+            <a:avLst>
+              <a:gd name="adj1" fmla="val 3075013"/>
+            </a:avLst>
+          </a:prstGeom>
+          <a:ln w="12700">
+            <a:tailEnd type="triangle"/>
+          </a:ln>
+        </p:spPr>
+        <p:style>
+          <a:lnRef idx="2">
+            <a:schemeClr val="accent1"/>
+          </a:lnRef>
+          <a:fillRef idx="0">
+            <a:schemeClr val="accent1"/>
+          </a:fillRef>
+          <a:effectRef idx="1">
+            <a:schemeClr val="accent1"/>
+          </a:effectRef>
+          <a:fontRef idx="minor">
+            <a:schemeClr val="tx1"/>
+          </a:fontRef>
+        </p:style>
+      </p:cxnSp>
+      <p:cxnSp>
+        <p:nvCxnSpPr>
+          <p:cNvPr id="74" name="曲線コネクタ 73">
+            <a:extLst>
+              <a:ext uri="{FF2B5EF4-FFF2-40B4-BE49-F238E27FC236}">
+                <a16:creationId xmlns:a16="http://schemas.microsoft.com/office/drawing/2014/main" id="{7835A8B5-152E-1099-BD32-5F5CACFF56DE}"/>
+              </a:ext>
+            </a:extLst>
+          </p:cNvPr>
+          <p:cNvCxnSpPr>
+            <a:cxnSpLocks/>
+            <a:stCxn id="45" idx="3"/>
+            <a:endCxn id="33" idx="3"/>
+          </p:cNvCxnSpPr>
+          <p:nvPr/>
+        </p:nvCxnSpPr>
+        <p:spPr>
+          <a:xfrm>
+            <a:off x="6792424" y="4148985"/>
+            <a:ext cx="7684" cy="1133853"/>
+          </a:xfrm>
+          <a:prstGeom prst="curvedConnector3">
+            <a:avLst>
+              <a:gd name="adj1" fmla="val 3075013"/>
+            </a:avLst>
+          </a:prstGeom>
+          <a:ln w="12700">
+            <a:tailEnd type="triangle"/>
+          </a:ln>
+        </p:spPr>
+        <p:style>
+          <a:lnRef idx="2">
+            <a:schemeClr val="accent1"/>
+          </a:lnRef>
+          <a:fillRef idx="0">
+            <a:schemeClr val="accent1"/>
+          </a:fillRef>
+          <a:effectRef idx="1">
+            <a:schemeClr val="accent1"/>
+          </a:effectRef>
+          <a:fontRef idx="minor">
+            <a:schemeClr val="tx1"/>
+          </a:fontRef>
+        </p:style>
+      </p:cxnSp>
+      <p:cxnSp>
+        <p:nvCxnSpPr>
+          <p:cNvPr id="80" name="曲線コネクタ 79">
+            <a:extLst>
+              <a:ext uri="{FF2B5EF4-FFF2-40B4-BE49-F238E27FC236}">
+                <a16:creationId xmlns:a16="http://schemas.microsoft.com/office/drawing/2014/main" id="{F1979280-DFD4-A453-8AB0-CFF95756450D}"/>
+              </a:ext>
+            </a:extLst>
+          </p:cNvPr>
+          <p:cNvCxnSpPr>
+            <a:cxnSpLocks/>
+            <a:stCxn id="46" idx="3"/>
+            <a:endCxn id="33" idx="3"/>
+          </p:cNvCxnSpPr>
+          <p:nvPr/>
+        </p:nvCxnSpPr>
+        <p:spPr>
+          <a:xfrm>
+            <a:off x="6792424" y="4715912"/>
+            <a:ext cx="7684" cy="566926"/>
+          </a:xfrm>
+          <a:prstGeom prst="curvedConnector3">
+            <a:avLst>
+              <a:gd name="adj1" fmla="val 3075013"/>
+            </a:avLst>
+          </a:prstGeom>
+          <a:ln w="12700">
+            <a:tailEnd type="triangle"/>
           </a:ln>
         </p:spPr>
         <p:style>

--- a/作図.pptx
+++ b/作図.pptx
@@ -7,6 +7,7 @@
   <p:sldIdLst>
     <p:sldId id="256" r:id="rId2"/>
     <p:sldId id="296" r:id="rId3"/>
+    <p:sldId id="297" r:id="rId4"/>
   </p:sldIdLst>
   <p:sldSz cx="12192000" cy="6858000"/>
   <p:notesSz cx="6858000" cy="9144000"/>
@@ -260,7 +261,7 @@
           <a:p>
             <a:fld id="{716789AD-CAC3-AD41-B5C9-BF5C62A1889D}" type="datetimeFigureOut">
               <a:rPr kumimoji="1" lang="ja-JP" altLang="en-US" smtClean="0"/>
-              <a:t>2026/3/11</a:t>
+              <a:t>2026/4/2</a:t>
             </a:fld>
             <a:endParaRPr kumimoji="1" lang="ja-JP" altLang="en-US"/>
           </a:p>
@@ -490,7 +491,7 @@
           <a:p>
             <a:fld id="{716789AD-CAC3-AD41-B5C9-BF5C62A1889D}" type="datetimeFigureOut">
               <a:rPr kumimoji="1" lang="ja-JP" altLang="en-US" smtClean="0"/>
-              <a:t>2026/3/11</a:t>
+              <a:t>2026/4/2</a:t>
             </a:fld>
             <a:endParaRPr kumimoji="1" lang="ja-JP" altLang="en-US"/>
           </a:p>
@@ -730,7 +731,7 @@
           <a:p>
             <a:fld id="{716789AD-CAC3-AD41-B5C9-BF5C62A1889D}" type="datetimeFigureOut">
               <a:rPr kumimoji="1" lang="ja-JP" altLang="en-US" smtClean="0"/>
-              <a:t>2026/3/11</a:t>
+              <a:t>2026/4/2</a:t>
             </a:fld>
             <a:endParaRPr kumimoji="1" lang="ja-JP" altLang="en-US"/>
           </a:p>
@@ -960,7 +961,7 @@
           <a:p>
             <a:fld id="{716789AD-CAC3-AD41-B5C9-BF5C62A1889D}" type="datetimeFigureOut">
               <a:rPr kumimoji="1" lang="ja-JP" altLang="en-US" smtClean="0"/>
-              <a:t>2026/3/11</a:t>
+              <a:t>2026/4/2</a:t>
             </a:fld>
             <a:endParaRPr kumimoji="1" lang="ja-JP" altLang="en-US"/>
           </a:p>
@@ -1235,7 +1236,7 @@
           <a:p>
             <a:fld id="{716789AD-CAC3-AD41-B5C9-BF5C62A1889D}" type="datetimeFigureOut">
               <a:rPr kumimoji="1" lang="ja-JP" altLang="en-US" smtClean="0"/>
-              <a:t>2026/3/11</a:t>
+              <a:t>2026/4/2</a:t>
             </a:fld>
             <a:endParaRPr kumimoji="1" lang="ja-JP" altLang="en-US"/>
           </a:p>
@@ -1564,7 +1565,7 @@
           <a:p>
             <a:fld id="{716789AD-CAC3-AD41-B5C9-BF5C62A1889D}" type="datetimeFigureOut">
               <a:rPr kumimoji="1" lang="ja-JP" altLang="en-US" smtClean="0"/>
-              <a:t>2026/3/11</a:t>
+              <a:t>2026/4/2</a:t>
             </a:fld>
             <a:endParaRPr kumimoji="1" lang="ja-JP" altLang="en-US"/>
           </a:p>
@@ -2040,7 +2041,7 @@
           <a:p>
             <a:fld id="{716789AD-CAC3-AD41-B5C9-BF5C62A1889D}" type="datetimeFigureOut">
               <a:rPr kumimoji="1" lang="ja-JP" altLang="en-US" smtClean="0"/>
-              <a:t>2026/3/11</a:t>
+              <a:t>2026/4/2</a:t>
             </a:fld>
             <a:endParaRPr kumimoji="1" lang="ja-JP" altLang="en-US"/>
           </a:p>
@@ -2181,7 +2182,7 @@
           <a:p>
             <a:fld id="{716789AD-CAC3-AD41-B5C9-BF5C62A1889D}" type="datetimeFigureOut">
               <a:rPr kumimoji="1" lang="ja-JP" altLang="en-US" smtClean="0"/>
-              <a:t>2026/3/11</a:t>
+              <a:t>2026/4/2</a:t>
             </a:fld>
             <a:endParaRPr kumimoji="1" lang="ja-JP" altLang="en-US"/>
           </a:p>
@@ -2294,7 +2295,7 @@
           <a:p>
             <a:fld id="{716789AD-CAC3-AD41-B5C9-BF5C62A1889D}" type="datetimeFigureOut">
               <a:rPr kumimoji="1" lang="ja-JP" altLang="en-US" smtClean="0"/>
-              <a:t>2026/3/11</a:t>
+              <a:t>2026/4/2</a:t>
             </a:fld>
             <a:endParaRPr kumimoji="1" lang="ja-JP" altLang="en-US"/>
           </a:p>
@@ -2637,7 +2638,7 @@
           <a:p>
             <a:fld id="{716789AD-CAC3-AD41-B5C9-BF5C62A1889D}" type="datetimeFigureOut">
               <a:rPr kumimoji="1" lang="ja-JP" altLang="en-US" smtClean="0"/>
-              <a:t>2026/3/11</a:t>
+              <a:t>2026/4/2</a:t>
             </a:fld>
             <a:endParaRPr kumimoji="1" lang="ja-JP" altLang="en-US"/>
           </a:p>
@@ -2925,7 +2926,7 @@
           <a:p>
             <a:fld id="{716789AD-CAC3-AD41-B5C9-BF5C62A1889D}" type="datetimeFigureOut">
               <a:rPr kumimoji="1" lang="ja-JP" altLang="en-US" smtClean="0"/>
-              <a:t>2026/3/11</a:t>
+              <a:t>2026/4/2</a:t>
             </a:fld>
             <a:endParaRPr kumimoji="1" lang="ja-JP" altLang="en-US"/>
           </a:p>
@@ -3198,7 +3199,7 @@
           <a:p>
             <a:fld id="{716789AD-CAC3-AD41-B5C9-BF5C62A1889D}" type="datetimeFigureOut">
               <a:rPr kumimoji="1" lang="ja-JP" altLang="en-US" smtClean="0"/>
-              <a:t>2026/3/11</a:t>
+              <a:t>2026/4/2</a:t>
             </a:fld>
             <a:endParaRPr kumimoji="1" lang="ja-JP" altLang="en-US"/>
           </a:p>
@@ -7080,6 +7081,3443 @@
     <p:extLst>
       <p:ext uri="{BB962C8B-B14F-4D97-AF65-F5344CB8AC3E}">
         <p14:creationId xmlns:p14="http://schemas.microsoft.com/office/powerpoint/2010/main" val="623107362"/>
+      </p:ext>
+    </p:extLst>
+  </p:cSld>
+  <p:clrMapOvr>
+    <a:masterClrMapping/>
+  </p:clrMapOvr>
+</p:sld>
+</file>
+
+<file path=ppt/slides/slide3.xml><?xml version="1.0" encoding="utf-8"?>
+<p:sld xmlns:a="http://schemas.openxmlformats.org/drawingml/2006/main" xmlns:r="http://schemas.openxmlformats.org/officeDocument/2006/relationships" xmlns:p="http://schemas.openxmlformats.org/presentationml/2006/main">
+  <p:cSld>
+    <p:spTree>
+      <p:nvGrpSpPr>
+        <p:cNvPr id="1" name="">
+          <a:extLst>
+            <a:ext uri="{FF2B5EF4-FFF2-40B4-BE49-F238E27FC236}">
+              <a16:creationId xmlns:a16="http://schemas.microsoft.com/office/drawing/2014/main" id="{5EE99005-4231-9339-E1E4-EA09DE4979DF}"/>
+            </a:ext>
+          </a:extLst>
+        </p:cNvPr>
+        <p:cNvGrpSpPr/>
+        <p:nvPr/>
+      </p:nvGrpSpPr>
+      <p:grpSpPr>
+        <a:xfrm>
+          <a:off x="0" y="0"/>
+          <a:ext cx="0" cy="0"/>
+          <a:chOff x="0" y="0"/>
+          <a:chExt cx="0" cy="0"/>
+        </a:xfrm>
+      </p:grpSpPr>
+      <p:sp>
+        <p:nvSpPr>
+          <p:cNvPr id="85" name="正方形/長方形 84">
+            <a:extLst>
+              <a:ext uri="{FF2B5EF4-FFF2-40B4-BE49-F238E27FC236}">
+                <a16:creationId xmlns:a16="http://schemas.microsoft.com/office/drawing/2014/main" id="{95054A42-1382-E832-DC84-74985F00E03C}"/>
+              </a:ext>
+            </a:extLst>
+          </p:cNvPr>
+          <p:cNvSpPr/>
+          <p:nvPr/>
+        </p:nvSpPr>
+        <p:spPr>
+          <a:xfrm>
+            <a:off x="1623371" y="2224366"/>
+            <a:ext cx="6618168" cy="3509211"/>
+          </a:xfrm>
+          <a:prstGeom prst="rect">
+            <a:avLst/>
+          </a:prstGeom>
+          <a:noFill/>
+          <a:ln w="25400">
+            <a:solidFill>
+              <a:schemeClr val="accent1"/>
+            </a:solidFill>
+          </a:ln>
+        </p:spPr>
+        <p:style>
+          <a:lnRef idx="2">
+            <a:schemeClr val="accent1">
+              <a:shade val="15000"/>
+            </a:schemeClr>
+          </a:lnRef>
+          <a:fillRef idx="1">
+            <a:schemeClr val="accent1"/>
+          </a:fillRef>
+          <a:effectRef idx="0">
+            <a:schemeClr val="accent1"/>
+          </a:effectRef>
+          <a:fontRef idx="minor">
+            <a:schemeClr val="lt1"/>
+          </a:fontRef>
+        </p:style>
+        <p:txBody>
+          <a:bodyPr rtlCol="0" anchor="ctr"/>
+          <a:lstStyle/>
+          <a:p>
+            <a:pPr algn="ctr"/>
+            <a:endParaRPr kumimoji="1" lang="ja-JP" altLang="en-US"/>
+          </a:p>
+        </p:txBody>
+      </p:sp>
+      <p:sp>
+        <p:nvSpPr>
+          <p:cNvPr id="2" name="タイトル 1">
+            <a:extLst>
+              <a:ext uri="{FF2B5EF4-FFF2-40B4-BE49-F238E27FC236}">
+                <a16:creationId xmlns:a16="http://schemas.microsoft.com/office/drawing/2014/main" id="{31B9D105-21B8-5CC3-BE44-E101F4A98ADA}"/>
+              </a:ext>
+            </a:extLst>
+          </p:cNvPr>
+          <p:cNvSpPr>
+            <a:spLocks noGrp="1"/>
+          </p:cNvSpPr>
+          <p:nvPr>
+            <p:ph type="title"/>
+          </p:nvPr>
+        </p:nvSpPr>
+        <p:spPr>
+          <a:xfrm>
+            <a:off x="0" y="1"/>
+            <a:ext cx="12192000" cy="577516"/>
+          </a:xfrm>
+          <a:solidFill>
+            <a:schemeClr val="bg1">
+              <a:lumMod val="85000"/>
+            </a:schemeClr>
+          </a:solidFill>
+        </p:spPr>
+        <p:txBody>
+          <a:bodyPr>
+            <a:normAutofit fontScale="90000"/>
+          </a:bodyPr>
+          <a:lstStyle/>
+          <a:p>
+            <a:r>
+              <a:rPr lang="ja-JP" altLang="en-US" sz="3600"/>
+              <a:t>鹿大知識基盤</a:t>
+            </a:r>
+            <a:r>
+              <a:rPr kumimoji="1" lang="ja-JP" altLang="en-US" sz="3600"/>
+              <a:t>システム</a:t>
+            </a:r>
+          </a:p>
+        </p:txBody>
+      </p:sp>
+      <p:sp>
+        <p:nvSpPr>
+          <p:cNvPr id="5" name="テキスト ボックス 4">
+            <a:extLst>
+              <a:ext uri="{FF2B5EF4-FFF2-40B4-BE49-F238E27FC236}">
+                <a16:creationId xmlns:a16="http://schemas.microsoft.com/office/drawing/2014/main" id="{F35423EC-8C22-3F31-5FC8-3440D645CF81}"/>
+              </a:ext>
+            </a:extLst>
+          </p:cNvPr>
+          <p:cNvSpPr txBox="1"/>
+          <p:nvPr/>
+        </p:nvSpPr>
+        <p:spPr>
+          <a:xfrm>
+            <a:off x="-1" y="577517"/>
+            <a:ext cx="12192000" cy="1477328"/>
+          </a:xfrm>
+          <a:prstGeom prst="rect">
+            <a:avLst/>
+          </a:prstGeom>
+          <a:noFill/>
+        </p:spPr>
+        <p:txBody>
+          <a:bodyPr wrap="square" rtlCol="0">
+            <a:spAutoFit/>
+          </a:bodyPr>
+          <a:lstStyle/>
+          <a:p>
+            <a:r>
+              <a:rPr lang="ja-JP" altLang="en-US" b="1"/>
+              <a:t>◾️位置付け</a:t>
+            </a:r>
+            <a:endParaRPr lang="en-US" altLang="ja-JP" b="1" dirty="0"/>
+          </a:p>
+          <a:p>
+            <a:r>
+              <a:rPr lang="ja-JP" altLang="en-US"/>
+              <a:t>有体物トラッキングシステム・地域課題検索システム・</a:t>
+            </a:r>
+            <a:r>
+              <a:rPr lang="en-US" altLang="ja-JP" dirty="0"/>
+              <a:t> </a:t>
+            </a:r>
+            <a:r>
+              <a:rPr lang="ja-JP" altLang="en-US"/>
+              <a:t>論文検索システム等を統合する</a:t>
+            </a:r>
+            <a:r>
+              <a:rPr lang="en-US" altLang="ja-JP" dirty="0"/>
+              <a:t>KG</a:t>
+            </a:r>
+            <a:r>
+              <a:rPr lang="ja-JP" altLang="en-US"/>
+              <a:t>を構築、統合的な検索インターフェイスからのアクセスを可能とする。</a:t>
+            </a:r>
+            <a:r>
+              <a:rPr lang="en-US" altLang="ja-JP" dirty="0"/>
+              <a:t> </a:t>
+            </a:r>
+            <a:r>
+              <a:rPr lang="ja-JP" altLang="en-US"/>
+              <a:t>学内で階層的データ管理・データガバナンスを進めるための知識基盤でもある。</a:t>
+            </a:r>
+            <a:endParaRPr lang="en-US" altLang="ja-JP" dirty="0"/>
+          </a:p>
+          <a:p>
+            <a:r>
+              <a:rPr lang="ja-JP" altLang="en-US" b="1"/>
+              <a:t>◾️概要図</a:t>
+            </a:r>
+            <a:endParaRPr lang="en-US" altLang="ja-JP" b="1" dirty="0"/>
+          </a:p>
+        </p:txBody>
+      </p:sp>
+      <p:sp>
+        <p:nvSpPr>
+          <p:cNvPr id="3" name="正方形/長方形 2">
+            <a:extLst>
+              <a:ext uri="{FF2B5EF4-FFF2-40B4-BE49-F238E27FC236}">
+                <a16:creationId xmlns:a16="http://schemas.microsoft.com/office/drawing/2014/main" id="{052F1380-A9A2-9DF3-E80C-4564CFC60924}"/>
+              </a:ext>
+            </a:extLst>
+          </p:cNvPr>
+          <p:cNvSpPr/>
+          <p:nvPr/>
+        </p:nvSpPr>
+        <p:spPr>
+          <a:xfrm>
+            <a:off x="1713358" y="2377394"/>
+            <a:ext cx="2949627" cy="3071465"/>
+          </a:xfrm>
+          <a:prstGeom prst="rect">
+            <a:avLst/>
+          </a:prstGeom>
+          <a:noFill/>
+          <a:ln w="25400">
+            <a:solidFill>
+              <a:schemeClr val="accent2">
+                <a:alpha val="39703"/>
+              </a:schemeClr>
+            </a:solidFill>
+          </a:ln>
+        </p:spPr>
+        <p:style>
+          <a:lnRef idx="2">
+            <a:schemeClr val="accent1">
+              <a:shade val="15000"/>
+            </a:schemeClr>
+          </a:lnRef>
+          <a:fillRef idx="1">
+            <a:schemeClr val="accent1"/>
+          </a:fillRef>
+          <a:effectRef idx="0">
+            <a:schemeClr val="accent1"/>
+          </a:effectRef>
+          <a:fontRef idx="minor">
+            <a:schemeClr val="lt1"/>
+          </a:fontRef>
+        </p:style>
+        <p:txBody>
+          <a:bodyPr rtlCol="0" anchor="ctr"/>
+          <a:lstStyle/>
+          <a:p>
+            <a:pPr algn="ctr"/>
+            <a:endParaRPr kumimoji="1" lang="ja-JP" altLang="en-US"/>
+          </a:p>
+        </p:txBody>
+      </p:sp>
+      <p:sp>
+        <p:nvSpPr>
+          <p:cNvPr id="4" name="テキスト ボックス 3">
+            <a:extLst>
+              <a:ext uri="{FF2B5EF4-FFF2-40B4-BE49-F238E27FC236}">
+                <a16:creationId xmlns:a16="http://schemas.microsoft.com/office/drawing/2014/main" id="{DF8F360B-485A-4BF9-37E6-F630628B70DB}"/>
+              </a:ext>
+            </a:extLst>
+          </p:cNvPr>
+          <p:cNvSpPr txBox="1"/>
+          <p:nvPr/>
+        </p:nvSpPr>
+        <p:spPr>
+          <a:xfrm>
+            <a:off x="3807984" y="5824544"/>
+            <a:ext cx="3920390" cy="461665"/>
+          </a:xfrm>
+          <a:prstGeom prst="rect">
+            <a:avLst/>
+          </a:prstGeom>
+          <a:noFill/>
+        </p:spPr>
+        <p:txBody>
+          <a:bodyPr wrap="square" rtlCol="0">
+            <a:spAutoFit/>
+          </a:bodyPr>
+          <a:lstStyle/>
+          <a:p>
+            <a:r>
+              <a:rPr lang="ja-JP" altLang="en-US" sz="1200"/>
+              <a:t>リンクポリシー</a:t>
+            </a:r>
+            <a:r>
+              <a:rPr lang="en-US" altLang="ja-JP" sz="1200" dirty="0"/>
+              <a:t>: </a:t>
+            </a:r>
+            <a:r>
+              <a:rPr lang="ja-JP" altLang="en-US" sz="1200"/>
+              <a:t>データセントリック</a:t>
+            </a:r>
+            <a:r>
+              <a:rPr lang="en-US" altLang="ja-JP" sz="1200" dirty="0"/>
+              <a:t> -&gt; </a:t>
+            </a:r>
+            <a:r>
+              <a:rPr lang="ja-JP" altLang="en-US" sz="1200"/>
+              <a:t>データソースから見えるものをそのままグラフ関係にする</a:t>
+            </a:r>
+            <a:endParaRPr kumimoji="1" lang="ja-JP" altLang="en-US" sz="1200"/>
+          </a:p>
+        </p:txBody>
+      </p:sp>
+      <p:sp>
+        <p:nvSpPr>
+          <p:cNvPr id="6" name="円/楕円 5">
+            <a:extLst>
+              <a:ext uri="{FF2B5EF4-FFF2-40B4-BE49-F238E27FC236}">
+                <a16:creationId xmlns:a16="http://schemas.microsoft.com/office/drawing/2014/main" id="{B56D1605-D178-E6B6-3E4E-C5559C1C6F81}"/>
+              </a:ext>
+            </a:extLst>
+          </p:cNvPr>
+          <p:cNvSpPr/>
+          <p:nvPr/>
+        </p:nvSpPr>
+        <p:spPr>
+          <a:xfrm>
+            <a:off x="3725537" y="4628501"/>
+            <a:ext cx="215153" cy="217074"/>
+          </a:xfrm>
+          <a:prstGeom prst="ellipse">
+            <a:avLst/>
+          </a:prstGeom>
+          <a:solidFill>
+            <a:schemeClr val="accent1"/>
+          </a:solidFill>
+          <a:ln>
+            <a:noFill/>
+          </a:ln>
+        </p:spPr>
+        <p:style>
+          <a:lnRef idx="2">
+            <a:schemeClr val="accent1">
+              <a:shade val="15000"/>
+            </a:schemeClr>
+          </a:lnRef>
+          <a:fillRef idx="1">
+            <a:schemeClr val="accent1"/>
+          </a:fillRef>
+          <a:effectRef idx="0">
+            <a:schemeClr val="accent1"/>
+          </a:effectRef>
+          <a:fontRef idx="minor">
+            <a:schemeClr val="lt1"/>
+          </a:fontRef>
+        </p:style>
+        <p:txBody>
+          <a:bodyPr rtlCol="0" anchor="ctr"/>
+          <a:lstStyle/>
+          <a:p>
+            <a:pPr algn="ctr"/>
+            <a:endParaRPr kumimoji="1" lang="ja-JP" altLang="en-US"/>
+          </a:p>
+        </p:txBody>
+      </p:sp>
+      <p:sp>
+        <p:nvSpPr>
+          <p:cNvPr id="7" name="円/楕円 6">
+            <a:extLst>
+              <a:ext uri="{FF2B5EF4-FFF2-40B4-BE49-F238E27FC236}">
+                <a16:creationId xmlns:a16="http://schemas.microsoft.com/office/drawing/2014/main" id="{D7D576F2-4941-2B37-82BF-EB8AC5E9FB77}"/>
+              </a:ext>
+            </a:extLst>
+          </p:cNvPr>
+          <p:cNvSpPr/>
+          <p:nvPr/>
+        </p:nvSpPr>
+        <p:spPr>
+          <a:xfrm>
+            <a:off x="3717852" y="3160741"/>
+            <a:ext cx="215153" cy="217074"/>
+          </a:xfrm>
+          <a:prstGeom prst="ellipse">
+            <a:avLst/>
+          </a:prstGeom>
+          <a:solidFill>
+            <a:schemeClr val="accent1"/>
+          </a:solidFill>
+          <a:ln>
+            <a:noFill/>
+          </a:ln>
+        </p:spPr>
+        <p:style>
+          <a:lnRef idx="2">
+            <a:schemeClr val="accent1">
+              <a:shade val="15000"/>
+            </a:schemeClr>
+          </a:lnRef>
+          <a:fillRef idx="1">
+            <a:schemeClr val="accent1"/>
+          </a:fillRef>
+          <a:effectRef idx="0">
+            <a:schemeClr val="accent1"/>
+          </a:effectRef>
+          <a:fontRef idx="minor">
+            <a:schemeClr val="lt1"/>
+          </a:fontRef>
+        </p:style>
+        <p:txBody>
+          <a:bodyPr rtlCol="0" anchor="ctr"/>
+          <a:lstStyle/>
+          <a:p>
+            <a:pPr algn="ctr"/>
+            <a:endParaRPr kumimoji="1" lang="ja-JP" altLang="en-US"/>
+          </a:p>
+        </p:txBody>
+      </p:sp>
+      <p:sp>
+        <p:nvSpPr>
+          <p:cNvPr id="8" name="テキスト ボックス 7">
+            <a:extLst>
+              <a:ext uri="{FF2B5EF4-FFF2-40B4-BE49-F238E27FC236}">
+                <a16:creationId xmlns:a16="http://schemas.microsoft.com/office/drawing/2014/main" id="{7BCAE277-BE22-0176-3A34-A0CAB1F993F6}"/>
+              </a:ext>
+            </a:extLst>
+          </p:cNvPr>
+          <p:cNvSpPr txBox="1"/>
+          <p:nvPr/>
+        </p:nvSpPr>
+        <p:spPr>
+          <a:xfrm>
+            <a:off x="3625363" y="4845574"/>
+            <a:ext cx="415498" cy="230832"/>
+          </a:xfrm>
+          <a:prstGeom prst="rect">
+            <a:avLst/>
+          </a:prstGeom>
+          <a:noFill/>
+        </p:spPr>
+        <p:txBody>
+          <a:bodyPr wrap="none" rtlCol="0">
+            <a:spAutoFit/>
+          </a:bodyPr>
+          <a:lstStyle/>
+          <a:p>
+            <a:r>
+              <a:rPr kumimoji="1" lang="ja-JP" altLang="en-US" sz="900" b="1"/>
+              <a:t>論文</a:t>
+            </a:r>
+          </a:p>
+        </p:txBody>
+      </p:sp>
+      <p:sp>
+        <p:nvSpPr>
+          <p:cNvPr id="9" name="テキスト ボックス 8">
+            <a:extLst>
+              <a:ext uri="{FF2B5EF4-FFF2-40B4-BE49-F238E27FC236}">
+                <a16:creationId xmlns:a16="http://schemas.microsoft.com/office/drawing/2014/main" id="{FEAB3E9B-FA6C-5ECE-F2F2-D2DCAA85FF75}"/>
+              </a:ext>
+            </a:extLst>
+          </p:cNvPr>
+          <p:cNvSpPr txBox="1"/>
+          <p:nvPr/>
+        </p:nvSpPr>
+        <p:spPr>
+          <a:xfrm>
+            <a:off x="3563891" y="3396060"/>
+            <a:ext cx="530915" cy="230832"/>
+          </a:xfrm>
+          <a:prstGeom prst="rect">
+            <a:avLst/>
+          </a:prstGeom>
+          <a:noFill/>
+        </p:spPr>
+        <p:txBody>
+          <a:bodyPr wrap="none" rtlCol="0">
+            <a:spAutoFit/>
+          </a:bodyPr>
+          <a:lstStyle/>
+          <a:p>
+            <a:r>
+              <a:rPr lang="ja-JP" altLang="en-US" sz="900" b="1"/>
+              <a:t>データ</a:t>
+            </a:r>
+            <a:endParaRPr kumimoji="1" lang="ja-JP" altLang="en-US" sz="900" b="1"/>
+          </a:p>
+        </p:txBody>
+      </p:sp>
+      <p:sp>
+        <p:nvSpPr>
+          <p:cNvPr id="10" name="円/楕円 9">
+            <a:extLst>
+              <a:ext uri="{FF2B5EF4-FFF2-40B4-BE49-F238E27FC236}">
+                <a16:creationId xmlns:a16="http://schemas.microsoft.com/office/drawing/2014/main" id="{C0B88294-AD2C-24E0-12F5-4405BDAD7B25}"/>
+              </a:ext>
+            </a:extLst>
+          </p:cNvPr>
+          <p:cNvSpPr/>
+          <p:nvPr/>
+        </p:nvSpPr>
+        <p:spPr>
+          <a:xfrm>
+            <a:off x="2048957" y="5809176"/>
+            <a:ext cx="215153" cy="217074"/>
+          </a:xfrm>
+          <a:prstGeom prst="ellipse">
+            <a:avLst/>
+          </a:prstGeom>
+          <a:solidFill>
+            <a:schemeClr val="accent1"/>
+          </a:solidFill>
+          <a:ln>
+            <a:noFill/>
+          </a:ln>
+        </p:spPr>
+        <p:style>
+          <a:lnRef idx="2">
+            <a:schemeClr val="accent1">
+              <a:shade val="15000"/>
+            </a:schemeClr>
+          </a:lnRef>
+          <a:fillRef idx="1">
+            <a:schemeClr val="accent1"/>
+          </a:fillRef>
+          <a:effectRef idx="0">
+            <a:schemeClr val="accent1"/>
+          </a:effectRef>
+          <a:fontRef idx="minor">
+            <a:schemeClr val="lt1"/>
+          </a:fontRef>
+        </p:style>
+        <p:txBody>
+          <a:bodyPr rtlCol="0" anchor="ctr"/>
+          <a:lstStyle/>
+          <a:p>
+            <a:pPr algn="ctr"/>
+            <a:endParaRPr kumimoji="1" lang="ja-JP" altLang="en-US"/>
+          </a:p>
+        </p:txBody>
+      </p:sp>
+      <p:sp>
+        <p:nvSpPr>
+          <p:cNvPr id="11" name="テキスト ボックス 10">
+            <a:extLst>
+              <a:ext uri="{FF2B5EF4-FFF2-40B4-BE49-F238E27FC236}">
+                <a16:creationId xmlns:a16="http://schemas.microsoft.com/office/drawing/2014/main" id="{D1D321BE-D687-435F-482F-BE872BEF017D}"/>
+              </a:ext>
+            </a:extLst>
+          </p:cNvPr>
+          <p:cNvSpPr txBox="1"/>
+          <p:nvPr/>
+        </p:nvSpPr>
+        <p:spPr>
+          <a:xfrm>
+            <a:off x="2208926" y="5785280"/>
+            <a:ext cx="732893" cy="276999"/>
+          </a:xfrm>
+          <a:prstGeom prst="rect">
+            <a:avLst/>
+          </a:prstGeom>
+          <a:noFill/>
+        </p:spPr>
+        <p:txBody>
+          <a:bodyPr wrap="none" rtlCol="0">
+            <a:spAutoFit/>
+          </a:bodyPr>
+          <a:lstStyle/>
+          <a:p>
+            <a:r>
+              <a:rPr kumimoji="1" lang="en-US" altLang="ja-JP" sz="1200" dirty="0"/>
+              <a:t>: </a:t>
+            </a:r>
+            <a:r>
+              <a:rPr kumimoji="1" lang="ja-JP" altLang="en-US" sz="1200"/>
+              <a:t>ノード</a:t>
+            </a:r>
+          </a:p>
+        </p:txBody>
+      </p:sp>
+      <p:sp>
+        <p:nvSpPr>
+          <p:cNvPr id="12" name="円/楕円 11">
+            <a:extLst>
+              <a:ext uri="{FF2B5EF4-FFF2-40B4-BE49-F238E27FC236}">
+                <a16:creationId xmlns:a16="http://schemas.microsoft.com/office/drawing/2014/main" id="{ED73A52E-E5A4-7CEC-D664-106FAA636364}"/>
+              </a:ext>
+            </a:extLst>
+          </p:cNvPr>
+          <p:cNvSpPr/>
+          <p:nvPr/>
+        </p:nvSpPr>
+        <p:spPr>
+          <a:xfrm>
+            <a:off x="2200377" y="2852410"/>
+            <a:ext cx="215153" cy="217074"/>
+          </a:xfrm>
+          <a:prstGeom prst="ellipse">
+            <a:avLst/>
+          </a:prstGeom>
+          <a:solidFill>
+            <a:schemeClr val="accent1"/>
+          </a:solidFill>
+          <a:ln>
+            <a:noFill/>
+          </a:ln>
+        </p:spPr>
+        <p:style>
+          <a:lnRef idx="2">
+            <a:schemeClr val="accent1">
+              <a:shade val="15000"/>
+            </a:schemeClr>
+          </a:lnRef>
+          <a:fillRef idx="1">
+            <a:schemeClr val="accent1"/>
+          </a:fillRef>
+          <a:effectRef idx="0">
+            <a:schemeClr val="accent1"/>
+          </a:effectRef>
+          <a:fontRef idx="minor">
+            <a:schemeClr val="lt1"/>
+          </a:fontRef>
+        </p:style>
+        <p:txBody>
+          <a:bodyPr rtlCol="0" anchor="ctr"/>
+          <a:lstStyle/>
+          <a:p>
+            <a:pPr algn="ctr"/>
+            <a:endParaRPr kumimoji="1" lang="ja-JP" altLang="en-US"/>
+          </a:p>
+        </p:txBody>
+      </p:sp>
+      <p:sp>
+        <p:nvSpPr>
+          <p:cNvPr id="13" name="テキスト ボックス 12">
+            <a:extLst>
+              <a:ext uri="{FF2B5EF4-FFF2-40B4-BE49-F238E27FC236}">
+                <a16:creationId xmlns:a16="http://schemas.microsoft.com/office/drawing/2014/main" id="{AC0F0DEB-18FC-7F62-7AF4-A86B67D66279}"/>
+              </a:ext>
+            </a:extLst>
+          </p:cNvPr>
+          <p:cNvSpPr txBox="1"/>
+          <p:nvPr/>
+        </p:nvSpPr>
+        <p:spPr>
+          <a:xfrm>
+            <a:off x="1865939" y="3854270"/>
+            <a:ext cx="877163" cy="230832"/>
+          </a:xfrm>
+          <a:prstGeom prst="rect">
+            <a:avLst/>
+          </a:prstGeom>
+          <a:noFill/>
+        </p:spPr>
+        <p:txBody>
+          <a:bodyPr wrap="none" rtlCol="0">
+            <a:spAutoFit/>
+          </a:bodyPr>
+          <a:lstStyle/>
+          <a:p>
+            <a:r>
+              <a:rPr lang="ja-JP" altLang="en-US" sz="900" b="1"/>
+              <a:t>ファシリティ</a:t>
+            </a:r>
+            <a:endParaRPr kumimoji="1" lang="ja-JP" altLang="en-US" sz="900" b="1"/>
+          </a:p>
+        </p:txBody>
+      </p:sp>
+      <p:sp>
+        <p:nvSpPr>
+          <p:cNvPr id="14" name="円/楕円 13">
+            <a:extLst>
+              <a:ext uri="{FF2B5EF4-FFF2-40B4-BE49-F238E27FC236}">
+                <a16:creationId xmlns:a16="http://schemas.microsoft.com/office/drawing/2014/main" id="{EC82C575-1DA2-7242-305D-CE3E50EB5226}"/>
+              </a:ext>
+            </a:extLst>
+          </p:cNvPr>
+          <p:cNvSpPr/>
+          <p:nvPr/>
+        </p:nvSpPr>
+        <p:spPr>
+          <a:xfrm>
+            <a:off x="2205833" y="4336884"/>
+            <a:ext cx="215153" cy="217074"/>
+          </a:xfrm>
+          <a:prstGeom prst="ellipse">
+            <a:avLst/>
+          </a:prstGeom>
+          <a:solidFill>
+            <a:schemeClr val="accent1"/>
+          </a:solidFill>
+          <a:ln>
+            <a:noFill/>
+          </a:ln>
+        </p:spPr>
+        <p:style>
+          <a:lnRef idx="2">
+            <a:schemeClr val="accent1">
+              <a:shade val="15000"/>
+            </a:schemeClr>
+          </a:lnRef>
+          <a:fillRef idx="1">
+            <a:schemeClr val="accent1"/>
+          </a:fillRef>
+          <a:effectRef idx="0">
+            <a:schemeClr val="accent1"/>
+          </a:effectRef>
+          <a:fontRef idx="minor">
+            <a:schemeClr val="lt1"/>
+          </a:fontRef>
+        </p:style>
+        <p:txBody>
+          <a:bodyPr rtlCol="0" anchor="ctr"/>
+          <a:lstStyle/>
+          <a:p>
+            <a:pPr algn="ctr"/>
+            <a:endParaRPr kumimoji="1" lang="ja-JP" altLang="en-US"/>
+          </a:p>
+        </p:txBody>
+      </p:sp>
+      <p:sp>
+        <p:nvSpPr>
+          <p:cNvPr id="15" name="テキスト ボックス 14">
+            <a:extLst>
+              <a:ext uri="{FF2B5EF4-FFF2-40B4-BE49-F238E27FC236}">
+                <a16:creationId xmlns:a16="http://schemas.microsoft.com/office/drawing/2014/main" id="{B8296B92-C62A-FD09-D78D-7764AC0B8837}"/>
+              </a:ext>
+            </a:extLst>
+          </p:cNvPr>
+          <p:cNvSpPr txBox="1"/>
+          <p:nvPr/>
+        </p:nvSpPr>
+        <p:spPr>
+          <a:xfrm>
+            <a:off x="2104478" y="4559775"/>
+            <a:ext cx="415498" cy="230832"/>
+          </a:xfrm>
+          <a:prstGeom prst="rect">
+            <a:avLst/>
+          </a:prstGeom>
+          <a:noFill/>
+        </p:spPr>
+        <p:txBody>
+          <a:bodyPr wrap="none" rtlCol="0">
+            <a:spAutoFit/>
+          </a:bodyPr>
+          <a:lstStyle/>
+          <a:p>
+            <a:r>
+              <a:rPr kumimoji="1" lang="ja-JP" altLang="en-US" sz="900" b="1"/>
+              <a:t>地名</a:t>
+            </a:r>
+          </a:p>
+        </p:txBody>
+      </p:sp>
+      <p:sp>
+        <p:nvSpPr>
+          <p:cNvPr id="17" name="円/楕円 16">
+            <a:extLst>
+              <a:ext uri="{FF2B5EF4-FFF2-40B4-BE49-F238E27FC236}">
+                <a16:creationId xmlns:a16="http://schemas.microsoft.com/office/drawing/2014/main" id="{2EC618BE-D87C-FD98-E92C-78C3A383B91C}"/>
+              </a:ext>
+            </a:extLst>
+          </p:cNvPr>
+          <p:cNvSpPr/>
+          <p:nvPr/>
+        </p:nvSpPr>
+        <p:spPr>
+          <a:xfrm>
+            <a:off x="3710168" y="3894621"/>
+            <a:ext cx="215153" cy="217074"/>
+          </a:xfrm>
+          <a:prstGeom prst="ellipse">
+            <a:avLst/>
+          </a:prstGeom>
+          <a:solidFill>
+            <a:schemeClr val="accent1"/>
+          </a:solidFill>
+          <a:ln>
+            <a:noFill/>
+          </a:ln>
+        </p:spPr>
+        <p:style>
+          <a:lnRef idx="2">
+            <a:schemeClr val="accent1">
+              <a:shade val="15000"/>
+            </a:schemeClr>
+          </a:lnRef>
+          <a:fillRef idx="1">
+            <a:schemeClr val="accent1"/>
+          </a:fillRef>
+          <a:effectRef idx="0">
+            <a:schemeClr val="accent1"/>
+          </a:effectRef>
+          <a:fontRef idx="minor">
+            <a:schemeClr val="lt1"/>
+          </a:fontRef>
+        </p:style>
+        <p:txBody>
+          <a:bodyPr rtlCol="0" anchor="ctr"/>
+          <a:lstStyle/>
+          <a:p>
+            <a:pPr algn="ctr"/>
+            <a:endParaRPr kumimoji="1" lang="ja-JP" altLang="en-US"/>
+          </a:p>
+        </p:txBody>
+      </p:sp>
+      <p:sp>
+        <p:nvSpPr>
+          <p:cNvPr id="18" name="テキスト ボックス 17">
+            <a:extLst>
+              <a:ext uri="{FF2B5EF4-FFF2-40B4-BE49-F238E27FC236}">
+                <a16:creationId xmlns:a16="http://schemas.microsoft.com/office/drawing/2014/main" id="{F6BBD1E0-7E59-9B93-74FE-BF236E767B53}"/>
+              </a:ext>
+            </a:extLst>
+          </p:cNvPr>
+          <p:cNvSpPr txBox="1"/>
+          <p:nvPr/>
+        </p:nvSpPr>
+        <p:spPr>
+          <a:xfrm>
+            <a:off x="3563891" y="4111148"/>
+            <a:ext cx="530915" cy="230832"/>
+          </a:xfrm>
+          <a:prstGeom prst="rect">
+            <a:avLst/>
+          </a:prstGeom>
+          <a:noFill/>
+        </p:spPr>
+        <p:txBody>
+          <a:bodyPr wrap="none" rtlCol="0">
+            <a:spAutoFit/>
+          </a:bodyPr>
+          <a:lstStyle/>
+          <a:p>
+            <a:r>
+              <a:rPr lang="ja-JP" altLang="en-US" sz="900" b="1"/>
+              <a:t>有体物</a:t>
+            </a:r>
+            <a:endParaRPr kumimoji="1" lang="ja-JP" altLang="en-US" sz="900" b="1"/>
+          </a:p>
+        </p:txBody>
+      </p:sp>
+      <p:sp>
+        <p:nvSpPr>
+          <p:cNvPr id="20" name="正方形/長方形 19">
+            <a:extLst>
+              <a:ext uri="{FF2B5EF4-FFF2-40B4-BE49-F238E27FC236}">
+                <a16:creationId xmlns:a16="http://schemas.microsoft.com/office/drawing/2014/main" id="{21D7DCE4-8CB3-FE45-2A3C-930A7D916E91}"/>
+              </a:ext>
+            </a:extLst>
+          </p:cNvPr>
+          <p:cNvSpPr/>
+          <p:nvPr/>
+        </p:nvSpPr>
+        <p:spPr>
+          <a:xfrm>
+            <a:off x="2045742" y="6090227"/>
+            <a:ext cx="545566" cy="217074"/>
+          </a:xfrm>
+          <a:prstGeom prst="rect">
+            <a:avLst/>
+          </a:prstGeom>
+          <a:ln>
+            <a:noFill/>
+          </a:ln>
+        </p:spPr>
+        <p:style>
+          <a:lnRef idx="2">
+            <a:schemeClr val="accent1">
+              <a:shade val="15000"/>
+            </a:schemeClr>
+          </a:lnRef>
+          <a:fillRef idx="1">
+            <a:schemeClr val="accent1"/>
+          </a:fillRef>
+          <a:effectRef idx="0">
+            <a:schemeClr val="accent1"/>
+          </a:effectRef>
+          <a:fontRef idx="minor">
+            <a:schemeClr val="lt1"/>
+          </a:fontRef>
+        </p:style>
+        <p:txBody>
+          <a:bodyPr rtlCol="0" anchor="ctr"/>
+          <a:lstStyle/>
+          <a:p>
+            <a:pPr algn="ctr"/>
+            <a:endParaRPr kumimoji="1" lang="ja-JP" altLang="en-US"/>
+          </a:p>
+        </p:txBody>
+      </p:sp>
+      <p:sp>
+        <p:nvSpPr>
+          <p:cNvPr id="21" name="テキスト ボックス 20">
+            <a:extLst>
+              <a:ext uri="{FF2B5EF4-FFF2-40B4-BE49-F238E27FC236}">
+                <a16:creationId xmlns:a16="http://schemas.microsoft.com/office/drawing/2014/main" id="{F30B4305-A4A6-063F-621C-5BA7772FD1EA}"/>
+              </a:ext>
+            </a:extLst>
+          </p:cNvPr>
+          <p:cNvSpPr txBox="1"/>
+          <p:nvPr/>
+        </p:nvSpPr>
+        <p:spPr>
+          <a:xfrm>
+            <a:off x="2550134" y="6066330"/>
+            <a:ext cx="798617" cy="276999"/>
+          </a:xfrm>
+          <a:prstGeom prst="rect">
+            <a:avLst/>
+          </a:prstGeom>
+          <a:noFill/>
+        </p:spPr>
+        <p:txBody>
+          <a:bodyPr wrap="none" rtlCol="0">
+            <a:spAutoFit/>
+          </a:bodyPr>
+          <a:lstStyle/>
+          <a:p>
+            <a:r>
+              <a:rPr lang="en-US" altLang="ja-JP" sz="1200" dirty="0"/>
+              <a:t>: </a:t>
+            </a:r>
+            <a:r>
+              <a:rPr lang="ja-JP" altLang="en-US" sz="1200"/>
+              <a:t>外部</a:t>
+            </a:r>
+            <a:r>
+              <a:rPr lang="en-US" altLang="ja-JP" sz="1200" dirty="0"/>
+              <a:t>DB</a:t>
+            </a:r>
+            <a:endParaRPr kumimoji="1" lang="ja-JP" altLang="en-US" sz="1200"/>
+          </a:p>
+        </p:txBody>
+      </p:sp>
+      <p:cxnSp>
+        <p:nvCxnSpPr>
+          <p:cNvPr id="23" name="直線矢印コネクタ 22">
+            <a:extLst>
+              <a:ext uri="{FF2B5EF4-FFF2-40B4-BE49-F238E27FC236}">
+                <a16:creationId xmlns:a16="http://schemas.microsoft.com/office/drawing/2014/main" id="{C302EDB8-461B-D332-B2B7-9A7CADC3CA06}"/>
+              </a:ext>
+            </a:extLst>
+          </p:cNvPr>
+          <p:cNvCxnSpPr>
+            <a:cxnSpLocks/>
+            <a:stCxn id="17" idx="2"/>
+            <a:endCxn id="12" idx="6"/>
+          </p:cNvCxnSpPr>
+          <p:nvPr/>
+        </p:nvCxnSpPr>
+        <p:spPr>
+          <a:xfrm flipH="1" flipV="1">
+            <a:off x="2415530" y="2960947"/>
+            <a:ext cx="1294638" cy="1042211"/>
+          </a:xfrm>
+          <a:prstGeom prst="straightConnector1">
+            <a:avLst/>
+          </a:prstGeom>
+          <a:ln>
+            <a:solidFill>
+              <a:schemeClr val="accent2">
+                <a:alpha val="40173"/>
+              </a:schemeClr>
+            </a:solidFill>
+            <a:tailEnd type="triangle"/>
+          </a:ln>
+        </p:spPr>
+        <p:style>
+          <a:lnRef idx="2">
+            <a:schemeClr val="accent1"/>
+          </a:lnRef>
+          <a:fillRef idx="0">
+            <a:schemeClr val="accent1"/>
+          </a:fillRef>
+          <a:effectRef idx="1">
+            <a:schemeClr val="accent1"/>
+          </a:effectRef>
+          <a:fontRef idx="minor">
+            <a:schemeClr val="tx1"/>
+          </a:fontRef>
+        </p:style>
+      </p:cxnSp>
+      <p:cxnSp>
+        <p:nvCxnSpPr>
+          <p:cNvPr id="25" name="直線矢印コネクタ 24">
+            <a:extLst>
+              <a:ext uri="{FF2B5EF4-FFF2-40B4-BE49-F238E27FC236}">
+                <a16:creationId xmlns:a16="http://schemas.microsoft.com/office/drawing/2014/main" id="{561CD228-EE72-97A7-0B6F-232793CECB8C}"/>
+              </a:ext>
+            </a:extLst>
+          </p:cNvPr>
+          <p:cNvCxnSpPr>
+            <a:cxnSpLocks/>
+            <a:stCxn id="6" idx="2"/>
+            <a:endCxn id="12" idx="6"/>
+          </p:cNvCxnSpPr>
+          <p:nvPr/>
+        </p:nvCxnSpPr>
+        <p:spPr>
+          <a:xfrm flipH="1" flipV="1">
+            <a:off x="2415530" y="2960947"/>
+            <a:ext cx="1310007" cy="1776091"/>
+          </a:xfrm>
+          <a:prstGeom prst="straightConnector1">
+            <a:avLst/>
+          </a:prstGeom>
+          <a:ln>
+            <a:solidFill>
+              <a:schemeClr val="accent2">
+                <a:alpha val="40000"/>
+              </a:schemeClr>
+            </a:solidFill>
+            <a:tailEnd type="triangle"/>
+          </a:ln>
+        </p:spPr>
+        <p:style>
+          <a:lnRef idx="2">
+            <a:schemeClr val="accent1"/>
+          </a:lnRef>
+          <a:fillRef idx="0">
+            <a:schemeClr val="accent1"/>
+          </a:fillRef>
+          <a:effectRef idx="1">
+            <a:schemeClr val="accent1"/>
+          </a:effectRef>
+          <a:fontRef idx="minor">
+            <a:schemeClr val="tx1"/>
+          </a:fontRef>
+        </p:style>
+      </p:cxnSp>
+      <p:cxnSp>
+        <p:nvCxnSpPr>
+          <p:cNvPr id="28" name="直線矢印コネクタ 27">
+            <a:extLst>
+              <a:ext uri="{FF2B5EF4-FFF2-40B4-BE49-F238E27FC236}">
+                <a16:creationId xmlns:a16="http://schemas.microsoft.com/office/drawing/2014/main" id="{1963FC60-7455-439F-234F-254EF6A9F272}"/>
+              </a:ext>
+            </a:extLst>
+          </p:cNvPr>
+          <p:cNvCxnSpPr>
+            <a:cxnSpLocks/>
+            <a:stCxn id="7" idx="2"/>
+            <a:endCxn id="12" idx="6"/>
+          </p:cNvCxnSpPr>
+          <p:nvPr/>
+        </p:nvCxnSpPr>
+        <p:spPr>
+          <a:xfrm flipH="1" flipV="1">
+            <a:off x="2415530" y="2960947"/>
+            <a:ext cx="1302322" cy="308331"/>
+          </a:xfrm>
+          <a:prstGeom prst="straightConnector1">
+            <a:avLst/>
+          </a:prstGeom>
+          <a:ln>
+            <a:solidFill>
+              <a:schemeClr val="accent2">
+                <a:alpha val="40341"/>
+              </a:schemeClr>
+            </a:solidFill>
+            <a:tailEnd type="triangle"/>
+          </a:ln>
+        </p:spPr>
+        <p:style>
+          <a:lnRef idx="2">
+            <a:schemeClr val="accent1"/>
+          </a:lnRef>
+          <a:fillRef idx="0">
+            <a:schemeClr val="accent1"/>
+          </a:fillRef>
+          <a:effectRef idx="1">
+            <a:schemeClr val="accent1"/>
+          </a:effectRef>
+          <a:fontRef idx="minor">
+            <a:schemeClr val="tx1"/>
+          </a:fontRef>
+        </p:style>
+      </p:cxnSp>
+      <p:cxnSp>
+        <p:nvCxnSpPr>
+          <p:cNvPr id="31" name="直線矢印コネクタ 30">
+            <a:extLst>
+              <a:ext uri="{FF2B5EF4-FFF2-40B4-BE49-F238E27FC236}">
+                <a16:creationId xmlns:a16="http://schemas.microsoft.com/office/drawing/2014/main" id="{D12B729A-AC9D-8577-48A8-6ED593AC3CEE}"/>
+              </a:ext>
+            </a:extLst>
+          </p:cNvPr>
+          <p:cNvCxnSpPr>
+            <a:cxnSpLocks/>
+            <a:stCxn id="6" idx="2"/>
+            <a:endCxn id="14" idx="6"/>
+          </p:cNvCxnSpPr>
+          <p:nvPr/>
+        </p:nvCxnSpPr>
+        <p:spPr>
+          <a:xfrm flipH="1" flipV="1">
+            <a:off x="2420986" y="4445421"/>
+            <a:ext cx="1304551" cy="291617"/>
+          </a:xfrm>
+          <a:prstGeom prst="straightConnector1">
+            <a:avLst/>
+          </a:prstGeom>
+          <a:ln>
+            <a:solidFill>
+              <a:schemeClr val="accent2">
+                <a:alpha val="40000"/>
+              </a:schemeClr>
+            </a:solidFill>
+            <a:tailEnd type="triangle"/>
+          </a:ln>
+        </p:spPr>
+        <p:style>
+          <a:lnRef idx="2">
+            <a:schemeClr val="accent1"/>
+          </a:lnRef>
+          <a:fillRef idx="0">
+            <a:schemeClr val="accent1"/>
+          </a:fillRef>
+          <a:effectRef idx="1">
+            <a:schemeClr val="accent1"/>
+          </a:effectRef>
+          <a:fontRef idx="minor">
+            <a:schemeClr val="tx1"/>
+          </a:fontRef>
+        </p:style>
+      </p:cxnSp>
+      <p:cxnSp>
+        <p:nvCxnSpPr>
+          <p:cNvPr id="36" name="曲線コネクタ 35">
+            <a:extLst>
+              <a:ext uri="{FF2B5EF4-FFF2-40B4-BE49-F238E27FC236}">
+                <a16:creationId xmlns:a16="http://schemas.microsoft.com/office/drawing/2014/main" id="{DCEE263D-D221-3DFB-33AD-57295099E7D0}"/>
+              </a:ext>
+            </a:extLst>
+          </p:cNvPr>
+          <p:cNvCxnSpPr>
+            <a:stCxn id="6" idx="6"/>
+            <a:endCxn id="17" idx="6"/>
+          </p:cNvCxnSpPr>
+          <p:nvPr/>
+        </p:nvCxnSpPr>
+        <p:spPr>
+          <a:xfrm flipH="1" flipV="1">
+            <a:off x="3925321" y="4003158"/>
+            <a:ext cx="15369" cy="733880"/>
+          </a:xfrm>
+          <a:prstGeom prst="curvedConnector3">
+            <a:avLst>
+              <a:gd name="adj1" fmla="val -1487410"/>
+            </a:avLst>
+          </a:prstGeom>
+          <a:ln>
+            <a:solidFill>
+              <a:schemeClr val="accent2">
+                <a:alpha val="39729"/>
+              </a:schemeClr>
+            </a:solidFill>
+            <a:tailEnd type="triangle"/>
+          </a:ln>
+        </p:spPr>
+        <p:style>
+          <a:lnRef idx="2">
+            <a:schemeClr val="accent1"/>
+          </a:lnRef>
+          <a:fillRef idx="0">
+            <a:schemeClr val="accent1"/>
+          </a:fillRef>
+          <a:effectRef idx="1">
+            <a:schemeClr val="accent1"/>
+          </a:effectRef>
+          <a:fontRef idx="minor">
+            <a:schemeClr val="tx1"/>
+          </a:fontRef>
+        </p:style>
+      </p:cxnSp>
+      <p:cxnSp>
+        <p:nvCxnSpPr>
+          <p:cNvPr id="38" name="曲線コネクタ 37">
+            <a:extLst>
+              <a:ext uri="{FF2B5EF4-FFF2-40B4-BE49-F238E27FC236}">
+                <a16:creationId xmlns:a16="http://schemas.microsoft.com/office/drawing/2014/main" id="{A9924729-06BF-6C34-7414-89BC2D1AF063}"/>
+              </a:ext>
+            </a:extLst>
+          </p:cNvPr>
+          <p:cNvCxnSpPr>
+            <a:cxnSpLocks/>
+            <a:stCxn id="6" idx="6"/>
+            <a:endCxn id="7" idx="6"/>
+          </p:cNvCxnSpPr>
+          <p:nvPr/>
+        </p:nvCxnSpPr>
+        <p:spPr>
+          <a:xfrm flipH="1" flipV="1">
+            <a:off x="3933005" y="3269278"/>
+            <a:ext cx="7685" cy="1467760"/>
+          </a:xfrm>
+          <a:prstGeom prst="curvedConnector3">
+            <a:avLst>
+              <a:gd name="adj1" fmla="val -2974626"/>
+            </a:avLst>
+          </a:prstGeom>
+          <a:ln>
+            <a:solidFill>
+              <a:schemeClr val="accent2">
+                <a:alpha val="40341"/>
+              </a:schemeClr>
+            </a:solidFill>
+            <a:tailEnd type="triangle"/>
+          </a:ln>
+        </p:spPr>
+        <p:style>
+          <a:lnRef idx="2">
+            <a:schemeClr val="accent1"/>
+          </a:lnRef>
+          <a:fillRef idx="0">
+            <a:schemeClr val="accent1"/>
+          </a:fillRef>
+          <a:effectRef idx="1">
+            <a:schemeClr val="accent1"/>
+          </a:effectRef>
+          <a:fontRef idx="minor">
+            <a:schemeClr val="tx1"/>
+          </a:fontRef>
+        </p:style>
+      </p:cxnSp>
+      <p:sp>
+        <p:nvSpPr>
+          <p:cNvPr id="42" name="テキスト ボックス 41">
+            <a:extLst>
+              <a:ext uri="{FF2B5EF4-FFF2-40B4-BE49-F238E27FC236}">
+                <a16:creationId xmlns:a16="http://schemas.microsoft.com/office/drawing/2014/main" id="{5AD3632F-81EC-2979-1D26-C36FBA1A0991}"/>
+              </a:ext>
+            </a:extLst>
+          </p:cNvPr>
+          <p:cNvSpPr txBox="1"/>
+          <p:nvPr/>
+        </p:nvSpPr>
+        <p:spPr>
+          <a:xfrm>
+            <a:off x="2447136" y="5452910"/>
+            <a:ext cx="1657826" cy="307777"/>
+          </a:xfrm>
+          <a:prstGeom prst="rect">
+            <a:avLst/>
+          </a:prstGeom>
+          <a:noFill/>
+        </p:spPr>
+        <p:txBody>
+          <a:bodyPr wrap="none" rtlCol="0">
+            <a:spAutoFit/>
+          </a:bodyPr>
+          <a:lstStyle/>
+          <a:p>
+            <a:r>
+              <a:rPr kumimoji="1" lang="en-US" altLang="ja-JP" sz="1400" dirty="0"/>
+              <a:t>Knowledge Graph</a:t>
+            </a:r>
+          </a:p>
+        </p:txBody>
+      </p:sp>
+      <p:sp>
+        <p:nvSpPr>
+          <p:cNvPr id="43" name="正方形/長方形 42">
+            <a:extLst>
+              <a:ext uri="{FF2B5EF4-FFF2-40B4-BE49-F238E27FC236}">
+                <a16:creationId xmlns:a16="http://schemas.microsoft.com/office/drawing/2014/main" id="{DE7D004D-6990-5D00-E584-7FA462C56514}"/>
+              </a:ext>
+            </a:extLst>
+          </p:cNvPr>
+          <p:cNvSpPr/>
+          <p:nvPr/>
+        </p:nvSpPr>
+        <p:spPr>
+          <a:xfrm>
+            <a:off x="6240085" y="2981097"/>
+            <a:ext cx="545566" cy="217074"/>
+          </a:xfrm>
+          <a:prstGeom prst="rect">
+            <a:avLst/>
+          </a:prstGeom>
+          <a:ln>
+            <a:noFill/>
+          </a:ln>
+        </p:spPr>
+        <p:style>
+          <a:lnRef idx="2">
+            <a:schemeClr val="accent1">
+              <a:shade val="15000"/>
+            </a:schemeClr>
+          </a:lnRef>
+          <a:fillRef idx="1">
+            <a:schemeClr val="accent1"/>
+          </a:fillRef>
+          <a:effectRef idx="0">
+            <a:schemeClr val="accent1"/>
+          </a:effectRef>
+          <a:fontRef idx="minor">
+            <a:schemeClr val="lt1"/>
+          </a:fontRef>
+        </p:style>
+        <p:txBody>
+          <a:bodyPr rtlCol="0" anchor="ctr"/>
+          <a:lstStyle/>
+          <a:p>
+            <a:pPr algn="dist"/>
+            <a:endParaRPr kumimoji="1" lang="ja-JP" altLang="en-US"/>
+          </a:p>
+        </p:txBody>
+      </p:sp>
+      <p:sp>
+        <p:nvSpPr>
+          <p:cNvPr id="44" name="正方形/長方形 43">
+            <a:extLst>
+              <a:ext uri="{FF2B5EF4-FFF2-40B4-BE49-F238E27FC236}">
+                <a16:creationId xmlns:a16="http://schemas.microsoft.com/office/drawing/2014/main" id="{2E4A1D1A-C7F3-5536-F1A9-370743F8DA04}"/>
+              </a:ext>
+            </a:extLst>
+          </p:cNvPr>
+          <p:cNvSpPr/>
+          <p:nvPr/>
+        </p:nvSpPr>
+        <p:spPr>
+          <a:xfrm>
+            <a:off x="6240085" y="3548024"/>
+            <a:ext cx="545566" cy="217074"/>
+          </a:xfrm>
+          <a:prstGeom prst="rect">
+            <a:avLst/>
+          </a:prstGeom>
+          <a:ln>
+            <a:noFill/>
+          </a:ln>
+        </p:spPr>
+        <p:style>
+          <a:lnRef idx="2">
+            <a:schemeClr val="accent1">
+              <a:shade val="15000"/>
+            </a:schemeClr>
+          </a:lnRef>
+          <a:fillRef idx="1">
+            <a:schemeClr val="accent1"/>
+          </a:fillRef>
+          <a:effectRef idx="0">
+            <a:schemeClr val="accent1"/>
+          </a:effectRef>
+          <a:fontRef idx="minor">
+            <a:schemeClr val="lt1"/>
+          </a:fontRef>
+        </p:style>
+        <p:txBody>
+          <a:bodyPr rtlCol="0" anchor="ctr"/>
+          <a:lstStyle/>
+          <a:p>
+            <a:pPr algn="dist"/>
+            <a:endParaRPr kumimoji="1" lang="ja-JP" altLang="en-US"/>
+          </a:p>
+        </p:txBody>
+      </p:sp>
+      <p:sp>
+        <p:nvSpPr>
+          <p:cNvPr id="45" name="正方形/長方形 44">
+            <a:extLst>
+              <a:ext uri="{FF2B5EF4-FFF2-40B4-BE49-F238E27FC236}">
+                <a16:creationId xmlns:a16="http://schemas.microsoft.com/office/drawing/2014/main" id="{A992614D-6C99-65F9-E483-8AFFAFBE9163}"/>
+              </a:ext>
+            </a:extLst>
+          </p:cNvPr>
+          <p:cNvSpPr/>
+          <p:nvPr/>
+        </p:nvSpPr>
+        <p:spPr>
+          <a:xfrm>
+            <a:off x="6240085" y="4114951"/>
+            <a:ext cx="545566" cy="217074"/>
+          </a:xfrm>
+          <a:prstGeom prst="rect">
+            <a:avLst/>
+          </a:prstGeom>
+          <a:ln>
+            <a:noFill/>
+          </a:ln>
+        </p:spPr>
+        <p:style>
+          <a:lnRef idx="2">
+            <a:schemeClr val="accent1">
+              <a:shade val="15000"/>
+            </a:schemeClr>
+          </a:lnRef>
+          <a:fillRef idx="1">
+            <a:schemeClr val="accent1"/>
+          </a:fillRef>
+          <a:effectRef idx="0">
+            <a:schemeClr val="accent1"/>
+          </a:effectRef>
+          <a:fontRef idx="minor">
+            <a:schemeClr val="lt1"/>
+          </a:fontRef>
+        </p:style>
+        <p:txBody>
+          <a:bodyPr rtlCol="0" anchor="ctr"/>
+          <a:lstStyle/>
+          <a:p>
+            <a:pPr algn="dist"/>
+            <a:endParaRPr kumimoji="1" lang="ja-JP" altLang="en-US"/>
+          </a:p>
+        </p:txBody>
+      </p:sp>
+      <p:sp>
+        <p:nvSpPr>
+          <p:cNvPr id="46" name="正方形/長方形 45">
+            <a:extLst>
+              <a:ext uri="{FF2B5EF4-FFF2-40B4-BE49-F238E27FC236}">
+                <a16:creationId xmlns:a16="http://schemas.microsoft.com/office/drawing/2014/main" id="{B8D3700B-5798-763F-F100-342E10ABFFD8}"/>
+              </a:ext>
+            </a:extLst>
+          </p:cNvPr>
+          <p:cNvSpPr/>
+          <p:nvPr/>
+        </p:nvSpPr>
+        <p:spPr>
+          <a:xfrm>
+            <a:off x="6240085" y="4681878"/>
+            <a:ext cx="545566" cy="217074"/>
+          </a:xfrm>
+          <a:prstGeom prst="rect">
+            <a:avLst/>
+          </a:prstGeom>
+          <a:ln>
+            <a:noFill/>
+          </a:ln>
+        </p:spPr>
+        <p:style>
+          <a:lnRef idx="2">
+            <a:schemeClr val="accent1">
+              <a:shade val="15000"/>
+            </a:schemeClr>
+          </a:lnRef>
+          <a:fillRef idx="1">
+            <a:schemeClr val="accent1"/>
+          </a:fillRef>
+          <a:effectRef idx="0">
+            <a:schemeClr val="accent1"/>
+          </a:effectRef>
+          <a:fontRef idx="minor">
+            <a:schemeClr val="lt1"/>
+          </a:fontRef>
+        </p:style>
+        <p:txBody>
+          <a:bodyPr rtlCol="0" anchor="ctr"/>
+          <a:lstStyle/>
+          <a:p>
+            <a:pPr algn="dist"/>
+            <a:endParaRPr kumimoji="1" lang="ja-JP" altLang="en-US"/>
+          </a:p>
+        </p:txBody>
+      </p:sp>
+      <p:cxnSp>
+        <p:nvCxnSpPr>
+          <p:cNvPr id="19" name="直線矢印コネクタ 18">
+            <a:extLst>
+              <a:ext uri="{FF2B5EF4-FFF2-40B4-BE49-F238E27FC236}">
+                <a16:creationId xmlns:a16="http://schemas.microsoft.com/office/drawing/2014/main" id="{0F4FFB7E-C192-55B3-6314-74B1E1DA45F3}"/>
+              </a:ext>
+            </a:extLst>
+          </p:cNvPr>
+          <p:cNvCxnSpPr>
+            <a:cxnSpLocks/>
+            <a:stCxn id="64" idx="3"/>
+            <a:endCxn id="46" idx="1"/>
+          </p:cNvCxnSpPr>
+          <p:nvPr/>
+        </p:nvCxnSpPr>
+        <p:spPr>
+          <a:xfrm>
+            <a:off x="5591853" y="3793049"/>
+            <a:ext cx="648232" cy="997366"/>
+          </a:xfrm>
+          <a:prstGeom prst="straightConnector1">
+            <a:avLst/>
+          </a:prstGeom>
+          <a:ln>
+            <a:solidFill>
+              <a:schemeClr val="accent1"/>
+            </a:solidFill>
+            <a:headEnd type="none"/>
+            <a:tailEnd type="triangle"/>
+          </a:ln>
+        </p:spPr>
+        <p:style>
+          <a:lnRef idx="2">
+            <a:schemeClr val="accent1"/>
+          </a:lnRef>
+          <a:fillRef idx="0">
+            <a:schemeClr val="accent1"/>
+          </a:fillRef>
+          <a:effectRef idx="1">
+            <a:schemeClr val="accent1"/>
+          </a:effectRef>
+          <a:fontRef idx="minor">
+            <a:schemeClr val="tx1"/>
+          </a:fontRef>
+        </p:style>
+      </p:cxnSp>
+      <p:sp>
+        <p:nvSpPr>
+          <p:cNvPr id="26" name="テキスト ボックス 25">
+            <a:extLst>
+              <a:ext uri="{FF2B5EF4-FFF2-40B4-BE49-F238E27FC236}">
+                <a16:creationId xmlns:a16="http://schemas.microsoft.com/office/drawing/2014/main" id="{90DF3549-828A-2A4F-A256-00A7C43C9721}"/>
+              </a:ext>
+            </a:extLst>
+          </p:cNvPr>
+          <p:cNvSpPr txBox="1"/>
+          <p:nvPr/>
+        </p:nvSpPr>
+        <p:spPr>
+          <a:xfrm>
+            <a:off x="6202447" y="4874120"/>
+            <a:ext cx="606256" cy="230832"/>
+          </a:xfrm>
+          <a:prstGeom prst="rect">
+            <a:avLst/>
+          </a:prstGeom>
+          <a:noFill/>
+        </p:spPr>
+        <p:txBody>
+          <a:bodyPr wrap="none" rtlCol="0">
+            <a:spAutoFit/>
+          </a:bodyPr>
+          <a:lstStyle/>
+          <a:p>
+            <a:r>
+              <a:rPr kumimoji="1" lang="en-US" altLang="ja-JP" sz="900" b="1" dirty="0"/>
+              <a:t>GIS-DB</a:t>
+            </a:r>
+            <a:endParaRPr kumimoji="1" lang="ja-JP" altLang="en-US" sz="900" b="1"/>
+          </a:p>
+        </p:txBody>
+      </p:sp>
+      <p:sp>
+        <p:nvSpPr>
+          <p:cNvPr id="27" name="テキスト ボックス 26">
+            <a:extLst>
+              <a:ext uri="{FF2B5EF4-FFF2-40B4-BE49-F238E27FC236}">
+                <a16:creationId xmlns:a16="http://schemas.microsoft.com/office/drawing/2014/main" id="{70B3758A-D1CF-CED4-919A-4D9976EC39E6}"/>
+              </a:ext>
+            </a:extLst>
+          </p:cNvPr>
+          <p:cNvSpPr txBox="1"/>
+          <p:nvPr/>
+        </p:nvSpPr>
+        <p:spPr>
+          <a:xfrm>
+            <a:off x="6157197" y="3177239"/>
+            <a:ext cx="761747" cy="230832"/>
+          </a:xfrm>
+          <a:prstGeom prst="rect">
+            <a:avLst/>
+          </a:prstGeom>
+          <a:noFill/>
+        </p:spPr>
+        <p:txBody>
+          <a:bodyPr wrap="none" rtlCol="0">
+            <a:spAutoFit/>
+          </a:bodyPr>
+          <a:lstStyle/>
+          <a:p>
+            <a:r>
+              <a:rPr lang="ja-JP" altLang="en-US" sz="900" b="1"/>
+              <a:t>リポジトリ</a:t>
+            </a:r>
+            <a:endParaRPr kumimoji="1" lang="ja-JP" altLang="en-US" sz="900" b="1"/>
+          </a:p>
+        </p:txBody>
+      </p:sp>
+      <p:sp>
+        <p:nvSpPr>
+          <p:cNvPr id="29" name="テキスト ボックス 28">
+            <a:extLst>
+              <a:ext uri="{FF2B5EF4-FFF2-40B4-BE49-F238E27FC236}">
+                <a16:creationId xmlns:a16="http://schemas.microsoft.com/office/drawing/2014/main" id="{FA05B1CF-7873-2E1D-EAF1-79ABB206A432}"/>
+              </a:ext>
+            </a:extLst>
+          </p:cNvPr>
+          <p:cNvSpPr txBox="1"/>
+          <p:nvPr/>
+        </p:nvSpPr>
+        <p:spPr>
+          <a:xfrm>
+            <a:off x="5966554" y="2612624"/>
+            <a:ext cx="1107996" cy="230832"/>
+          </a:xfrm>
+          <a:prstGeom prst="rect">
+            <a:avLst/>
+          </a:prstGeom>
+          <a:noFill/>
+        </p:spPr>
+        <p:txBody>
+          <a:bodyPr wrap="none" rtlCol="0">
+            <a:spAutoFit/>
+          </a:bodyPr>
+          <a:lstStyle/>
+          <a:p>
+            <a:r>
+              <a:rPr lang="ja-JP" altLang="en-US" sz="900" b="1"/>
+              <a:t>データリポジトリ</a:t>
+            </a:r>
+            <a:endParaRPr kumimoji="1" lang="ja-JP" altLang="en-US" sz="900" b="1"/>
+          </a:p>
+        </p:txBody>
+      </p:sp>
+      <p:sp>
+        <p:nvSpPr>
+          <p:cNvPr id="30" name="テキスト ボックス 29">
+            <a:extLst>
+              <a:ext uri="{FF2B5EF4-FFF2-40B4-BE49-F238E27FC236}">
+                <a16:creationId xmlns:a16="http://schemas.microsoft.com/office/drawing/2014/main" id="{44F4FE9E-3B69-C9B9-CE97-3674CC107591}"/>
+              </a:ext>
+            </a:extLst>
+          </p:cNvPr>
+          <p:cNvSpPr txBox="1"/>
+          <p:nvPr/>
+        </p:nvSpPr>
+        <p:spPr>
+          <a:xfrm>
+            <a:off x="5930285" y="3728604"/>
+            <a:ext cx="1339264" cy="369332"/>
+          </a:xfrm>
+          <a:prstGeom prst="rect">
+            <a:avLst/>
+          </a:prstGeom>
+          <a:noFill/>
+        </p:spPr>
+        <p:txBody>
+          <a:bodyPr wrap="square" rtlCol="0">
+            <a:spAutoFit/>
+          </a:bodyPr>
+          <a:lstStyle/>
+          <a:p>
+            <a:r>
+              <a:rPr kumimoji="1" lang="ja-JP" altLang="en-US" sz="900" b="1"/>
+              <a:t>有体物管理</a:t>
+            </a:r>
+            <a:r>
+              <a:rPr kumimoji="1" lang="en-US" altLang="ja-JP" sz="900" b="1" dirty="0"/>
+              <a:t>/</a:t>
+            </a:r>
+            <a:r>
+              <a:rPr kumimoji="1" lang="ja-JP" altLang="en-US" sz="900" b="1"/>
+              <a:t>トラッキングシステム</a:t>
+            </a:r>
+          </a:p>
+        </p:txBody>
+      </p:sp>
+      <p:sp>
+        <p:nvSpPr>
+          <p:cNvPr id="33" name="正方形/長方形 32">
+            <a:extLst>
+              <a:ext uri="{FF2B5EF4-FFF2-40B4-BE49-F238E27FC236}">
+                <a16:creationId xmlns:a16="http://schemas.microsoft.com/office/drawing/2014/main" id="{13A155A1-037C-B649-3B82-3F39D53647BF}"/>
+              </a:ext>
+            </a:extLst>
+          </p:cNvPr>
+          <p:cNvSpPr/>
+          <p:nvPr/>
+        </p:nvSpPr>
+        <p:spPr>
+          <a:xfrm>
+            <a:off x="6247769" y="5248804"/>
+            <a:ext cx="545566" cy="217074"/>
+          </a:xfrm>
+          <a:prstGeom prst="rect">
+            <a:avLst/>
+          </a:prstGeom>
+          <a:ln>
+            <a:noFill/>
+          </a:ln>
+        </p:spPr>
+        <p:style>
+          <a:lnRef idx="2">
+            <a:schemeClr val="accent1">
+              <a:shade val="15000"/>
+            </a:schemeClr>
+          </a:lnRef>
+          <a:fillRef idx="1">
+            <a:schemeClr val="accent1"/>
+          </a:fillRef>
+          <a:effectRef idx="0">
+            <a:schemeClr val="accent1"/>
+          </a:effectRef>
+          <a:fontRef idx="minor">
+            <a:schemeClr val="lt1"/>
+          </a:fontRef>
+        </p:style>
+        <p:txBody>
+          <a:bodyPr rtlCol="0" anchor="ctr"/>
+          <a:lstStyle/>
+          <a:p>
+            <a:pPr algn="dist"/>
+            <a:endParaRPr kumimoji="1" lang="ja-JP" altLang="en-US"/>
+          </a:p>
+        </p:txBody>
+      </p:sp>
+      <p:sp>
+        <p:nvSpPr>
+          <p:cNvPr id="34" name="テキスト ボックス 33">
+            <a:extLst>
+              <a:ext uri="{FF2B5EF4-FFF2-40B4-BE49-F238E27FC236}">
+                <a16:creationId xmlns:a16="http://schemas.microsoft.com/office/drawing/2014/main" id="{7AFF7B36-8FFF-CCB7-0148-5EF02340171D}"/>
+              </a:ext>
+            </a:extLst>
+          </p:cNvPr>
+          <p:cNvSpPr txBox="1"/>
+          <p:nvPr/>
+        </p:nvSpPr>
+        <p:spPr>
+          <a:xfrm>
+            <a:off x="6148730" y="5451979"/>
+            <a:ext cx="761747" cy="230832"/>
+          </a:xfrm>
+          <a:prstGeom prst="rect">
+            <a:avLst/>
+          </a:prstGeom>
+          <a:noFill/>
+        </p:spPr>
+        <p:txBody>
+          <a:bodyPr wrap="none" rtlCol="0">
+            <a:spAutoFit/>
+          </a:bodyPr>
+          <a:lstStyle/>
+          <a:p>
+            <a:r>
+              <a:rPr kumimoji="1" lang="ja-JP" altLang="en-US" sz="900" b="1"/>
+              <a:t>キーワード</a:t>
+            </a:r>
+          </a:p>
+        </p:txBody>
+      </p:sp>
+      <p:cxnSp>
+        <p:nvCxnSpPr>
+          <p:cNvPr id="35" name="直線矢印コネクタ 34">
+            <a:extLst>
+              <a:ext uri="{FF2B5EF4-FFF2-40B4-BE49-F238E27FC236}">
+                <a16:creationId xmlns:a16="http://schemas.microsoft.com/office/drawing/2014/main" id="{DD29DF84-9AB8-0525-0F97-A3505B35D41A}"/>
+              </a:ext>
+            </a:extLst>
+          </p:cNvPr>
+          <p:cNvCxnSpPr>
+            <a:cxnSpLocks/>
+            <a:stCxn id="6" idx="5"/>
+            <a:endCxn id="33" idx="1"/>
+          </p:cNvCxnSpPr>
+          <p:nvPr/>
+        </p:nvCxnSpPr>
+        <p:spPr>
+          <a:xfrm>
+            <a:off x="3909182" y="4813785"/>
+            <a:ext cx="2338587" cy="543556"/>
+          </a:xfrm>
+          <a:prstGeom prst="straightConnector1">
+            <a:avLst/>
+          </a:prstGeom>
+          <a:ln>
+            <a:solidFill>
+              <a:schemeClr val="accent1"/>
+            </a:solidFill>
+            <a:prstDash val="dash"/>
+            <a:headEnd type="triangle"/>
+            <a:tailEnd type="none"/>
+          </a:ln>
+        </p:spPr>
+        <p:style>
+          <a:lnRef idx="2">
+            <a:schemeClr val="accent1"/>
+          </a:lnRef>
+          <a:fillRef idx="0">
+            <a:schemeClr val="accent1"/>
+          </a:fillRef>
+          <a:effectRef idx="1">
+            <a:schemeClr val="accent1"/>
+          </a:effectRef>
+          <a:fontRef idx="minor">
+            <a:schemeClr val="tx1"/>
+          </a:fontRef>
+        </p:style>
+      </p:cxnSp>
+      <p:cxnSp>
+        <p:nvCxnSpPr>
+          <p:cNvPr id="40" name="直線矢印コネクタ 39">
+            <a:extLst>
+              <a:ext uri="{FF2B5EF4-FFF2-40B4-BE49-F238E27FC236}">
+                <a16:creationId xmlns:a16="http://schemas.microsoft.com/office/drawing/2014/main" id="{A78239F1-DDF8-321C-4528-2DC938C47D6A}"/>
+              </a:ext>
+            </a:extLst>
+          </p:cNvPr>
+          <p:cNvCxnSpPr>
+            <a:cxnSpLocks/>
+            <a:stCxn id="64" idx="3"/>
+            <a:endCxn id="45" idx="1"/>
+          </p:cNvCxnSpPr>
+          <p:nvPr/>
+        </p:nvCxnSpPr>
+        <p:spPr>
+          <a:xfrm>
+            <a:off x="5591853" y="3793049"/>
+            <a:ext cx="648232" cy="430439"/>
+          </a:xfrm>
+          <a:prstGeom prst="straightConnector1">
+            <a:avLst/>
+          </a:prstGeom>
+          <a:ln>
+            <a:solidFill>
+              <a:schemeClr val="accent1"/>
+            </a:solidFill>
+            <a:headEnd type="none"/>
+            <a:tailEnd type="triangle"/>
+          </a:ln>
+        </p:spPr>
+        <p:style>
+          <a:lnRef idx="2">
+            <a:schemeClr val="accent1"/>
+          </a:lnRef>
+          <a:fillRef idx="0">
+            <a:schemeClr val="accent1"/>
+          </a:fillRef>
+          <a:effectRef idx="1">
+            <a:schemeClr val="accent1"/>
+          </a:effectRef>
+          <a:fontRef idx="minor">
+            <a:schemeClr val="tx1"/>
+          </a:fontRef>
+        </p:style>
+      </p:cxnSp>
+      <p:cxnSp>
+        <p:nvCxnSpPr>
+          <p:cNvPr id="48" name="直線矢印コネクタ 47">
+            <a:extLst>
+              <a:ext uri="{FF2B5EF4-FFF2-40B4-BE49-F238E27FC236}">
+                <a16:creationId xmlns:a16="http://schemas.microsoft.com/office/drawing/2014/main" id="{662079C7-C183-6037-8370-388AF8B41591}"/>
+              </a:ext>
+            </a:extLst>
+          </p:cNvPr>
+          <p:cNvCxnSpPr>
+            <a:cxnSpLocks/>
+            <a:stCxn id="64" idx="3"/>
+            <a:endCxn id="44" idx="1"/>
+          </p:cNvCxnSpPr>
+          <p:nvPr/>
+        </p:nvCxnSpPr>
+        <p:spPr>
+          <a:xfrm flipV="1">
+            <a:off x="5591853" y="3656561"/>
+            <a:ext cx="648232" cy="136488"/>
+          </a:xfrm>
+          <a:prstGeom prst="straightConnector1">
+            <a:avLst/>
+          </a:prstGeom>
+          <a:ln>
+            <a:solidFill>
+              <a:schemeClr val="accent1"/>
+            </a:solidFill>
+            <a:headEnd type="none"/>
+            <a:tailEnd type="triangle"/>
+          </a:ln>
+        </p:spPr>
+        <p:style>
+          <a:lnRef idx="2">
+            <a:schemeClr val="accent1"/>
+          </a:lnRef>
+          <a:fillRef idx="0">
+            <a:schemeClr val="accent1"/>
+          </a:fillRef>
+          <a:effectRef idx="1">
+            <a:schemeClr val="accent1"/>
+          </a:effectRef>
+          <a:fontRef idx="minor">
+            <a:schemeClr val="tx1"/>
+          </a:fontRef>
+        </p:style>
+      </p:cxnSp>
+      <p:cxnSp>
+        <p:nvCxnSpPr>
+          <p:cNvPr id="52" name="直線矢印コネクタ 51">
+            <a:extLst>
+              <a:ext uri="{FF2B5EF4-FFF2-40B4-BE49-F238E27FC236}">
+                <a16:creationId xmlns:a16="http://schemas.microsoft.com/office/drawing/2014/main" id="{E0FACB78-1C9D-0191-5BD9-AB4CED585529}"/>
+              </a:ext>
+            </a:extLst>
+          </p:cNvPr>
+          <p:cNvCxnSpPr>
+            <a:cxnSpLocks/>
+            <a:stCxn id="64" idx="3"/>
+            <a:endCxn id="43" idx="1"/>
+          </p:cNvCxnSpPr>
+          <p:nvPr/>
+        </p:nvCxnSpPr>
+        <p:spPr>
+          <a:xfrm flipV="1">
+            <a:off x="5591853" y="3089634"/>
+            <a:ext cx="648232" cy="703415"/>
+          </a:xfrm>
+          <a:prstGeom prst="straightConnector1">
+            <a:avLst/>
+          </a:prstGeom>
+          <a:ln>
+            <a:solidFill>
+              <a:schemeClr val="accent1"/>
+            </a:solidFill>
+            <a:headEnd type="none"/>
+            <a:tailEnd type="triangle"/>
+          </a:ln>
+        </p:spPr>
+        <p:style>
+          <a:lnRef idx="2">
+            <a:schemeClr val="accent1"/>
+          </a:lnRef>
+          <a:fillRef idx="0">
+            <a:schemeClr val="accent1"/>
+          </a:fillRef>
+          <a:effectRef idx="1">
+            <a:schemeClr val="accent1"/>
+          </a:effectRef>
+          <a:fontRef idx="minor">
+            <a:schemeClr val="tx1"/>
+          </a:fontRef>
+        </p:style>
+      </p:cxnSp>
+      <p:sp>
+        <p:nvSpPr>
+          <p:cNvPr id="55" name="正方形/長方形 54">
+            <a:extLst>
+              <a:ext uri="{FF2B5EF4-FFF2-40B4-BE49-F238E27FC236}">
+                <a16:creationId xmlns:a16="http://schemas.microsoft.com/office/drawing/2014/main" id="{B2D94356-3479-21B9-D493-F68DCC5F2E19}"/>
+              </a:ext>
+            </a:extLst>
+          </p:cNvPr>
+          <p:cNvSpPr/>
+          <p:nvPr/>
+        </p:nvSpPr>
+        <p:spPr>
+          <a:xfrm>
+            <a:off x="6247769" y="2414170"/>
+            <a:ext cx="545566" cy="217074"/>
+          </a:xfrm>
+          <a:prstGeom prst="rect">
+            <a:avLst/>
+          </a:prstGeom>
+          <a:ln>
+            <a:noFill/>
+          </a:ln>
+        </p:spPr>
+        <p:style>
+          <a:lnRef idx="2">
+            <a:schemeClr val="accent1">
+              <a:shade val="15000"/>
+            </a:schemeClr>
+          </a:lnRef>
+          <a:fillRef idx="1">
+            <a:schemeClr val="accent1"/>
+          </a:fillRef>
+          <a:effectRef idx="0">
+            <a:schemeClr val="accent1"/>
+          </a:effectRef>
+          <a:fontRef idx="minor">
+            <a:schemeClr val="lt1"/>
+          </a:fontRef>
+        </p:style>
+        <p:txBody>
+          <a:bodyPr rtlCol="0" anchor="ctr"/>
+          <a:lstStyle/>
+          <a:p>
+            <a:pPr algn="dist"/>
+            <a:endParaRPr kumimoji="1" lang="ja-JP" altLang="en-US"/>
+          </a:p>
+        </p:txBody>
+      </p:sp>
+      <p:sp>
+        <p:nvSpPr>
+          <p:cNvPr id="56" name="テキスト ボックス 55">
+            <a:extLst>
+              <a:ext uri="{FF2B5EF4-FFF2-40B4-BE49-F238E27FC236}">
+                <a16:creationId xmlns:a16="http://schemas.microsoft.com/office/drawing/2014/main" id="{3D31EE9E-8391-D571-9F54-0ED6E55C4F4B}"/>
+              </a:ext>
+            </a:extLst>
+          </p:cNvPr>
+          <p:cNvSpPr txBox="1"/>
+          <p:nvPr/>
+        </p:nvSpPr>
+        <p:spPr>
+          <a:xfrm>
+            <a:off x="6101789" y="4306622"/>
+            <a:ext cx="761747" cy="230832"/>
+          </a:xfrm>
+          <a:prstGeom prst="rect">
+            <a:avLst/>
+          </a:prstGeom>
+          <a:noFill/>
+        </p:spPr>
+        <p:txBody>
+          <a:bodyPr wrap="none" rtlCol="0">
+            <a:spAutoFit/>
+          </a:bodyPr>
+          <a:lstStyle/>
+          <a:p>
+            <a:r>
+              <a:rPr kumimoji="1" lang="ja-JP" altLang="en-US" sz="900" b="1"/>
+              <a:t>研究者一覧</a:t>
+            </a:r>
+          </a:p>
+        </p:txBody>
+      </p:sp>
+      <p:cxnSp>
+        <p:nvCxnSpPr>
+          <p:cNvPr id="57" name="直線矢印コネクタ 56">
+            <a:extLst>
+              <a:ext uri="{FF2B5EF4-FFF2-40B4-BE49-F238E27FC236}">
+                <a16:creationId xmlns:a16="http://schemas.microsoft.com/office/drawing/2014/main" id="{CDFA28E6-03CD-25E0-EEC3-1BBAA5E9F54B}"/>
+              </a:ext>
+            </a:extLst>
+          </p:cNvPr>
+          <p:cNvCxnSpPr>
+            <a:cxnSpLocks/>
+            <a:stCxn id="64" idx="3"/>
+            <a:endCxn id="55" idx="1"/>
+          </p:cNvCxnSpPr>
+          <p:nvPr/>
+        </p:nvCxnSpPr>
+        <p:spPr>
+          <a:xfrm flipV="1">
+            <a:off x="5591853" y="2522707"/>
+            <a:ext cx="655916" cy="1270342"/>
+          </a:xfrm>
+          <a:prstGeom prst="straightConnector1">
+            <a:avLst/>
+          </a:prstGeom>
+          <a:ln>
+            <a:solidFill>
+              <a:schemeClr val="accent1"/>
+            </a:solidFill>
+            <a:headEnd type="none"/>
+            <a:tailEnd type="triangle"/>
+          </a:ln>
+        </p:spPr>
+        <p:style>
+          <a:lnRef idx="2">
+            <a:schemeClr val="accent1"/>
+          </a:lnRef>
+          <a:fillRef idx="0">
+            <a:schemeClr val="accent1"/>
+          </a:fillRef>
+          <a:effectRef idx="1">
+            <a:schemeClr val="accent1"/>
+          </a:effectRef>
+          <a:fontRef idx="minor">
+            <a:schemeClr val="tx1"/>
+          </a:fontRef>
+        </p:style>
+      </p:cxnSp>
+      <p:sp>
+        <p:nvSpPr>
+          <p:cNvPr id="63" name="テキスト ボックス 62">
+            <a:extLst>
+              <a:ext uri="{FF2B5EF4-FFF2-40B4-BE49-F238E27FC236}">
+                <a16:creationId xmlns:a16="http://schemas.microsoft.com/office/drawing/2014/main" id="{C74FFDD1-D0DE-4584-78B4-F02BED78858A}"/>
+              </a:ext>
+            </a:extLst>
+          </p:cNvPr>
+          <p:cNvSpPr txBox="1"/>
+          <p:nvPr/>
+        </p:nvSpPr>
+        <p:spPr>
+          <a:xfrm rot="16200000">
+            <a:off x="7284876" y="4432635"/>
+            <a:ext cx="2263329" cy="338554"/>
+          </a:xfrm>
+          <a:prstGeom prst="rect">
+            <a:avLst/>
+          </a:prstGeom>
+          <a:noFill/>
+          <a:ln w="25400">
+            <a:solidFill>
+              <a:schemeClr val="accent6"/>
+            </a:solidFill>
+          </a:ln>
+        </p:spPr>
+        <p:txBody>
+          <a:bodyPr wrap="square" rtlCol="0">
+            <a:spAutoFit/>
+          </a:bodyPr>
+          <a:lstStyle/>
+          <a:p>
+            <a:pPr algn="ctr"/>
+            <a:r>
+              <a:rPr lang="ja-JP" altLang="en-US" sz="1600"/>
+              <a:t>検索</a:t>
+            </a:r>
+            <a:r>
+              <a:rPr kumimoji="1" lang="ja-JP" altLang="en-US" sz="1600"/>
+              <a:t>インターフェイス</a:t>
+            </a:r>
+          </a:p>
+        </p:txBody>
+      </p:sp>
+      <p:sp>
+        <p:nvSpPr>
+          <p:cNvPr id="64" name="正方形/長方形 63">
+            <a:extLst>
+              <a:ext uri="{FF2B5EF4-FFF2-40B4-BE49-F238E27FC236}">
+                <a16:creationId xmlns:a16="http://schemas.microsoft.com/office/drawing/2014/main" id="{5F88876E-6797-ECCF-E712-F30129D14406}"/>
+              </a:ext>
+            </a:extLst>
+          </p:cNvPr>
+          <p:cNvSpPr/>
+          <p:nvPr/>
+        </p:nvSpPr>
+        <p:spPr>
+          <a:xfrm>
+            <a:off x="5046287" y="3684512"/>
+            <a:ext cx="545566" cy="217074"/>
+          </a:xfrm>
+          <a:prstGeom prst="rect">
+            <a:avLst/>
+          </a:prstGeom>
+          <a:ln>
+            <a:noFill/>
+          </a:ln>
+        </p:spPr>
+        <p:style>
+          <a:lnRef idx="2">
+            <a:schemeClr val="accent1">
+              <a:shade val="15000"/>
+            </a:schemeClr>
+          </a:lnRef>
+          <a:fillRef idx="1">
+            <a:schemeClr val="accent1"/>
+          </a:fillRef>
+          <a:effectRef idx="0">
+            <a:schemeClr val="accent1"/>
+          </a:effectRef>
+          <a:fontRef idx="minor">
+            <a:schemeClr val="lt1"/>
+          </a:fontRef>
+        </p:style>
+        <p:txBody>
+          <a:bodyPr rtlCol="0" anchor="ctr"/>
+          <a:lstStyle/>
+          <a:p>
+            <a:pPr algn="ctr"/>
+            <a:endParaRPr kumimoji="1" lang="ja-JP" altLang="en-US"/>
+          </a:p>
+        </p:txBody>
+      </p:sp>
+      <p:sp>
+        <p:nvSpPr>
+          <p:cNvPr id="65" name="テキスト ボックス 64">
+            <a:extLst>
+              <a:ext uri="{FF2B5EF4-FFF2-40B4-BE49-F238E27FC236}">
+                <a16:creationId xmlns:a16="http://schemas.microsoft.com/office/drawing/2014/main" id="{6F7D2C07-401C-325F-0C21-FE82D13F142A}"/>
+              </a:ext>
+            </a:extLst>
+          </p:cNvPr>
+          <p:cNvSpPr txBox="1"/>
+          <p:nvPr/>
+        </p:nvSpPr>
+        <p:spPr>
+          <a:xfrm>
+            <a:off x="4833393" y="3909954"/>
+            <a:ext cx="1003801" cy="230832"/>
+          </a:xfrm>
+          <a:prstGeom prst="rect">
+            <a:avLst/>
+          </a:prstGeom>
+          <a:noFill/>
+        </p:spPr>
+        <p:txBody>
+          <a:bodyPr wrap="none" rtlCol="0">
+            <a:spAutoFit/>
+          </a:bodyPr>
+          <a:lstStyle/>
+          <a:p>
+            <a:r>
+              <a:rPr lang="en-US" altLang="ja-JP" sz="900" b="1" dirty="0"/>
+              <a:t>ID</a:t>
+            </a:r>
+            <a:r>
+              <a:rPr lang="ja-JP" altLang="en-US" sz="900" b="1"/>
+              <a:t>管理システム</a:t>
+            </a:r>
+            <a:endParaRPr kumimoji="1" lang="ja-JP" altLang="en-US" sz="900" b="1"/>
+          </a:p>
+        </p:txBody>
+      </p:sp>
+      <p:cxnSp>
+        <p:nvCxnSpPr>
+          <p:cNvPr id="66" name="直線矢印コネクタ 65">
+            <a:extLst>
+              <a:ext uri="{FF2B5EF4-FFF2-40B4-BE49-F238E27FC236}">
+                <a16:creationId xmlns:a16="http://schemas.microsoft.com/office/drawing/2014/main" id="{ED6C6265-A098-2F32-9E00-6DA55683A045}"/>
+              </a:ext>
+            </a:extLst>
+          </p:cNvPr>
+          <p:cNvCxnSpPr>
+            <a:cxnSpLocks/>
+            <a:stCxn id="14" idx="5"/>
+            <a:endCxn id="64" idx="1"/>
+          </p:cNvCxnSpPr>
+          <p:nvPr/>
+        </p:nvCxnSpPr>
+        <p:spPr>
+          <a:xfrm flipV="1">
+            <a:off x="2389478" y="3793049"/>
+            <a:ext cx="2656809" cy="729119"/>
+          </a:xfrm>
+          <a:prstGeom prst="straightConnector1">
+            <a:avLst/>
+          </a:prstGeom>
+          <a:ln w="12700">
+            <a:tailEnd type="triangle"/>
+          </a:ln>
+        </p:spPr>
+        <p:style>
+          <a:lnRef idx="2">
+            <a:schemeClr val="accent1"/>
+          </a:lnRef>
+          <a:fillRef idx="0">
+            <a:schemeClr val="accent1"/>
+          </a:fillRef>
+          <a:effectRef idx="1">
+            <a:schemeClr val="accent1"/>
+          </a:effectRef>
+          <a:fontRef idx="minor">
+            <a:schemeClr val="tx1"/>
+          </a:fontRef>
+        </p:style>
+      </p:cxnSp>
+      <p:cxnSp>
+        <p:nvCxnSpPr>
+          <p:cNvPr id="69" name="直線矢印コネクタ 68">
+            <a:extLst>
+              <a:ext uri="{FF2B5EF4-FFF2-40B4-BE49-F238E27FC236}">
+                <a16:creationId xmlns:a16="http://schemas.microsoft.com/office/drawing/2014/main" id="{B4324383-F2BB-41B6-73B1-5A2F93E3F328}"/>
+              </a:ext>
+            </a:extLst>
+          </p:cNvPr>
+          <p:cNvCxnSpPr>
+            <a:cxnSpLocks/>
+            <a:stCxn id="6" idx="5"/>
+            <a:endCxn id="64" idx="1"/>
+          </p:cNvCxnSpPr>
+          <p:nvPr/>
+        </p:nvCxnSpPr>
+        <p:spPr>
+          <a:xfrm flipV="1">
+            <a:off x="3909182" y="3793049"/>
+            <a:ext cx="1137105" cy="1020736"/>
+          </a:xfrm>
+          <a:prstGeom prst="straightConnector1">
+            <a:avLst/>
+          </a:prstGeom>
+          <a:ln w="12700">
+            <a:tailEnd type="triangle"/>
+          </a:ln>
+        </p:spPr>
+        <p:style>
+          <a:lnRef idx="2">
+            <a:schemeClr val="accent1"/>
+          </a:lnRef>
+          <a:fillRef idx="0">
+            <a:schemeClr val="accent1"/>
+          </a:fillRef>
+          <a:effectRef idx="1">
+            <a:schemeClr val="accent1"/>
+          </a:effectRef>
+          <a:fontRef idx="minor">
+            <a:schemeClr val="tx1"/>
+          </a:fontRef>
+        </p:style>
+      </p:cxnSp>
+      <p:cxnSp>
+        <p:nvCxnSpPr>
+          <p:cNvPr id="73" name="直線矢印コネクタ 72">
+            <a:extLst>
+              <a:ext uri="{FF2B5EF4-FFF2-40B4-BE49-F238E27FC236}">
+                <a16:creationId xmlns:a16="http://schemas.microsoft.com/office/drawing/2014/main" id="{C8216C54-AB85-2C17-BE14-95FE7B5AD5C3}"/>
+              </a:ext>
+            </a:extLst>
+          </p:cNvPr>
+          <p:cNvCxnSpPr>
+            <a:cxnSpLocks/>
+            <a:stCxn id="12" idx="5"/>
+            <a:endCxn id="64" idx="1"/>
+          </p:cNvCxnSpPr>
+          <p:nvPr/>
+        </p:nvCxnSpPr>
+        <p:spPr>
+          <a:xfrm>
+            <a:off x="2384022" y="3037694"/>
+            <a:ext cx="2662265" cy="755355"/>
+          </a:xfrm>
+          <a:prstGeom prst="straightConnector1">
+            <a:avLst/>
+          </a:prstGeom>
+          <a:ln w="12700">
+            <a:tailEnd type="triangle"/>
+          </a:ln>
+        </p:spPr>
+        <p:style>
+          <a:lnRef idx="2">
+            <a:schemeClr val="accent1"/>
+          </a:lnRef>
+          <a:fillRef idx="0">
+            <a:schemeClr val="accent1"/>
+          </a:fillRef>
+          <a:effectRef idx="1">
+            <a:schemeClr val="accent1"/>
+          </a:effectRef>
+          <a:fontRef idx="minor">
+            <a:schemeClr val="tx1"/>
+          </a:fontRef>
+        </p:style>
+      </p:cxnSp>
+      <p:cxnSp>
+        <p:nvCxnSpPr>
+          <p:cNvPr id="76" name="直線矢印コネクタ 75">
+            <a:extLst>
+              <a:ext uri="{FF2B5EF4-FFF2-40B4-BE49-F238E27FC236}">
+                <a16:creationId xmlns:a16="http://schemas.microsoft.com/office/drawing/2014/main" id="{33370EFA-D949-504D-D0AD-DD8614D396C2}"/>
+              </a:ext>
+            </a:extLst>
+          </p:cNvPr>
+          <p:cNvCxnSpPr>
+            <a:cxnSpLocks/>
+            <a:stCxn id="17" idx="5"/>
+            <a:endCxn id="64" idx="1"/>
+          </p:cNvCxnSpPr>
+          <p:nvPr/>
+        </p:nvCxnSpPr>
+        <p:spPr>
+          <a:xfrm flipV="1">
+            <a:off x="3893813" y="3793049"/>
+            <a:ext cx="1152474" cy="286856"/>
+          </a:xfrm>
+          <a:prstGeom prst="straightConnector1">
+            <a:avLst/>
+          </a:prstGeom>
+          <a:ln w="12700">
+            <a:tailEnd type="triangle"/>
+          </a:ln>
+        </p:spPr>
+        <p:style>
+          <a:lnRef idx="2">
+            <a:schemeClr val="accent1"/>
+          </a:lnRef>
+          <a:fillRef idx="0">
+            <a:schemeClr val="accent1"/>
+          </a:fillRef>
+          <a:effectRef idx="1">
+            <a:schemeClr val="accent1"/>
+          </a:effectRef>
+          <a:fontRef idx="minor">
+            <a:schemeClr val="tx1"/>
+          </a:fontRef>
+        </p:style>
+      </p:cxnSp>
+      <p:cxnSp>
+        <p:nvCxnSpPr>
+          <p:cNvPr id="79" name="直線矢印コネクタ 78">
+            <a:extLst>
+              <a:ext uri="{FF2B5EF4-FFF2-40B4-BE49-F238E27FC236}">
+                <a16:creationId xmlns:a16="http://schemas.microsoft.com/office/drawing/2014/main" id="{88002BDE-4CA1-7AD5-FEA8-900926411C9F}"/>
+              </a:ext>
+            </a:extLst>
+          </p:cNvPr>
+          <p:cNvCxnSpPr>
+            <a:cxnSpLocks/>
+            <a:stCxn id="7" idx="5"/>
+            <a:endCxn id="64" idx="1"/>
+          </p:cNvCxnSpPr>
+          <p:nvPr/>
+        </p:nvCxnSpPr>
+        <p:spPr>
+          <a:xfrm>
+            <a:off x="3901497" y="3346025"/>
+            <a:ext cx="1144790" cy="447024"/>
+          </a:xfrm>
+          <a:prstGeom prst="straightConnector1">
+            <a:avLst/>
+          </a:prstGeom>
+          <a:ln w="12700">
+            <a:tailEnd type="triangle"/>
+          </a:ln>
+        </p:spPr>
+        <p:style>
+          <a:lnRef idx="2">
+            <a:schemeClr val="accent1"/>
+          </a:lnRef>
+          <a:fillRef idx="0">
+            <a:schemeClr val="accent1"/>
+          </a:fillRef>
+          <a:effectRef idx="1">
+            <a:schemeClr val="accent1"/>
+          </a:effectRef>
+          <a:fontRef idx="minor">
+            <a:schemeClr val="tx1"/>
+          </a:fontRef>
+        </p:style>
+      </p:cxnSp>
+      <p:sp>
+        <p:nvSpPr>
+          <p:cNvPr id="84" name="テキスト ボックス 83">
+            <a:extLst>
+              <a:ext uri="{FF2B5EF4-FFF2-40B4-BE49-F238E27FC236}">
+                <a16:creationId xmlns:a16="http://schemas.microsoft.com/office/drawing/2014/main" id="{9109A06E-88EC-3EF0-78FF-507AC7BFF9AF}"/>
+              </a:ext>
+            </a:extLst>
+          </p:cNvPr>
+          <p:cNvSpPr txBox="1"/>
+          <p:nvPr/>
+        </p:nvSpPr>
+        <p:spPr>
+          <a:xfrm rot="16200000">
+            <a:off x="6490055" y="3674588"/>
+            <a:ext cx="2236510" cy="584775"/>
+          </a:xfrm>
+          <a:prstGeom prst="rect">
+            <a:avLst/>
+          </a:prstGeom>
+          <a:noFill/>
+        </p:spPr>
+        <p:txBody>
+          <a:bodyPr wrap="none" rtlCol="0">
+            <a:spAutoFit/>
+          </a:bodyPr>
+          <a:lstStyle/>
+          <a:p>
+            <a:pPr algn="ctr"/>
+            <a:r>
+              <a:rPr kumimoji="1" lang="ja-JP" altLang="en-US" sz="1600"/>
+              <a:t>コントロールプレーン</a:t>
+            </a:r>
+            <a:endParaRPr kumimoji="1" lang="en-US" altLang="ja-JP" sz="1600" dirty="0"/>
+          </a:p>
+          <a:p>
+            <a:pPr algn="ctr"/>
+            <a:r>
+              <a:rPr lang="en-US" altLang="ja-JP" sz="1600" dirty="0" err="1"/>
+              <a:t>IaC</a:t>
+            </a:r>
+            <a:endParaRPr kumimoji="1" lang="ja-JP" altLang="en-US" sz="1600"/>
+          </a:p>
+        </p:txBody>
+      </p:sp>
+      <p:sp>
+        <p:nvSpPr>
+          <p:cNvPr id="86" name="テキスト ボックス 85">
+            <a:extLst>
+              <a:ext uri="{FF2B5EF4-FFF2-40B4-BE49-F238E27FC236}">
+                <a16:creationId xmlns:a16="http://schemas.microsoft.com/office/drawing/2014/main" id="{F566B24F-D629-30F3-5E96-66B24E06A755}"/>
+              </a:ext>
+            </a:extLst>
+          </p:cNvPr>
+          <p:cNvSpPr txBox="1"/>
+          <p:nvPr/>
+        </p:nvSpPr>
+        <p:spPr>
+          <a:xfrm>
+            <a:off x="8854832" y="5191378"/>
+            <a:ext cx="902811" cy="307777"/>
+          </a:xfrm>
+          <a:prstGeom prst="rect">
+            <a:avLst/>
+          </a:prstGeom>
+          <a:noFill/>
+        </p:spPr>
+        <p:txBody>
+          <a:bodyPr wrap="none" rtlCol="0">
+            <a:spAutoFit/>
+          </a:bodyPr>
+          <a:lstStyle/>
+          <a:p>
+            <a:r>
+              <a:rPr lang="ja-JP" altLang="en-US" sz="1400"/>
+              <a:t>ユーザー</a:t>
+            </a:r>
+            <a:endParaRPr kumimoji="1" lang="ja-JP" altLang="en-US" sz="1400"/>
+          </a:p>
+        </p:txBody>
+      </p:sp>
+      <p:cxnSp>
+        <p:nvCxnSpPr>
+          <p:cNvPr id="22" name="直線矢印コネクタ 21">
+            <a:extLst>
+              <a:ext uri="{FF2B5EF4-FFF2-40B4-BE49-F238E27FC236}">
+                <a16:creationId xmlns:a16="http://schemas.microsoft.com/office/drawing/2014/main" id="{16BC3222-42E3-19FF-723F-F8D4C471F0A2}"/>
+              </a:ext>
+            </a:extLst>
+          </p:cNvPr>
+          <p:cNvCxnSpPr>
+            <a:cxnSpLocks/>
+          </p:cNvCxnSpPr>
+          <p:nvPr/>
+        </p:nvCxnSpPr>
+        <p:spPr>
+          <a:xfrm>
+            <a:off x="4669717" y="2504284"/>
+            <a:ext cx="4141757" cy="0"/>
+          </a:xfrm>
+          <a:prstGeom prst="straightConnector1">
+            <a:avLst/>
+          </a:prstGeom>
+          <a:ln>
+            <a:solidFill>
+              <a:schemeClr val="accent2">
+                <a:alpha val="40341"/>
+              </a:schemeClr>
+            </a:solidFill>
+            <a:tailEnd type="triangle"/>
+          </a:ln>
+        </p:spPr>
+        <p:style>
+          <a:lnRef idx="2">
+            <a:schemeClr val="accent1"/>
+          </a:lnRef>
+          <a:fillRef idx="0">
+            <a:schemeClr val="accent1"/>
+          </a:fillRef>
+          <a:effectRef idx="1">
+            <a:schemeClr val="accent1"/>
+          </a:effectRef>
+          <a:fontRef idx="minor">
+            <a:schemeClr val="tx1"/>
+          </a:fontRef>
+        </p:style>
+      </p:cxnSp>
+      <p:sp>
+        <p:nvSpPr>
+          <p:cNvPr id="24" name="テキスト ボックス 23">
+            <a:extLst>
+              <a:ext uri="{FF2B5EF4-FFF2-40B4-BE49-F238E27FC236}">
+                <a16:creationId xmlns:a16="http://schemas.microsoft.com/office/drawing/2014/main" id="{520825EE-6CA1-EDDE-9C14-E91FB8717488}"/>
+              </a:ext>
+            </a:extLst>
+          </p:cNvPr>
+          <p:cNvSpPr txBox="1"/>
+          <p:nvPr/>
+        </p:nvSpPr>
+        <p:spPr>
+          <a:xfrm>
+            <a:off x="8811474" y="2325808"/>
+            <a:ext cx="2216619" cy="830997"/>
+          </a:xfrm>
+          <a:prstGeom prst="rect">
+            <a:avLst/>
+          </a:prstGeom>
+          <a:noFill/>
+        </p:spPr>
+        <p:txBody>
+          <a:bodyPr wrap="square" rtlCol="0">
+            <a:spAutoFit/>
+          </a:bodyPr>
+          <a:lstStyle/>
+          <a:p>
+            <a:r>
+              <a:rPr kumimoji="1" lang="en-US" altLang="ja-JP" sz="1200" dirty="0" err="1"/>
+              <a:t>KGdump</a:t>
+            </a:r>
+            <a:r>
+              <a:rPr kumimoji="1" lang="ja-JP" altLang="en-US" sz="1200" dirty="0" err="1"/>
+              <a:t>：</a:t>
+            </a:r>
+            <a:endParaRPr lang="en-US" altLang="ja-JP" sz="1200" dirty="0"/>
+          </a:p>
+          <a:p>
+            <a:r>
+              <a:rPr lang="ja-JP" altLang="en-US" sz="1200"/>
+              <a:t>ローカル</a:t>
+            </a:r>
+            <a:r>
+              <a:rPr lang="en-US" altLang="ja-JP" sz="1200" dirty="0"/>
+              <a:t>KG</a:t>
+            </a:r>
+            <a:r>
+              <a:rPr lang="ja-JP" altLang="en-US" sz="1200" dirty="0"/>
+              <a:t>の</a:t>
+            </a:r>
+            <a:r>
+              <a:rPr lang="en-US" altLang="ja-JP" sz="1200" dirty="0"/>
+              <a:t>join/</a:t>
+            </a:r>
+            <a:r>
+              <a:rPr lang="ja-JP" altLang="en-US" sz="1200" dirty="0"/>
+              <a:t>共通システムコード</a:t>
+            </a:r>
+            <a:r>
+              <a:rPr lang="ja-JP" altLang="en-US" sz="1200"/>
+              <a:t>により組織を越えたグローバル</a:t>
+            </a:r>
+            <a:r>
+              <a:rPr lang="en-US" altLang="ja-JP" sz="1200" dirty="0"/>
+              <a:t>KG</a:t>
+            </a:r>
+            <a:r>
+              <a:rPr lang="ja-JP" altLang="en-US" sz="1200"/>
+              <a:t>を構築可能</a:t>
+            </a:r>
+            <a:endParaRPr kumimoji="1" lang="ja-JP" altLang="en-US" sz="1200"/>
+          </a:p>
+        </p:txBody>
+      </p:sp>
+      <p:sp>
+        <p:nvSpPr>
+          <p:cNvPr id="32" name="テキスト ボックス 31">
+            <a:extLst>
+              <a:ext uri="{FF2B5EF4-FFF2-40B4-BE49-F238E27FC236}">
+                <a16:creationId xmlns:a16="http://schemas.microsoft.com/office/drawing/2014/main" id="{89EA5591-90EA-5D0C-DA01-73BF71A5B3DC}"/>
+              </a:ext>
+            </a:extLst>
+          </p:cNvPr>
+          <p:cNvSpPr txBox="1"/>
+          <p:nvPr/>
+        </p:nvSpPr>
+        <p:spPr>
+          <a:xfrm rot="16200000">
+            <a:off x="7804664" y="2670530"/>
+            <a:ext cx="1225670" cy="338554"/>
+          </a:xfrm>
+          <a:prstGeom prst="rect">
+            <a:avLst/>
+          </a:prstGeom>
+          <a:noFill/>
+          <a:ln w="25400">
+            <a:solidFill>
+              <a:schemeClr val="accent6"/>
+            </a:solidFill>
+          </a:ln>
+        </p:spPr>
+        <p:txBody>
+          <a:bodyPr wrap="square" rtlCol="0">
+            <a:spAutoFit/>
+          </a:bodyPr>
+          <a:lstStyle/>
+          <a:p>
+            <a:pPr algn="ctr"/>
+            <a:r>
+              <a:rPr kumimoji="1" lang="ja-JP" altLang="en-US" sz="1600"/>
+              <a:t>データ公開</a:t>
+            </a:r>
+          </a:p>
+        </p:txBody>
+      </p:sp>
+      <p:cxnSp>
+        <p:nvCxnSpPr>
+          <p:cNvPr id="37" name="直線矢印コネクタ 36">
+            <a:extLst>
+              <a:ext uri="{FF2B5EF4-FFF2-40B4-BE49-F238E27FC236}">
+                <a16:creationId xmlns:a16="http://schemas.microsoft.com/office/drawing/2014/main" id="{5A686D82-585C-63CC-F31A-CCE177EF3684}"/>
+              </a:ext>
+            </a:extLst>
+          </p:cNvPr>
+          <p:cNvCxnSpPr>
+            <a:cxnSpLocks/>
+            <a:stCxn id="17" idx="5"/>
+            <a:endCxn id="33" idx="1"/>
+          </p:cNvCxnSpPr>
+          <p:nvPr/>
+        </p:nvCxnSpPr>
+        <p:spPr>
+          <a:xfrm>
+            <a:off x="3893813" y="4079905"/>
+            <a:ext cx="2353956" cy="1277436"/>
+          </a:xfrm>
+          <a:prstGeom prst="straightConnector1">
+            <a:avLst/>
+          </a:prstGeom>
+          <a:ln>
+            <a:solidFill>
+              <a:schemeClr val="accent1"/>
+            </a:solidFill>
+            <a:prstDash val="dash"/>
+            <a:headEnd type="triangle"/>
+            <a:tailEnd type="none"/>
+          </a:ln>
+        </p:spPr>
+        <p:style>
+          <a:lnRef idx="2">
+            <a:schemeClr val="accent1"/>
+          </a:lnRef>
+          <a:fillRef idx="0">
+            <a:schemeClr val="accent1"/>
+          </a:fillRef>
+          <a:effectRef idx="1">
+            <a:schemeClr val="accent1"/>
+          </a:effectRef>
+          <a:fontRef idx="minor">
+            <a:schemeClr val="tx1"/>
+          </a:fontRef>
+        </p:style>
+      </p:cxnSp>
+      <p:cxnSp>
+        <p:nvCxnSpPr>
+          <p:cNvPr id="47" name="直線矢印コネクタ 46">
+            <a:extLst>
+              <a:ext uri="{FF2B5EF4-FFF2-40B4-BE49-F238E27FC236}">
+                <a16:creationId xmlns:a16="http://schemas.microsoft.com/office/drawing/2014/main" id="{91432928-46E7-E676-C2EA-4FE9EE1E50A3}"/>
+              </a:ext>
+            </a:extLst>
+          </p:cNvPr>
+          <p:cNvCxnSpPr>
+            <a:cxnSpLocks/>
+            <a:stCxn id="7" idx="5"/>
+            <a:endCxn id="33" idx="1"/>
+          </p:cNvCxnSpPr>
+          <p:nvPr/>
+        </p:nvCxnSpPr>
+        <p:spPr>
+          <a:xfrm>
+            <a:off x="3901497" y="3346025"/>
+            <a:ext cx="2346272" cy="2011316"/>
+          </a:xfrm>
+          <a:prstGeom prst="straightConnector1">
+            <a:avLst/>
+          </a:prstGeom>
+          <a:ln>
+            <a:solidFill>
+              <a:schemeClr val="accent1"/>
+            </a:solidFill>
+            <a:prstDash val="dash"/>
+            <a:headEnd type="triangle"/>
+            <a:tailEnd type="none"/>
+          </a:ln>
+        </p:spPr>
+        <p:style>
+          <a:lnRef idx="2">
+            <a:schemeClr val="accent1"/>
+          </a:lnRef>
+          <a:fillRef idx="0">
+            <a:schemeClr val="accent1"/>
+          </a:fillRef>
+          <a:effectRef idx="1">
+            <a:schemeClr val="accent1"/>
+          </a:effectRef>
+          <a:fontRef idx="minor">
+            <a:schemeClr val="tx1"/>
+          </a:fontRef>
+        </p:style>
+      </p:cxnSp>
+      <p:cxnSp>
+        <p:nvCxnSpPr>
+          <p:cNvPr id="51" name="直線矢印コネクタ 50">
+            <a:extLst>
+              <a:ext uri="{FF2B5EF4-FFF2-40B4-BE49-F238E27FC236}">
+                <a16:creationId xmlns:a16="http://schemas.microsoft.com/office/drawing/2014/main" id="{F6308237-ABE1-76FB-8A39-2040FCAE278C}"/>
+              </a:ext>
+            </a:extLst>
+          </p:cNvPr>
+          <p:cNvCxnSpPr>
+            <a:cxnSpLocks/>
+            <a:stCxn id="14" idx="5"/>
+            <a:endCxn id="33" idx="1"/>
+          </p:cNvCxnSpPr>
+          <p:nvPr/>
+        </p:nvCxnSpPr>
+        <p:spPr>
+          <a:xfrm>
+            <a:off x="2389478" y="4522168"/>
+            <a:ext cx="3858291" cy="835173"/>
+          </a:xfrm>
+          <a:prstGeom prst="straightConnector1">
+            <a:avLst/>
+          </a:prstGeom>
+          <a:ln>
+            <a:solidFill>
+              <a:schemeClr val="accent1"/>
+            </a:solidFill>
+            <a:prstDash val="dash"/>
+            <a:headEnd type="triangle"/>
+            <a:tailEnd type="none"/>
+          </a:ln>
+        </p:spPr>
+        <p:style>
+          <a:lnRef idx="2">
+            <a:schemeClr val="accent1"/>
+          </a:lnRef>
+          <a:fillRef idx="0">
+            <a:schemeClr val="accent1"/>
+          </a:fillRef>
+          <a:effectRef idx="1">
+            <a:schemeClr val="accent1"/>
+          </a:effectRef>
+          <a:fontRef idx="minor">
+            <a:schemeClr val="tx1"/>
+          </a:fontRef>
+        </p:style>
+      </p:cxnSp>
+      <p:cxnSp>
+        <p:nvCxnSpPr>
+          <p:cNvPr id="54" name="直線矢印コネクタ 53">
+            <a:extLst>
+              <a:ext uri="{FF2B5EF4-FFF2-40B4-BE49-F238E27FC236}">
+                <a16:creationId xmlns:a16="http://schemas.microsoft.com/office/drawing/2014/main" id="{1B2A1F37-CE47-118F-6858-D2492051AB43}"/>
+              </a:ext>
+            </a:extLst>
+          </p:cNvPr>
+          <p:cNvCxnSpPr>
+            <a:cxnSpLocks/>
+            <a:endCxn id="86" idx="1"/>
+          </p:cNvCxnSpPr>
+          <p:nvPr/>
+        </p:nvCxnSpPr>
+        <p:spPr>
+          <a:xfrm>
+            <a:off x="4669717" y="5344592"/>
+            <a:ext cx="4185115" cy="675"/>
+          </a:xfrm>
+          <a:prstGeom prst="straightConnector1">
+            <a:avLst/>
+          </a:prstGeom>
+          <a:ln>
+            <a:solidFill>
+              <a:schemeClr val="accent2">
+                <a:alpha val="40341"/>
+              </a:schemeClr>
+            </a:solidFill>
+            <a:tailEnd type="triangle"/>
+          </a:ln>
+        </p:spPr>
+        <p:style>
+          <a:lnRef idx="2">
+            <a:schemeClr val="accent1"/>
+          </a:lnRef>
+          <a:fillRef idx="0">
+            <a:schemeClr val="accent1"/>
+          </a:fillRef>
+          <a:effectRef idx="1">
+            <a:schemeClr val="accent1"/>
+          </a:effectRef>
+          <a:fontRef idx="minor">
+            <a:schemeClr val="tx1"/>
+          </a:fontRef>
+        </p:style>
+      </p:cxnSp>
+      <p:cxnSp>
+        <p:nvCxnSpPr>
+          <p:cNvPr id="77" name="カギ線コネクタ 76">
+            <a:extLst>
+              <a:ext uri="{FF2B5EF4-FFF2-40B4-BE49-F238E27FC236}">
+                <a16:creationId xmlns:a16="http://schemas.microsoft.com/office/drawing/2014/main" id="{BF7BE7ED-FBAA-345B-E17F-2BC245484681}"/>
+              </a:ext>
+            </a:extLst>
+          </p:cNvPr>
+          <p:cNvCxnSpPr>
+            <a:stCxn id="84" idx="2"/>
+            <a:endCxn id="24" idx="1"/>
+          </p:cNvCxnSpPr>
+          <p:nvPr/>
+        </p:nvCxnSpPr>
+        <p:spPr>
+          <a:xfrm flipV="1">
+            <a:off x="7900698" y="2741307"/>
+            <a:ext cx="910776" cy="1225669"/>
+          </a:xfrm>
+          <a:prstGeom prst="bentConnector3">
+            <a:avLst>
+              <a:gd name="adj1" fmla="val 18393"/>
+            </a:avLst>
+          </a:prstGeom>
+          <a:ln>
+            <a:solidFill>
+              <a:schemeClr val="accent2">
+                <a:alpha val="40341"/>
+              </a:schemeClr>
+            </a:solidFill>
+            <a:tailEnd type="triangle"/>
+          </a:ln>
+        </p:spPr>
+        <p:style>
+          <a:lnRef idx="2">
+            <a:schemeClr val="accent1"/>
+          </a:lnRef>
+          <a:fillRef idx="0">
+            <a:schemeClr val="accent1"/>
+          </a:fillRef>
+          <a:effectRef idx="1">
+            <a:schemeClr val="accent1"/>
+          </a:effectRef>
+          <a:fontRef idx="minor">
+            <a:schemeClr val="tx1"/>
+          </a:fontRef>
+        </p:style>
+      </p:cxnSp>
+      <p:sp>
+        <p:nvSpPr>
+          <p:cNvPr id="16" name="円/楕円 15">
+            <a:extLst>
+              <a:ext uri="{FF2B5EF4-FFF2-40B4-BE49-F238E27FC236}">
+                <a16:creationId xmlns:a16="http://schemas.microsoft.com/office/drawing/2014/main" id="{52C3509D-1975-1856-D9C5-CA2516F58814}"/>
+              </a:ext>
+            </a:extLst>
+          </p:cNvPr>
+          <p:cNvSpPr/>
+          <p:nvPr/>
+        </p:nvSpPr>
+        <p:spPr>
+          <a:xfrm>
+            <a:off x="2194921" y="3594647"/>
+            <a:ext cx="215153" cy="217074"/>
+          </a:xfrm>
+          <a:prstGeom prst="ellipse">
+            <a:avLst/>
+          </a:prstGeom>
+          <a:solidFill>
+            <a:schemeClr val="accent1"/>
+          </a:solidFill>
+          <a:ln>
+            <a:noFill/>
+          </a:ln>
+        </p:spPr>
+        <p:style>
+          <a:lnRef idx="2">
+            <a:schemeClr val="accent1">
+              <a:shade val="15000"/>
+            </a:schemeClr>
+          </a:lnRef>
+          <a:fillRef idx="1">
+            <a:schemeClr val="accent1"/>
+          </a:fillRef>
+          <a:effectRef idx="0">
+            <a:schemeClr val="accent1"/>
+          </a:effectRef>
+          <a:fontRef idx="minor">
+            <a:schemeClr val="lt1"/>
+          </a:fontRef>
+        </p:style>
+        <p:txBody>
+          <a:bodyPr rtlCol="0" anchor="ctr"/>
+          <a:lstStyle/>
+          <a:p>
+            <a:pPr algn="ctr"/>
+            <a:endParaRPr kumimoji="1" lang="ja-JP" altLang="en-US"/>
+          </a:p>
+        </p:txBody>
+      </p:sp>
+      <p:sp>
+        <p:nvSpPr>
+          <p:cNvPr id="41" name="テキスト ボックス 40">
+            <a:extLst>
+              <a:ext uri="{FF2B5EF4-FFF2-40B4-BE49-F238E27FC236}">
+                <a16:creationId xmlns:a16="http://schemas.microsoft.com/office/drawing/2014/main" id="{F67C7438-FED7-9FA2-2C2D-83B0FA1EC204}"/>
+              </a:ext>
+            </a:extLst>
+          </p:cNvPr>
+          <p:cNvSpPr txBox="1"/>
+          <p:nvPr/>
+        </p:nvSpPr>
+        <p:spPr>
+          <a:xfrm>
+            <a:off x="2100716" y="3082645"/>
+            <a:ext cx="415498" cy="230832"/>
+          </a:xfrm>
+          <a:prstGeom prst="rect">
+            <a:avLst/>
+          </a:prstGeom>
+          <a:noFill/>
+        </p:spPr>
+        <p:txBody>
+          <a:bodyPr wrap="none" rtlCol="0">
+            <a:spAutoFit/>
+          </a:bodyPr>
+          <a:lstStyle/>
+          <a:p>
+            <a:r>
+              <a:rPr kumimoji="1" lang="ja-JP" altLang="en-US" sz="900" b="1"/>
+              <a:t>作者</a:t>
+            </a:r>
+          </a:p>
+        </p:txBody>
+      </p:sp>
+      <p:cxnSp>
+        <p:nvCxnSpPr>
+          <p:cNvPr id="49" name="直線矢印コネクタ 48">
+            <a:extLst>
+              <a:ext uri="{FF2B5EF4-FFF2-40B4-BE49-F238E27FC236}">
+                <a16:creationId xmlns:a16="http://schemas.microsoft.com/office/drawing/2014/main" id="{05139924-27BA-91D8-5D0D-A66590F9A998}"/>
+              </a:ext>
+            </a:extLst>
+          </p:cNvPr>
+          <p:cNvCxnSpPr>
+            <a:cxnSpLocks/>
+            <a:stCxn id="6" idx="2"/>
+            <a:endCxn id="16" idx="6"/>
+          </p:cNvCxnSpPr>
+          <p:nvPr/>
+        </p:nvCxnSpPr>
+        <p:spPr>
+          <a:xfrm flipH="1" flipV="1">
+            <a:off x="2410074" y="3703184"/>
+            <a:ext cx="1315463" cy="1033854"/>
+          </a:xfrm>
+          <a:prstGeom prst="straightConnector1">
+            <a:avLst/>
+          </a:prstGeom>
+          <a:ln>
+            <a:solidFill>
+              <a:schemeClr val="accent2">
+                <a:alpha val="40000"/>
+              </a:schemeClr>
+            </a:solidFill>
+            <a:tailEnd type="triangle"/>
+          </a:ln>
+        </p:spPr>
+        <p:style>
+          <a:lnRef idx="2">
+            <a:schemeClr val="accent1"/>
+          </a:lnRef>
+          <a:fillRef idx="0">
+            <a:schemeClr val="accent1"/>
+          </a:fillRef>
+          <a:effectRef idx="1">
+            <a:schemeClr val="accent1"/>
+          </a:effectRef>
+          <a:fontRef idx="minor">
+            <a:schemeClr val="tx1"/>
+          </a:fontRef>
+        </p:style>
+      </p:cxnSp>
+      <p:cxnSp>
+        <p:nvCxnSpPr>
+          <p:cNvPr id="58" name="直線矢印コネクタ 57">
+            <a:extLst>
+              <a:ext uri="{FF2B5EF4-FFF2-40B4-BE49-F238E27FC236}">
+                <a16:creationId xmlns:a16="http://schemas.microsoft.com/office/drawing/2014/main" id="{203B54E3-BC05-AB74-A20A-4693AB1DA770}"/>
+              </a:ext>
+            </a:extLst>
+          </p:cNvPr>
+          <p:cNvCxnSpPr>
+            <a:cxnSpLocks/>
+            <a:stCxn id="16" idx="5"/>
+            <a:endCxn id="64" idx="1"/>
+          </p:cNvCxnSpPr>
+          <p:nvPr/>
+        </p:nvCxnSpPr>
+        <p:spPr>
+          <a:xfrm>
+            <a:off x="2378566" y="3779931"/>
+            <a:ext cx="2667721" cy="13118"/>
+          </a:xfrm>
+          <a:prstGeom prst="straightConnector1">
+            <a:avLst/>
+          </a:prstGeom>
+          <a:ln w="12700">
+            <a:tailEnd type="triangle"/>
+          </a:ln>
+        </p:spPr>
+        <p:style>
+          <a:lnRef idx="2">
+            <a:schemeClr val="accent1"/>
+          </a:lnRef>
+          <a:fillRef idx="0">
+            <a:schemeClr val="accent1"/>
+          </a:fillRef>
+          <a:effectRef idx="1">
+            <a:schemeClr val="accent1"/>
+          </a:effectRef>
+          <a:fontRef idx="minor">
+            <a:schemeClr val="tx1"/>
+          </a:fontRef>
+        </p:style>
+      </p:cxnSp>
+      <p:cxnSp>
+        <p:nvCxnSpPr>
+          <p:cNvPr id="61" name="直線矢印コネクタ 60">
+            <a:extLst>
+              <a:ext uri="{FF2B5EF4-FFF2-40B4-BE49-F238E27FC236}">
+                <a16:creationId xmlns:a16="http://schemas.microsoft.com/office/drawing/2014/main" id="{6E9A681E-78B3-52C1-51F3-264EB13A3408}"/>
+              </a:ext>
+            </a:extLst>
+          </p:cNvPr>
+          <p:cNvCxnSpPr>
+            <a:cxnSpLocks/>
+            <a:stCxn id="7" idx="2"/>
+            <a:endCxn id="16" idx="6"/>
+          </p:cNvCxnSpPr>
+          <p:nvPr/>
+        </p:nvCxnSpPr>
+        <p:spPr>
+          <a:xfrm flipH="1">
+            <a:off x="2410074" y="3269278"/>
+            <a:ext cx="1307778" cy="433906"/>
+          </a:xfrm>
+          <a:prstGeom prst="straightConnector1">
+            <a:avLst/>
+          </a:prstGeom>
+          <a:ln>
+            <a:solidFill>
+              <a:schemeClr val="accent2">
+                <a:alpha val="40341"/>
+              </a:schemeClr>
+            </a:solidFill>
+            <a:tailEnd type="triangle"/>
+          </a:ln>
+        </p:spPr>
+        <p:style>
+          <a:lnRef idx="2">
+            <a:schemeClr val="accent1"/>
+          </a:lnRef>
+          <a:fillRef idx="0">
+            <a:schemeClr val="accent1"/>
+          </a:fillRef>
+          <a:effectRef idx="1">
+            <a:schemeClr val="accent1"/>
+          </a:effectRef>
+          <a:fontRef idx="minor">
+            <a:schemeClr val="tx1"/>
+          </a:fontRef>
+        </p:style>
+      </p:cxnSp>
+      <p:cxnSp>
+        <p:nvCxnSpPr>
+          <p:cNvPr id="39" name="直線矢印コネクタ 38">
+            <a:extLst>
+              <a:ext uri="{FF2B5EF4-FFF2-40B4-BE49-F238E27FC236}">
+                <a16:creationId xmlns:a16="http://schemas.microsoft.com/office/drawing/2014/main" id="{3199BD58-E7F5-940E-1B61-D000608AAB16}"/>
+              </a:ext>
+            </a:extLst>
+          </p:cNvPr>
+          <p:cNvCxnSpPr>
+            <a:cxnSpLocks/>
+            <a:stCxn id="12" idx="5"/>
+            <a:endCxn id="33" idx="1"/>
+          </p:cNvCxnSpPr>
+          <p:nvPr/>
+        </p:nvCxnSpPr>
+        <p:spPr>
+          <a:xfrm>
+            <a:off x="2384022" y="3037694"/>
+            <a:ext cx="3863747" cy="2319647"/>
+          </a:xfrm>
+          <a:prstGeom prst="straightConnector1">
+            <a:avLst/>
+          </a:prstGeom>
+          <a:ln>
+            <a:solidFill>
+              <a:schemeClr val="accent1"/>
+            </a:solidFill>
+            <a:prstDash val="dash"/>
+            <a:headEnd type="triangle"/>
+            <a:tailEnd type="none"/>
+          </a:ln>
+        </p:spPr>
+        <p:style>
+          <a:lnRef idx="2">
+            <a:schemeClr val="accent1"/>
+          </a:lnRef>
+          <a:fillRef idx="0">
+            <a:schemeClr val="accent1"/>
+          </a:fillRef>
+          <a:effectRef idx="1">
+            <a:schemeClr val="accent1"/>
+          </a:effectRef>
+          <a:fontRef idx="minor">
+            <a:schemeClr val="tx1"/>
+          </a:fontRef>
+        </p:style>
+      </p:cxnSp>
+      <p:cxnSp>
+        <p:nvCxnSpPr>
+          <p:cNvPr id="59" name="直線矢印コネクタ 58">
+            <a:extLst>
+              <a:ext uri="{FF2B5EF4-FFF2-40B4-BE49-F238E27FC236}">
+                <a16:creationId xmlns:a16="http://schemas.microsoft.com/office/drawing/2014/main" id="{5DCFE634-0732-67B6-9D1E-9CE28583057F}"/>
+              </a:ext>
+            </a:extLst>
+          </p:cNvPr>
+          <p:cNvCxnSpPr>
+            <a:cxnSpLocks/>
+            <a:stCxn id="16" idx="5"/>
+            <a:endCxn id="33" idx="1"/>
+          </p:cNvCxnSpPr>
+          <p:nvPr/>
+        </p:nvCxnSpPr>
+        <p:spPr>
+          <a:xfrm>
+            <a:off x="2378566" y="3779931"/>
+            <a:ext cx="3869203" cy="1577410"/>
+          </a:xfrm>
+          <a:prstGeom prst="straightConnector1">
+            <a:avLst/>
+          </a:prstGeom>
+          <a:ln>
+            <a:solidFill>
+              <a:schemeClr val="accent1"/>
+            </a:solidFill>
+            <a:prstDash val="dash"/>
+            <a:headEnd type="triangle"/>
+            <a:tailEnd type="none"/>
+          </a:ln>
+        </p:spPr>
+        <p:style>
+          <a:lnRef idx="2">
+            <a:schemeClr val="accent1"/>
+          </a:lnRef>
+          <a:fillRef idx="0">
+            <a:schemeClr val="accent1"/>
+          </a:fillRef>
+          <a:effectRef idx="1">
+            <a:schemeClr val="accent1"/>
+          </a:effectRef>
+          <a:fontRef idx="minor">
+            <a:schemeClr val="tx1"/>
+          </a:fontRef>
+        </p:style>
+      </p:cxnSp>
+      <p:cxnSp>
+        <p:nvCxnSpPr>
+          <p:cNvPr id="53" name="曲線コネクタ 52">
+            <a:extLst>
+              <a:ext uri="{FF2B5EF4-FFF2-40B4-BE49-F238E27FC236}">
+                <a16:creationId xmlns:a16="http://schemas.microsoft.com/office/drawing/2014/main" id="{215FFF92-90AD-F4F1-CC5E-80DD3CCDD437}"/>
+              </a:ext>
+            </a:extLst>
+          </p:cNvPr>
+          <p:cNvCxnSpPr>
+            <a:cxnSpLocks/>
+            <a:stCxn id="55" idx="3"/>
+            <a:endCxn id="33" idx="3"/>
+          </p:cNvCxnSpPr>
+          <p:nvPr/>
+        </p:nvCxnSpPr>
+        <p:spPr>
+          <a:xfrm>
+            <a:off x="6793335" y="2522707"/>
+            <a:ext cx="12700" cy="2834634"/>
+          </a:xfrm>
+          <a:prstGeom prst="curvedConnector3">
+            <a:avLst>
+              <a:gd name="adj1" fmla="val 1800000"/>
+            </a:avLst>
+          </a:prstGeom>
+          <a:ln w="12700">
+            <a:tailEnd type="triangle"/>
+          </a:ln>
+        </p:spPr>
+        <p:style>
+          <a:lnRef idx="2">
+            <a:schemeClr val="accent1"/>
+          </a:lnRef>
+          <a:fillRef idx="0">
+            <a:schemeClr val="accent1"/>
+          </a:fillRef>
+          <a:effectRef idx="1">
+            <a:schemeClr val="accent1"/>
+          </a:effectRef>
+          <a:fontRef idx="minor">
+            <a:schemeClr val="tx1"/>
+          </a:fontRef>
+        </p:style>
+      </p:cxnSp>
+      <p:cxnSp>
+        <p:nvCxnSpPr>
+          <p:cNvPr id="62" name="曲線コネクタ 61">
+            <a:extLst>
+              <a:ext uri="{FF2B5EF4-FFF2-40B4-BE49-F238E27FC236}">
+                <a16:creationId xmlns:a16="http://schemas.microsoft.com/office/drawing/2014/main" id="{6F9A7081-02FA-525B-2540-FCD6ACD3D9D3}"/>
+              </a:ext>
+            </a:extLst>
+          </p:cNvPr>
+          <p:cNvCxnSpPr>
+            <a:cxnSpLocks/>
+            <a:stCxn id="43" idx="3"/>
+            <a:endCxn id="33" idx="3"/>
+          </p:cNvCxnSpPr>
+          <p:nvPr/>
+        </p:nvCxnSpPr>
+        <p:spPr>
+          <a:xfrm>
+            <a:off x="6785651" y="3089634"/>
+            <a:ext cx="7684" cy="2267707"/>
+          </a:xfrm>
+          <a:prstGeom prst="curvedConnector3">
+            <a:avLst>
+              <a:gd name="adj1" fmla="val 3075013"/>
+            </a:avLst>
+          </a:prstGeom>
+          <a:ln w="12700">
+            <a:tailEnd type="triangle"/>
+          </a:ln>
+        </p:spPr>
+        <p:style>
+          <a:lnRef idx="2">
+            <a:schemeClr val="accent1"/>
+          </a:lnRef>
+          <a:fillRef idx="0">
+            <a:schemeClr val="accent1"/>
+          </a:fillRef>
+          <a:effectRef idx="1">
+            <a:schemeClr val="accent1"/>
+          </a:effectRef>
+          <a:fontRef idx="minor">
+            <a:schemeClr val="tx1"/>
+          </a:fontRef>
+        </p:style>
+      </p:cxnSp>
+      <p:cxnSp>
+        <p:nvCxnSpPr>
+          <p:cNvPr id="70" name="曲線コネクタ 69">
+            <a:extLst>
+              <a:ext uri="{FF2B5EF4-FFF2-40B4-BE49-F238E27FC236}">
+                <a16:creationId xmlns:a16="http://schemas.microsoft.com/office/drawing/2014/main" id="{CD5373D2-1B96-A1E3-4BBC-C8E8323D4592}"/>
+              </a:ext>
+            </a:extLst>
+          </p:cNvPr>
+          <p:cNvCxnSpPr>
+            <a:cxnSpLocks/>
+            <a:stCxn id="44" idx="3"/>
+            <a:endCxn id="33" idx="3"/>
+          </p:cNvCxnSpPr>
+          <p:nvPr/>
+        </p:nvCxnSpPr>
+        <p:spPr>
+          <a:xfrm>
+            <a:off x="6785651" y="3656561"/>
+            <a:ext cx="7684" cy="1700780"/>
+          </a:xfrm>
+          <a:prstGeom prst="curvedConnector3">
+            <a:avLst>
+              <a:gd name="adj1" fmla="val 3075013"/>
+            </a:avLst>
+          </a:prstGeom>
+          <a:ln w="12700">
+            <a:tailEnd type="triangle"/>
+          </a:ln>
+        </p:spPr>
+        <p:style>
+          <a:lnRef idx="2">
+            <a:schemeClr val="accent1"/>
+          </a:lnRef>
+          <a:fillRef idx="0">
+            <a:schemeClr val="accent1"/>
+          </a:fillRef>
+          <a:effectRef idx="1">
+            <a:schemeClr val="accent1"/>
+          </a:effectRef>
+          <a:fontRef idx="minor">
+            <a:schemeClr val="tx1"/>
+          </a:fontRef>
+        </p:style>
+      </p:cxnSp>
+      <p:cxnSp>
+        <p:nvCxnSpPr>
+          <p:cNvPr id="74" name="曲線コネクタ 73">
+            <a:extLst>
+              <a:ext uri="{FF2B5EF4-FFF2-40B4-BE49-F238E27FC236}">
+                <a16:creationId xmlns:a16="http://schemas.microsoft.com/office/drawing/2014/main" id="{A6CE34B1-B50D-6A5A-24F4-164FFE48052B}"/>
+              </a:ext>
+            </a:extLst>
+          </p:cNvPr>
+          <p:cNvCxnSpPr>
+            <a:cxnSpLocks/>
+            <a:stCxn id="45" idx="3"/>
+            <a:endCxn id="33" idx="3"/>
+          </p:cNvCxnSpPr>
+          <p:nvPr/>
+        </p:nvCxnSpPr>
+        <p:spPr>
+          <a:xfrm>
+            <a:off x="6785651" y="4223488"/>
+            <a:ext cx="7684" cy="1133853"/>
+          </a:xfrm>
+          <a:prstGeom prst="curvedConnector3">
+            <a:avLst>
+              <a:gd name="adj1" fmla="val 3075013"/>
+            </a:avLst>
+          </a:prstGeom>
+          <a:ln w="12700">
+            <a:tailEnd type="triangle"/>
+          </a:ln>
+        </p:spPr>
+        <p:style>
+          <a:lnRef idx="2">
+            <a:schemeClr val="accent1"/>
+          </a:lnRef>
+          <a:fillRef idx="0">
+            <a:schemeClr val="accent1"/>
+          </a:fillRef>
+          <a:effectRef idx="1">
+            <a:schemeClr val="accent1"/>
+          </a:effectRef>
+          <a:fontRef idx="minor">
+            <a:schemeClr val="tx1"/>
+          </a:fontRef>
+        </p:style>
+      </p:cxnSp>
+      <p:cxnSp>
+        <p:nvCxnSpPr>
+          <p:cNvPr id="80" name="曲線コネクタ 79">
+            <a:extLst>
+              <a:ext uri="{FF2B5EF4-FFF2-40B4-BE49-F238E27FC236}">
+                <a16:creationId xmlns:a16="http://schemas.microsoft.com/office/drawing/2014/main" id="{26E70205-8263-5C40-D4B2-B49F928ECA94}"/>
+              </a:ext>
+            </a:extLst>
+          </p:cNvPr>
+          <p:cNvCxnSpPr>
+            <a:cxnSpLocks/>
+            <a:stCxn id="46" idx="3"/>
+            <a:endCxn id="33" idx="3"/>
+          </p:cNvCxnSpPr>
+          <p:nvPr/>
+        </p:nvCxnSpPr>
+        <p:spPr>
+          <a:xfrm>
+            <a:off x="6785651" y="4790415"/>
+            <a:ext cx="7684" cy="566926"/>
+          </a:xfrm>
+          <a:prstGeom prst="curvedConnector3">
+            <a:avLst>
+              <a:gd name="adj1" fmla="val 3075013"/>
+            </a:avLst>
+          </a:prstGeom>
+          <a:ln w="12700">
+            <a:tailEnd type="triangle"/>
+          </a:ln>
+        </p:spPr>
+        <p:style>
+          <a:lnRef idx="2">
+            <a:schemeClr val="accent1"/>
+          </a:lnRef>
+          <a:fillRef idx="0">
+            <a:schemeClr val="accent1"/>
+          </a:fillRef>
+          <a:effectRef idx="1">
+            <a:schemeClr val="accent1"/>
+          </a:effectRef>
+          <a:fontRef idx="minor">
+            <a:schemeClr val="tx1"/>
+          </a:fontRef>
+        </p:style>
+      </p:cxnSp>
+    </p:spTree>
+    <p:extLst>
+      <p:ext uri="{BB962C8B-B14F-4D97-AF65-F5344CB8AC3E}">
+        <p14:creationId xmlns:p14="http://schemas.microsoft.com/office/powerpoint/2010/main" val="3688606206"/>
       </p:ext>
     </p:extLst>
   </p:cSld>

--- a/作図.pptx
+++ b/作図.pptx
@@ -261,7 +261,7 @@
           <a:p>
             <a:fld id="{716789AD-CAC3-AD41-B5C9-BF5C62A1889D}" type="datetimeFigureOut">
               <a:rPr kumimoji="1" lang="ja-JP" altLang="en-US" smtClean="0"/>
-              <a:t>2026/4/2</a:t>
+              <a:t>2026/4/6</a:t>
             </a:fld>
             <a:endParaRPr kumimoji="1" lang="ja-JP" altLang="en-US"/>
           </a:p>
@@ -491,7 +491,7 @@
           <a:p>
             <a:fld id="{716789AD-CAC3-AD41-B5C9-BF5C62A1889D}" type="datetimeFigureOut">
               <a:rPr kumimoji="1" lang="ja-JP" altLang="en-US" smtClean="0"/>
-              <a:t>2026/4/2</a:t>
+              <a:t>2026/4/6</a:t>
             </a:fld>
             <a:endParaRPr kumimoji="1" lang="ja-JP" altLang="en-US"/>
           </a:p>
@@ -731,7 +731,7 @@
           <a:p>
             <a:fld id="{716789AD-CAC3-AD41-B5C9-BF5C62A1889D}" type="datetimeFigureOut">
               <a:rPr kumimoji="1" lang="ja-JP" altLang="en-US" smtClean="0"/>
-              <a:t>2026/4/2</a:t>
+              <a:t>2026/4/6</a:t>
             </a:fld>
             <a:endParaRPr kumimoji="1" lang="ja-JP" altLang="en-US"/>
           </a:p>
@@ -961,7 +961,7 @@
           <a:p>
             <a:fld id="{716789AD-CAC3-AD41-B5C9-BF5C62A1889D}" type="datetimeFigureOut">
               <a:rPr kumimoji="1" lang="ja-JP" altLang="en-US" smtClean="0"/>
-              <a:t>2026/4/2</a:t>
+              <a:t>2026/4/6</a:t>
             </a:fld>
             <a:endParaRPr kumimoji="1" lang="ja-JP" altLang="en-US"/>
           </a:p>
@@ -1236,7 +1236,7 @@
           <a:p>
             <a:fld id="{716789AD-CAC3-AD41-B5C9-BF5C62A1889D}" type="datetimeFigureOut">
               <a:rPr kumimoji="1" lang="ja-JP" altLang="en-US" smtClean="0"/>
-              <a:t>2026/4/2</a:t>
+              <a:t>2026/4/6</a:t>
             </a:fld>
             <a:endParaRPr kumimoji="1" lang="ja-JP" altLang="en-US"/>
           </a:p>
@@ -1565,7 +1565,7 @@
           <a:p>
             <a:fld id="{716789AD-CAC3-AD41-B5C9-BF5C62A1889D}" type="datetimeFigureOut">
               <a:rPr kumimoji="1" lang="ja-JP" altLang="en-US" smtClean="0"/>
-              <a:t>2026/4/2</a:t>
+              <a:t>2026/4/6</a:t>
             </a:fld>
             <a:endParaRPr kumimoji="1" lang="ja-JP" altLang="en-US"/>
           </a:p>
@@ -2041,7 +2041,7 @@
           <a:p>
             <a:fld id="{716789AD-CAC3-AD41-B5C9-BF5C62A1889D}" type="datetimeFigureOut">
               <a:rPr kumimoji="1" lang="ja-JP" altLang="en-US" smtClean="0"/>
-              <a:t>2026/4/2</a:t>
+              <a:t>2026/4/6</a:t>
             </a:fld>
             <a:endParaRPr kumimoji="1" lang="ja-JP" altLang="en-US"/>
           </a:p>
@@ -2182,7 +2182,7 @@
           <a:p>
             <a:fld id="{716789AD-CAC3-AD41-B5C9-BF5C62A1889D}" type="datetimeFigureOut">
               <a:rPr kumimoji="1" lang="ja-JP" altLang="en-US" smtClean="0"/>
-              <a:t>2026/4/2</a:t>
+              <a:t>2026/4/6</a:t>
             </a:fld>
             <a:endParaRPr kumimoji="1" lang="ja-JP" altLang="en-US"/>
           </a:p>
@@ -2295,7 +2295,7 @@
           <a:p>
             <a:fld id="{716789AD-CAC3-AD41-B5C9-BF5C62A1889D}" type="datetimeFigureOut">
               <a:rPr kumimoji="1" lang="ja-JP" altLang="en-US" smtClean="0"/>
-              <a:t>2026/4/2</a:t>
+              <a:t>2026/4/6</a:t>
             </a:fld>
             <a:endParaRPr kumimoji="1" lang="ja-JP" altLang="en-US"/>
           </a:p>
@@ -2638,7 +2638,7 @@
           <a:p>
             <a:fld id="{716789AD-CAC3-AD41-B5C9-BF5C62A1889D}" type="datetimeFigureOut">
               <a:rPr kumimoji="1" lang="ja-JP" altLang="en-US" smtClean="0"/>
-              <a:t>2026/4/2</a:t>
+              <a:t>2026/4/6</a:t>
             </a:fld>
             <a:endParaRPr kumimoji="1" lang="ja-JP" altLang="en-US"/>
           </a:p>
@@ -2926,7 +2926,7 @@
           <a:p>
             <a:fld id="{716789AD-CAC3-AD41-B5C9-BF5C62A1889D}" type="datetimeFigureOut">
               <a:rPr kumimoji="1" lang="ja-JP" altLang="en-US" smtClean="0"/>
-              <a:t>2026/4/2</a:t>
+              <a:t>2026/4/6</a:t>
             </a:fld>
             <a:endParaRPr kumimoji="1" lang="ja-JP" altLang="en-US"/>
           </a:p>
@@ -3199,7 +3199,7 @@
           <a:p>
             <a:fld id="{716789AD-CAC3-AD41-B5C9-BF5C62A1889D}" type="datetimeFigureOut">
               <a:rPr kumimoji="1" lang="ja-JP" altLang="en-US" smtClean="0"/>
-              <a:t>2026/4/2</a:t>
+              <a:t>2026/4/6</a:t>
             </a:fld>
             <a:endParaRPr kumimoji="1" lang="ja-JP" altLang="en-US"/>
           </a:p>
@@ -3930,7 +3930,7 @@
         <p:spPr>
           <a:xfrm>
             <a:off x="3814757" y="6203851"/>
-            <a:ext cx="3808818" cy="461665"/>
+            <a:ext cx="3961030" cy="461665"/>
           </a:xfrm>
           <a:prstGeom prst="rect">
             <a:avLst/>

--- a/作図.pptx
+++ b/作図.pptx
@@ -261,7 +261,7 @@
           <a:p>
             <a:fld id="{716789AD-CAC3-AD41-B5C9-BF5C62A1889D}" type="datetimeFigureOut">
               <a:rPr kumimoji="1" lang="ja-JP" altLang="en-US" smtClean="0"/>
-              <a:t>2026/4/6</a:t>
+              <a:t>2026/4/14</a:t>
             </a:fld>
             <a:endParaRPr kumimoji="1" lang="ja-JP" altLang="en-US"/>
           </a:p>
@@ -491,7 +491,7 @@
           <a:p>
             <a:fld id="{716789AD-CAC3-AD41-B5C9-BF5C62A1889D}" type="datetimeFigureOut">
               <a:rPr kumimoji="1" lang="ja-JP" altLang="en-US" smtClean="0"/>
-              <a:t>2026/4/6</a:t>
+              <a:t>2026/4/14</a:t>
             </a:fld>
             <a:endParaRPr kumimoji="1" lang="ja-JP" altLang="en-US"/>
           </a:p>
@@ -731,7 +731,7 @@
           <a:p>
             <a:fld id="{716789AD-CAC3-AD41-B5C9-BF5C62A1889D}" type="datetimeFigureOut">
               <a:rPr kumimoji="1" lang="ja-JP" altLang="en-US" smtClean="0"/>
-              <a:t>2026/4/6</a:t>
+              <a:t>2026/4/14</a:t>
             </a:fld>
             <a:endParaRPr kumimoji="1" lang="ja-JP" altLang="en-US"/>
           </a:p>
@@ -961,7 +961,7 @@
           <a:p>
             <a:fld id="{716789AD-CAC3-AD41-B5C9-BF5C62A1889D}" type="datetimeFigureOut">
               <a:rPr kumimoji="1" lang="ja-JP" altLang="en-US" smtClean="0"/>
-              <a:t>2026/4/6</a:t>
+              <a:t>2026/4/14</a:t>
             </a:fld>
             <a:endParaRPr kumimoji="1" lang="ja-JP" altLang="en-US"/>
           </a:p>
@@ -1236,7 +1236,7 @@
           <a:p>
             <a:fld id="{716789AD-CAC3-AD41-B5C9-BF5C62A1889D}" type="datetimeFigureOut">
               <a:rPr kumimoji="1" lang="ja-JP" altLang="en-US" smtClean="0"/>
-              <a:t>2026/4/6</a:t>
+              <a:t>2026/4/14</a:t>
             </a:fld>
             <a:endParaRPr kumimoji="1" lang="ja-JP" altLang="en-US"/>
           </a:p>
@@ -1565,7 +1565,7 @@
           <a:p>
             <a:fld id="{716789AD-CAC3-AD41-B5C9-BF5C62A1889D}" type="datetimeFigureOut">
               <a:rPr kumimoji="1" lang="ja-JP" altLang="en-US" smtClean="0"/>
-              <a:t>2026/4/6</a:t>
+              <a:t>2026/4/14</a:t>
             </a:fld>
             <a:endParaRPr kumimoji="1" lang="ja-JP" altLang="en-US"/>
           </a:p>
@@ -2041,7 +2041,7 @@
           <a:p>
             <a:fld id="{716789AD-CAC3-AD41-B5C9-BF5C62A1889D}" type="datetimeFigureOut">
               <a:rPr kumimoji="1" lang="ja-JP" altLang="en-US" smtClean="0"/>
-              <a:t>2026/4/6</a:t>
+              <a:t>2026/4/14</a:t>
             </a:fld>
             <a:endParaRPr kumimoji="1" lang="ja-JP" altLang="en-US"/>
           </a:p>
@@ -2182,7 +2182,7 @@
           <a:p>
             <a:fld id="{716789AD-CAC3-AD41-B5C9-BF5C62A1889D}" type="datetimeFigureOut">
               <a:rPr kumimoji="1" lang="ja-JP" altLang="en-US" smtClean="0"/>
-              <a:t>2026/4/6</a:t>
+              <a:t>2026/4/14</a:t>
             </a:fld>
             <a:endParaRPr kumimoji="1" lang="ja-JP" altLang="en-US"/>
           </a:p>
@@ -2295,7 +2295,7 @@
           <a:p>
             <a:fld id="{716789AD-CAC3-AD41-B5C9-BF5C62A1889D}" type="datetimeFigureOut">
               <a:rPr kumimoji="1" lang="ja-JP" altLang="en-US" smtClean="0"/>
-              <a:t>2026/4/6</a:t>
+              <a:t>2026/4/14</a:t>
             </a:fld>
             <a:endParaRPr kumimoji="1" lang="ja-JP" altLang="en-US"/>
           </a:p>
@@ -2638,7 +2638,7 @@
           <a:p>
             <a:fld id="{716789AD-CAC3-AD41-B5C9-BF5C62A1889D}" type="datetimeFigureOut">
               <a:rPr kumimoji="1" lang="ja-JP" altLang="en-US" smtClean="0"/>
-              <a:t>2026/4/6</a:t>
+              <a:t>2026/4/14</a:t>
             </a:fld>
             <a:endParaRPr kumimoji="1" lang="ja-JP" altLang="en-US"/>
           </a:p>
@@ -2926,7 +2926,7 @@
           <a:p>
             <a:fld id="{716789AD-CAC3-AD41-B5C9-BF5C62A1889D}" type="datetimeFigureOut">
               <a:rPr kumimoji="1" lang="ja-JP" altLang="en-US" smtClean="0"/>
-              <a:t>2026/4/6</a:t>
+              <a:t>2026/4/14</a:t>
             </a:fld>
             <a:endParaRPr kumimoji="1" lang="ja-JP" altLang="en-US"/>
           </a:p>
@@ -3199,7 +3199,7 @@
           <a:p>
             <a:fld id="{716789AD-CAC3-AD41-B5C9-BF5C62A1889D}" type="datetimeFigureOut">
               <a:rPr kumimoji="1" lang="ja-JP" altLang="en-US" smtClean="0"/>
-              <a:t>2026/4/6</a:t>
+              <a:t>2026/4/14</a:t>
             </a:fld>
             <a:endParaRPr kumimoji="1" lang="ja-JP" altLang="en-US"/>
           </a:p>
@@ -6197,7 +6197,7 @@
         <p:spPr>
           <a:xfrm>
             <a:off x="8818247" y="2251305"/>
-            <a:ext cx="2216619" cy="830997"/>
+            <a:ext cx="1829433" cy="830997"/>
           </a:xfrm>
           <a:prstGeom prst="rect">
             <a:avLst/>
@@ -6230,20 +6230,8 @@
               <a:t>KG</a:t>
             </a:r>
             <a:r>
-              <a:rPr lang="ja-JP" altLang="en-US" sz="1200" dirty="0"/>
-              <a:t>の</a:t>
-            </a:r>
-            <a:r>
-              <a:rPr lang="en-US" altLang="ja-JP" sz="1200" dirty="0"/>
-              <a:t>join/</a:t>
-            </a:r>
-            <a:r>
-              <a:rPr lang="ja-JP" altLang="en-US" sz="1200" dirty="0"/>
-              <a:t>共通システムコード</a:t>
-            </a:r>
-            <a:r>
               <a:rPr lang="ja-JP" altLang="en-US" sz="1200"/>
-              <a:t>により組織を越えたグローバル</a:t>
+              <a:t>のダンプ、複数</a:t>
             </a:r>
             <a:r>
               <a:rPr lang="en-US" altLang="ja-JP" sz="1200" dirty="0"/>
@@ -6251,7 +6239,15 @@
             </a:r>
             <a:r>
               <a:rPr lang="ja-JP" altLang="en-US" sz="1200"/>
-              <a:t>を構築可能</a:t>
+              <a:t>を</a:t>
+            </a:r>
+            <a:r>
+              <a:rPr lang="en-US" altLang="ja-JP" sz="1200" dirty="0"/>
+              <a:t>join</a:t>
+            </a:r>
+            <a:r>
+              <a:rPr lang="ja-JP" altLang="en-US" sz="1200"/>
+              <a:t>を可能とする</a:t>
             </a:r>
             <a:endParaRPr kumimoji="1" lang="ja-JP" altLang="en-US" sz="1200"/>
           </a:p>
@@ -6497,6 +6493,7 @@
             </a:extLst>
           </p:cNvPr>
           <p:cNvCxnSpPr>
+            <a:cxnSpLocks/>
             <a:stCxn id="84" idx="2"/>
             <a:endCxn id="24" idx="1"/>
           </p:cNvCxnSpPr>
@@ -6509,7 +6506,7 @@
           </a:xfrm>
           <a:prstGeom prst="bentConnector3">
             <a:avLst>
-              <a:gd name="adj1" fmla="val 18393"/>
+              <a:gd name="adj1" fmla="val 21740"/>
             </a:avLst>
           </a:prstGeom>
           <a:ln>

--- a/作図.pptx
+++ b/作図.pptx
@@ -6239,7 +6239,7 @@
             </a:r>
             <a:r>
               <a:rPr lang="ja-JP" altLang="en-US" sz="1200"/>
-              <a:t>を</a:t>
+              <a:t>の</a:t>
             </a:r>
             <a:r>
               <a:rPr lang="en-US" altLang="ja-JP" sz="1200" dirty="0"/>
